--- a/Aula Inicial de CSS em 27-08-2026.pptx
+++ b/Aula Inicial de CSS em 27-08-2026.pptx
@@ -5,72 +5,73 @@
     <p:sldMasterId id="2147483648" r:id="rId1"/>
   </p:sldMasterIdLst>
   <p:sldIdLst>
-    <p:sldId id="256" r:id="rId2"/>
-    <p:sldId id="257" r:id="rId3"/>
-    <p:sldId id="258" r:id="rId4"/>
-    <p:sldId id="259" r:id="rId5"/>
-    <p:sldId id="260" r:id="rId6"/>
-    <p:sldId id="261" r:id="rId7"/>
-    <p:sldId id="262" r:id="rId8"/>
-    <p:sldId id="311" r:id="rId9"/>
-    <p:sldId id="312" r:id="rId10"/>
-    <p:sldId id="263" r:id="rId11"/>
-    <p:sldId id="313" r:id="rId12"/>
-    <p:sldId id="314" r:id="rId13"/>
-    <p:sldId id="315" r:id="rId14"/>
-    <p:sldId id="316" r:id="rId15"/>
-    <p:sldId id="317" r:id="rId16"/>
-    <p:sldId id="318" r:id="rId17"/>
-    <p:sldId id="319" r:id="rId18"/>
-    <p:sldId id="320" r:id="rId19"/>
-    <p:sldId id="321" r:id="rId20"/>
-    <p:sldId id="264" r:id="rId21"/>
-    <p:sldId id="265" r:id="rId22"/>
-    <p:sldId id="266" r:id="rId23"/>
-    <p:sldId id="267" r:id="rId24"/>
-    <p:sldId id="268" r:id="rId25"/>
-    <p:sldId id="269" r:id="rId26"/>
-    <p:sldId id="270" r:id="rId27"/>
-    <p:sldId id="271" r:id="rId28"/>
-    <p:sldId id="272" r:id="rId29"/>
-    <p:sldId id="273" r:id="rId30"/>
-    <p:sldId id="274" r:id="rId31"/>
-    <p:sldId id="275" r:id="rId32"/>
-    <p:sldId id="276" r:id="rId33"/>
-    <p:sldId id="277" r:id="rId34"/>
-    <p:sldId id="278" r:id="rId35"/>
-    <p:sldId id="279" r:id="rId36"/>
-    <p:sldId id="280" r:id="rId37"/>
-    <p:sldId id="281" r:id="rId38"/>
-    <p:sldId id="282" r:id="rId39"/>
-    <p:sldId id="283" r:id="rId40"/>
-    <p:sldId id="284" r:id="rId41"/>
-    <p:sldId id="285" r:id="rId42"/>
-    <p:sldId id="286" r:id="rId43"/>
-    <p:sldId id="287" r:id="rId44"/>
-    <p:sldId id="288" r:id="rId45"/>
-    <p:sldId id="289" r:id="rId46"/>
-    <p:sldId id="290" r:id="rId47"/>
-    <p:sldId id="291" r:id="rId48"/>
-    <p:sldId id="292" r:id="rId49"/>
-    <p:sldId id="293" r:id="rId50"/>
-    <p:sldId id="294" r:id="rId51"/>
-    <p:sldId id="295" r:id="rId52"/>
-    <p:sldId id="296" r:id="rId53"/>
-    <p:sldId id="297" r:id="rId54"/>
-    <p:sldId id="298" r:id="rId55"/>
-    <p:sldId id="299" r:id="rId56"/>
-    <p:sldId id="300" r:id="rId57"/>
-    <p:sldId id="301" r:id="rId58"/>
-    <p:sldId id="302" r:id="rId59"/>
-    <p:sldId id="303" r:id="rId60"/>
-    <p:sldId id="304" r:id="rId61"/>
-    <p:sldId id="305" r:id="rId62"/>
-    <p:sldId id="306" r:id="rId63"/>
-    <p:sldId id="307" r:id="rId64"/>
-    <p:sldId id="308" r:id="rId65"/>
-    <p:sldId id="309" r:id="rId66"/>
-    <p:sldId id="310" r:id="rId67"/>
+    <p:sldId id="322" r:id="rId2"/>
+    <p:sldId id="256" r:id="rId3"/>
+    <p:sldId id="257" r:id="rId4"/>
+    <p:sldId id="258" r:id="rId5"/>
+    <p:sldId id="259" r:id="rId6"/>
+    <p:sldId id="260" r:id="rId7"/>
+    <p:sldId id="261" r:id="rId8"/>
+    <p:sldId id="262" r:id="rId9"/>
+    <p:sldId id="311" r:id="rId10"/>
+    <p:sldId id="312" r:id="rId11"/>
+    <p:sldId id="263" r:id="rId12"/>
+    <p:sldId id="313" r:id="rId13"/>
+    <p:sldId id="314" r:id="rId14"/>
+    <p:sldId id="315" r:id="rId15"/>
+    <p:sldId id="316" r:id="rId16"/>
+    <p:sldId id="317" r:id="rId17"/>
+    <p:sldId id="318" r:id="rId18"/>
+    <p:sldId id="319" r:id="rId19"/>
+    <p:sldId id="320" r:id="rId20"/>
+    <p:sldId id="321" r:id="rId21"/>
+    <p:sldId id="264" r:id="rId22"/>
+    <p:sldId id="265" r:id="rId23"/>
+    <p:sldId id="266" r:id="rId24"/>
+    <p:sldId id="267" r:id="rId25"/>
+    <p:sldId id="268" r:id="rId26"/>
+    <p:sldId id="269" r:id="rId27"/>
+    <p:sldId id="270" r:id="rId28"/>
+    <p:sldId id="271" r:id="rId29"/>
+    <p:sldId id="272" r:id="rId30"/>
+    <p:sldId id="273" r:id="rId31"/>
+    <p:sldId id="274" r:id="rId32"/>
+    <p:sldId id="275" r:id="rId33"/>
+    <p:sldId id="276" r:id="rId34"/>
+    <p:sldId id="277" r:id="rId35"/>
+    <p:sldId id="278" r:id="rId36"/>
+    <p:sldId id="279" r:id="rId37"/>
+    <p:sldId id="280" r:id="rId38"/>
+    <p:sldId id="281" r:id="rId39"/>
+    <p:sldId id="282" r:id="rId40"/>
+    <p:sldId id="283" r:id="rId41"/>
+    <p:sldId id="284" r:id="rId42"/>
+    <p:sldId id="285" r:id="rId43"/>
+    <p:sldId id="286" r:id="rId44"/>
+    <p:sldId id="287" r:id="rId45"/>
+    <p:sldId id="288" r:id="rId46"/>
+    <p:sldId id="289" r:id="rId47"/>
+    <p:sldId id="290" r:id="rId48"/>
+    <p:sldId id="291" r:id="rId49"/>
+    <p:sldId id="292" r:id="rId50"/>
+    <p:sldId id="293" r:id="rId51"/>
+    <p:sldId id="294" r:id="rId52"/>
+    <p:sldId id="295" r:id="rId53"/>
+    <p:sldId id="296" r:id="rId54"/>
+    <p:sldId id="297" r:id="rId55"/>
+    <p:sldId id="298" r:id="rId56"/>
+    <p:sldId id="299" r:id="rId57"/>
+    <p:sldId id="300" r:id="rId58"/>
+    <p:sldId id="301" r:id="rId59"/>
+    <p:sldId id="302" r:id="rId60"/>
+    <p:sldId id="303" r:id="rId61"/>
+    <p:sldId id="304" r:id="rId62"/>
+    <p:sldId id="305" r:id="rId63"/>
+    <p:sldId id="306" r:id="rId64"/>
+    <p:sldId id="307" r:id="rId65"/>
+    <p:sldId id="308" r:id="rId66"/>
+    <p:sldId id="309" r:id="rId67"/>
+    <p:sldId id="310" r:id="rId68"/>
   </p:sldIdLst>
   <p:sldSz cx="12192000" cy="6858000"/>
   <p:notesSz cx="6858000" cy="9144000"/>
@@ -169,6 +170,11 @@
       </a:defRPr>
     </a:lvl9pPr>
   </p:defaultTextStyle>
+  <p:extLst>
+    <p:ext uri="{EFAFB233-063F-42B5-8137-9DF3F51BA10A}">
+      <p15:sldGuideLst xmlns:p15="http://schemas.microsoft.com/office/powerpoint/2012/main"/>
+    </p:ext>
+  </p:extLst>
 </p:presentation>
 </file>
 
@@ -319,7 +325,7 @@
           <a:p>
             <a:fld id="{B0B03658-FBF6-4785-A705-A13708A95F55}" type="datetimeFigureOut">
               <a:rPr lang="pt-BR" smtClean="0"/>
-              <a:t>27/08/2026</a:t>
+              <a:t>28/08/2026</a:t>
             </a:fld>
             <a:endParaRPr lang="pt-BR"/>
           </a:p>
@@ -517,7 +523,7 @@
           <a:p>
             <a:fld id="{B0B03658-FBF6-4785-A705-A13708A95F55}" type="datetimeFigureOut">
               <a:rPr lang="pt-BR" smtClean="0"/>
-              <a:t>27/08/2026</a:t>
+              <a:t>28/08/2026</a:t>
             </a:fld>
             <a:endParaRPr lang="pt-BR"/>
           </a:p>
@@ -725,7 +731,7 @@
           <a:p>
             <a:fld id="{B0B03658-FBF6-4785-A705-A13708A95F55}" type="datetimeFigureOut">
               <a:rPr lang="pt-BR" smtClean="0"/>
-              <a:t>27/08/2026</a:t>
+              <a:t>28/08/2026</a:t>
             </a:fld>
             <a:endParaRPr lang="pt-BR"/>
           </a:p>
@@ -923,7 +929,7 @@
           <a:p>
             <a:fld id="{B0B03658-FBF6-4785-A705-A13708A95F55}" type="datetimeFigureOut">
               <a:rPr lang="pt-BR" smtClean="0"/>
-              <a:t>27/08/2026</a:t>
+              <a:t>28/08/2026</a:t>
             </a:fld>
             <a:endParaRPr lang="pt-BR"/>
           </a:p>
@@ -1198,7 +1204,7 @@
           <a:p>
             <a:fld id="{B0B03658-FBF6-4785-A705-A13708A95F55}" type="datetimeFigureOut">
               <a:rPr lang="pt-BR" smtClean="0"/>
-              <a:t>27/08/2026</a:t>
+              <a:t>28/08/2026</a:t>
             </a:fld>
             <a:endParaRPr lang="pt-BR"/>
           </a:p>
@@ -1463,7 +1469,7 @@
           <a:p>
             <a:fld id="{B0B03658-FBF6-4785-A705-A13708A95F55}" type="datetimeFigureOut">
               <a:rPr lang="pt-BR" smtClean="0"/>
-              <a:t>27/08/2026</a:t>
+              <a:t>28/08/2026</a:t>
             </a:fld>
             <a:endParaRPr lang="pt-BR"/>
           </a:p>
@@ -1875,7 +1881,7 @@
           <a:p>
             <a:fld id="{B0B03658-FBF6-4785-A705-A13708A95F55}" type="datetimeFigureOut">
               <a:rPr lang="pt-BR" smtClean="0"/>
-              <a:t>27/08/2026</a:t>
+              <a:t>28/08/2026</a:t>
             </a:fld>
             <a:endParaRPr lang="pt-BR"/>
           </a:p>
@@ -2016,7 +2022,7 @@
           <a:p>
             <a:fld id="{B0B03658-FBF6-4785-A705-A13708A95F55}" type="datetimeFigureOut">
               <a:rPr lang="pt-BR" smtClean="0"/>
-              <a:t>27/08/2026</a:t>
+              <a:t>28/08/2026</a:t>
             </a:fld>
             <a:endParaRPr lang="pt-BR"/>
           </a:p>
@@ -2129,7 +2135,7 @@
           <a:p>
             <a:fld id="{B0B03658-FBF6-4785-A705-A13708A95F55}" type="datetimeFigureOut">
               <a:rPr lang="pt-BR" smtClean="0"/>
-              <a:t>27/08/2026</a:t>
+              <a:t>28/08/2026</a:t>
             </a:fld>
             <a:endParaRPr lang="pt-BR"/>
           </a:p>
@@ -2440,7 +2446,7 @@
           <a:p>
             <a:fld id="{B0B03658-FBF6-4785-A705-A13708A95F55}" type="datetimeFigureOut">
               <a:rPr lang="pt-BR" smtClean="0"/>
-              <a:t>27/08/2026</a:t>
+              <a:t>28/08/2026</a:t>
             </a:fld>
             <a:endParaRPr lang="pt-BR"/>
           </a:p>
@@ -2728,7 +2734,7 @@
           <a:p>
             <a:fld id="{B0B03658-FBF6-4785-A705-A13708A95F55}" type="datetimeFigureOut">
               <a:rPr lang="pt-BR" smtClean="0"/>
-              <a:t>27/08/2026</a:t>
+              <a:t>28/08/2026</a:t>
             </a:fld>
             <a:endParaRPr lang="pt-BR"/>
           </a:p>
@@ -2969,7 +2975,7 @@
           <a:p>
             <a:fld id="{B0B03658-FBF6-4785-A705-A13708A95F55}" type="datetimeFigureOut">
               <a:rPr lang="pt-BR" smtClean="0"/>
-              <a:t>27/08/2026</a:t>
+              <a:t>28/08/2026</a:t>
             </a:fld>
             <a:endParaRPr lang="pt-BR"/>
           </a:p>
@@ -3388,10 +3394,10 @@
       </p:grpSpPr>
       <p:pic>
         <p:nvPicPr>
-          <p:cNvPr id="4" name="Imagem 3">
-            <a:extLst>
-              <a:ext uri="{FF2B5EF4-FFF2-40B4-BE49-F238E27FC236}">
-                <a16:creationId xmlns:a16="http://schemas.microsoft.com/office/drawing/2014/main" id="{BD6CAB12-58C8-4464-9D76-ECA1FE62696F}"/>
+          <p:cNvPr id="2" name="Imagem 1">
+            <a:extLst>
+              <a:ext uri="{FF2B5EF4-FFF2-40B4-BE49-F238E27FC236}">
+                <a16:creationId xmlns:a16="http://schemas.microsoft.com/office/drawing/2014/main" id="{E387E997-B77F-4CDC-B173-EF01F6B8CE9D}"/>
               </a:ext>
             </a:extLst>
           </p:cNvPr>
@@ -3416,10 +3422,113 @@
           </a:prstGeom>
         </p:spPr>
       </p:pic>
+      <p:cxnSp>
+        <p:nvCxnSpPr>
+          <p:cNvPr id="4" name="Conector de Seta Reta 3">
+            <a:extLst>
+              <a:ext uri="{FF2B5EF4-FFF2-40B4-BE49-F238E27FC236}">
+                <a16:creationId xmlns:a16="http://schemas.microsoft.com/office/drawing/2014/main" id="{762DDD19-E0D9-4B3D-B312-4B1380F02997}"/>
+              </a:ext>
+            </a:extLst>
+          </p:cNvPr>
+          <p:cNvCxnSpPr/>
+          <p:nvPr/>
+        </p:nvCxnSpPr>
+        <p:spPr>
+          <a:xfrm flipH="1">
+            <a:off x="2958353" y="1054249"/>
+            <a:ext cx="645458" cy="322729"/>
+          </a:xfrm>
+          <a:prstGeom prst="straightConnector1">
+            <a:avLst/>
+          </a:prstGeom>
+          <a:ln w="38100">
+            <a:solidFill>
+              <a:srgbClr val="FF0000"/>
+            </a:solidFill>
+            <a:tailEnd type="triangle"/>
+          </a:ln>
+        </p:spPr>
+        <p:style>
+          <a:lnRef idx="1">
+            <a:schemeClr val="accent1"/>
+          </a:lnRef>
+          <a:fillRef idx="0">
+            <a:schemeClr val="accent1"/>
+          </a:fillRef>
+          <a:effectRef idx="0">
+            <a:schemeClr val="accent1"/>
+          </a:effectRef>
+          <a:fontRef idx="minor">
+            <a:schemeClr val="tx1"/>
+          </a:fontRef>
+        </p:style>
+      </p:cxnSp>
+      <p:sp>
+        <p:nvSpPr>
+          <p:cNvPr id="5" name="Elipse 4">
+            <a:extLst>
+              <a:ext uri="{FF2B5EF4-FFF2-40B4-BE49-F238E27FC236}">
+                <a16:creationId xmlns:a16="http://schemas.microsoft.com/office/drawing/2014/main" id="{328AA8BB-2B23-487E-8EB0-B46B9724EE55}"/>
+              </a:ext>
+            </a:extLst>
+          </p:cNvPr>
+          <p:cNvSpPr/>
+          <p:nvPr/>
+        </p:nvSpPr>
+        <p:spPr>
+          <a:xfrm>
+            <a:off x="2022438" y="1215614"/>
+            <a:ext cx="935915" cy="763793"/>
+          </a:xfrm>
+          <a:prstGeom prst="ellipse">
+            <a:avLst/>
+          </a:prstGeom>
+          <a:noFill/>
+          <a:ln w="38100">
+            <a:solidFill>
+              <a:srgbClr val="FF0000"/>
+            </a:solidFill>
+          </a:ln>
+        </p:spPr>
+        <p:style>
+          <a:lnRef idx="2">
+            <a:schemeClr val="accent1">
+              <a:shade val="50000"/>
+            </a:schemeClr>
+          </a:lnRef>
+          <a:fillRef idx="1">
+            <a:schemeClr val="accent1"/>
+          </a:fillRef>
+          <a:effectRef idx="0">
+            <a:schemeClr val="accent1"/>
+          </a:effectRef>
+          <a:fontRef idx="minor">
+            <a:schemeClr val="lt1"/>
+          </a:fontRef>
+        </p:style>
+        <p:txBody>
+          <a:bodyPr rot="0" spcFirstLastPara="0" vertOverflow="overflow" horzOverflow="overflow" vert="horz" wrap="square" lIns="91440" tIns="45720" rIns="91440" bIns="45720" numCol="1" spcCol="0" rtlCol="0" fromWordArt="0" anchor="ctr" anchorCtr="0" forceAA="0" compatLnSpc="1">
+            <a:prstTxWarp prst="textNoShape">
+              <a:avLst/>
+            </a:prstTxWarp>
+            <a:noAutofit/>
+          </a:bodyPr>
+          <a:lstStyle/>
+          <a:p>
+            <a:pPr algn="ctr"/>
+            <a:endParaRPr lang="pt-BR" sz="2400" dirty="0">
+              <a:solidFill>
+                <a:schemeClr val="tx1"/>
+              </a:solidFill>
+            </a:endParaRPr>
+          </a:p>
+        </p:txBody>
+      </p:sp>
     </p:spTree>
     <p:extLst>
       <p:ext uri="{BB962C8B-B14F-4D97-AF65-F5344CB8AC3E}">
-        <p14:creationId xmlns:p14="http://schemas.microsoft.com/office/powerpoint/2010/main" val="3193926057"/>
+        <p14:creationId xmlns:p14="http://schemas.microsoft.com/office/powerpoint/2010/main" val="824072217"/>
       </p:ext>
     </p:extLst>
   </p:cSld>
@@ -3451,7 +3560,7 @@
           <p:cNvPr id="2" name="Imagem 1">
             <a:extLst>
               <a:ext uri="{FF2B5EF4-FFF2-40B4-BE49-F238E27FC236}">
-                <a16:creationId xmlns:a16="http://schemas.microsoft.com/office/drawing/2014/main" id="{8CFBB407-8F81-42FC-8C2D-060D24042ABC}"/>
+                <a16:creationId xmlns:a16="http://schemas.microsoft.com/office/drawing/2014/main" id="{ADC57CD0-EA74-4D33-AAD8-DAC97AB587E8}"/>
               </a:ext>
             </a:extLst>
           </p:cNvPr>
@@ -3468,106 +3577,399 @@
         </p:blipFill>
         <p:spPr>
           <a:xfrm>
-            <a:off x="1662112" y="1000125"/>
-            <a:ext cx="8867775" cy="4857750"/>
+            <a:off x="1658160" y="253350"/>
+            <a:ext cx="8875681" cy="6351300"/>
           </a:xfrm>
           <a:prstGeom prst="rect">
             <a:avLst/>
           </a:prstGeom>
         </p:spPr>
       </p:pic>
-      <p:cxnSp>
-        <p:nvCxnSpPr>
-          <p:cNvPr id="4" name="Conector de Seta Reta 3">
-            <a:extLst>
-              <a:ext uri="{FF2B5EF4-FFF2-40B4-BE49-F238E27FC236}">
-                <a16:creationId xmlns:a16="http://schemas.microsoft.com/office/drawing/2014/main" id="{48DE05A9-5B6F-4BE4-8E45-5B1EA272AB84}"/>
-              </a:ext>
-            </a:extLst>
-          </p:cNvPr>
-          <p:cNvCxnSpPr>
-            <a:cxnSpLocks/>
-          </p:cNvCxnSpPr>
+      <p:sp>
+        <p:nvSpPr>
+          <p:cNvPr id="5" name="Retângulo 4">
+            <a:extLst>
+              <a:ext uri="{FF2B5EF4-FFF2-40B4-BE49-F238E27FC236}">
+                <a16:creationId xmlns:a16="http://schemas.microsoft.com/office/drawing/2014/main" id="{C0664FDA-D969-4C23-87EC-6D305AF47995}"/>
+              </a:ext>
+            </a:extLst>
+          </p:cNvPr>
+          <p:cNvSpPr/>
           <p:nvPr/>
-        </p:nvCxnSpPr>
-        <p:spPr>
-          <a:xfrm>
-            <a:off x="781579" y="2201333"/>
-            <a:ext cx="880533" cy="0"/>
-          </a:xfrm>
-          <a:prstGeom prst="straightConnector1">
-            <a:avLst/>
-          </a:prstGeom>
+        </p:nvSpPr>
+        <p:spPr>
+          <a:xfrm>
+            <a:off x="2929467" y="2252133"/>
+            <a:ext cx="3225800" cy="355600"/>
+          </a:xfrm>
+          <a:prstGeom prst="rect">
+            <a:avLst/>
+          </a:prstGeom>
+          <a:noFill/>
           <a:ln w="38100">
             <a:solidFill>
               <a:srgbClr val="FF0000"/>
             </a:solidFill>
-            <a:tailEnd type="triangle"/>
           </a:ln>
         </p:spPr>
         <p:style>
-          <a:lnRef idx="1">
-            <a:schemeClr val="accent1"/>
+          <a:lnRef idx="2">
+            <a:schemeClr val="accent1">
+              <a:shade val="50000"/>
+            </a:schemeClr>
           </a:lnRef>
-          <a:fillRef idx="0">
+          <a:fillRef idx="1">
             <a:schemeClr val="accent1"/>
           </a:fillRef>
           <a:effectRef idx="0">
             <a:schemeClr val="accent1"/>
           </a:effectRef>
           <a:fontRef idx="minor">
-            <a:schemeClr val="tx1"/>
+            <a:schemeClr val="lt1"/>
           </a:fontRef>
         </p:style>
-      </p:cxnSp>
-      <p:cxnSp>
-        <p:nvCxnSpPr>
-          <p:cNvPr id="6" name="Conector de Seta Reta 5">
-            <a:extLst>
-              <a:ext uri="{FF2B5EF4-FFF2-40B4-BE49-F238E27FC236}">
-                <a16:creationId xmlns:a16="http://schemas.microsoft.com/office/drawing/2014/main" id="{EAFDC71E-90A1-4A1D-A628-2C2267A36F96}"/>
-              </a:ext>
-            </a:extLst>
-          </p:cNvPr>
-          <p:cNvCxnSpPr>
-            <a:cxnSpLocks/>
-          </p:cNvCxnSpPr>
+        <p:txBody>
+          <a:bodyPr rot="0" spcFirstLastPara="0" vertOverflow="overflow" horzOverflow="overflow" vert="horz" wrap="square" lIns="91440" tIns="45720" rIns="91440" bIns="45720" numCol="1" spcCol="0" rtlCol="0" fromWordArt="0" anchor="ctr" anchorCtr="0" forceAA="0" compatLnSpc="1">
+            <a:prstTxWarp prst="textNoShape">
+              <a:avLst/>
+            </a:prstTxWarp>
+            <a:noAutofit/>
+          </a:bodyPr>
+          <a:lstStyle/>
+          <a:p>
+            <a:pPr algn="ctr"/>
+            <a:endParaRPr lang="pt-BR" sz="2400" dirty="0">
+              <a:solidFill>
+                <a:schemeClr val="tx1"/>
+              </a:solidFill>
+            </a:endParaRPr>
+          </a:p>
+        </p:txBody>
+      </p:sp>
+      <p:sp>
+        <p:nvSpPr>
+          <p:cNvPr id="6" name="Retângulo 5">
+            <a:extLst>
+              <a:ext uri="{FF2B5EF4-FFF2-40B4-BE49-F238E27FC236}">
+                <a16:creationId xmlns:a16="http://schemas.microsoft.com/office/drawing/2014/main" id="{4A8E366E-2A74-48BF-9BAE-48E22FB4A0EB}"/>
+              </a:ext>
+            </a:extLst>
+          </p:cNvPr>
+          <p:cNvSpPr/>
           <p:nvPr/>
-        </p:nvCxnSpPr>
-        <p:spPr>
-          <a:xfrm flipH="1">
-            <a:off x="3022600" y="372533"/>
-            <a:ext cx="364067" cy="627592"/>
-          </a:xfrm>
-          <a:prstGeom prst="straightConnector1">
-            <a:avLst/>
-          </a:prstGeom>
+        </p:nvSpPr>
+        <p:spPr>
+          <a:xfrm>
+            <a:off x="2929467" y="2785532"/>
+            <a:ext cx="3225800" cy="1464735"/>
+          </a:xfrm>
+          <a:prstGeom prst="rect">
+            <a:avLst/>
+          </a:prstGeom>
+          <a:noFill/>
           <a:ln w="38100">
             <a:solidFill>
               <a:srgbClr val="FF0000"/>
             </a:solidFill>
-            <a:tailEnd type="triangle"/>
           </a:ln>
         </p:spPr>
         <p:style>
-          <a:lnRef idx="1">
-            <a:schemeClr val="accent1"/>
+          <a:lnRef idx="2">
+            <a:schemeClr val="accent1">
+              <a:shade val="50000"/>
+            </a:schemeClr>
           </a:lnRef>
-          <a:fillRef idx="0">
+          <a:fillRef idx="1">
             <a:schemeClr val="accent1"/>
           </a:fillRef>
           <a:effectRef idx="0">
             <a:schemeClr val="accent1"/>
           </a:effectRef>
           <a:fontRef idx="minor">
-            <a:schemeClr val="tx1"/>
+            <a:schemeClr val="lt1"/>
           </a:fontRef>
         </p:style>
-      </p:cxnSp>
+        <p:txBody>
+          <a:bodyPr rot="0" spcFirstLastPara="0" vertOverflow="overflow" horzOverflow="overflow" vert="horz" wrap="square" lIns="91440" tIns="45720" rIns="91440" bIns="45720" numCol="1" spcCol="0" rtlCol="0" fromWordArt="0" anchor="ctr" anchorCtr="0" forceAA="0" compatLnSpc="1">
+            <a:prstTxWarp prst="textNoShape">
+              <a:avLst/>
+            </a:prstTxWarp>
+            <a:noAutofit/>
+          </a:bodyPr>
+          <a:lstStyle/>
+          <a:p>
+            <a:pPr algn="ctr"/>
+            <a:endParaRPr lang="pt-BR" sz="2400" dirty="0">
+              <a:solidFill>
+                <a:schemeClr val="tx1"/>
+              </a:solidFill>
+            </a:endParaRPr>
+          </a:p>
+        </p:txBody>
+      </p:sp>
+      <p:sp>
+        <p:nvSpPr>
+          <p:cNvPr id="7" name="Retângulo 6">
+            <a:extLst>
+              <a:ext uri="{FF2B5EF4-FFF2-40B4-BE49-F238E27FC236}">
+                <a16:creationId xmlns:a16="http://schemas.microsoft.com/office/drawing/2014/main" id="{0773BF49-8904-49F9-8595-954C2D0E468A}"/>
+              </a:ext>
+            </a:extLst>
+          </p:cNvPr>
+          <p:cNvSpPr/>
+          <p:nvPr/>
+        </p:nvSpPr>
+        <p:spPr>
+          <a:xfrm>
+            <a:off x="2929467" y="5317067"/>
+            <a:ext cx="3225800" cy="516466"/>
+          </a:xfrm>
+          <a:prstGeom prst="rect">
+            <a:avLst/>
+          </a:prstGeom>
+          <a:noFill/>
+          <a:ln w="38100">
+            <a:solidFill>
+              <a:srgbClr val="FF0000"/>
+            </a:solidFill>
+          </a:ln>
+        </p:spPr>
+        <p:style>
+          <a:lnRef idx="2">
+            <a:schemeClr val="accent1">
+              <a:shade val="50000"/>
+            </a:schemeClr>
+          </a:lnRef>
+          <a:fillRef idx="1">
+            <a:schemeClr val="accent1"/>
+          </a:fillRef>
+          <a:effectRef idx="0">
+            <a:schemeClr val="accent1"/>
+          </a:effectRef>
+          <a:fontRef idx="minor">
+            <a:schemeClr val="lt1"/>
+          </a:fontRef>
+        </p:style>
+        <p:txBody>
+          <a:bodyPr rot="0" spcFirstLastPara="0" vertOverflow="overflow" horzOverflow="overflow" vert="horz" wrap="square" lIns="91440" tIns="45720" rIns="91440" bIns="45720" numCol="1" spcCol="0" rtlCol="0" fromWordArt="0" anchor="ctr" anchorCtr="0" forceAA="0" compatLnSpc="1">
+            <a:prstTxWarp prst="textNoShape">
+              <a:avLst/>
+            </a:prstTxWarp>
+            <a:noAutofit/>
+          </a:bodyPr>
+          <a:lstStyle/>
+          <a:p>
+            <a:pPr algn="ctr"/>
+            <a:endParaRPr lang="pt-BR" sz="2400" dirty="0">
+              <a:solidFill>
+                <a:schemeClr val="tx1"/>
+              </a:solidFill>
+            </a:endParaRPr>
+          </a:p>
+        </p:txBody>
+      </p:sp>
+      <p:sp>
+        <p:nvSpPr>
+          <p:cNvPr id="8" name="Seta: para a Direita 7">
+            <a:extLst>
+              <a:ext uri="{FF2B5EF4-FFF2-40B4-BE49-F238E27FC236}">
+                <a16:creationId xmlns:a16="http://schemas.microsoft.com/office/drawing/2014/main" id="{926D046C-9BBB-41CD-BC70-43BC33C3F890}"/>
+              </a:ext>
+            </a:extLst>
+          </p:cNvPr>
+          <p:cNvSpPr/>
+          <p:nvPr/>
+        </p:nvSpPr>
+        <p:spPr>
+          <a:xfrm>
+            <a:off x="321733" y="1718733"/>
+            <a:ext cx="2150534" cy="1464735"/>
+          </a:xfrm>
+          <a:prstGeom prst="rightArrow">
+            <a:avLst/>
+          </a:prstGeom>
+          <a:solidFill>
+            <a:srgbClr val="FFFF00"/>
+          </a:solidFill>
+          <a:ln w="38100">
+            <a:solidFill>
+              <a:srgbClr val="FF0000"/>
+            </a:solidFill>
+          </a:ln>
+        </p:spPr>
+        <p:style>
+          <a:lnRef idx="2">
+            <a:schemeClr val="accent1">
+              <a:shade val="50000"/>
+            </a:schemeClr>
+          </a:lnRef>
+          <a:fillRef idx="1">
+            <a:schemeClr val="accent1"/>
+          </a:fillRef>
+          <a:effectRef idx="0">
+            <a:schemeClr val="accent1"/>
+          </a:effectRef>
+          <a:fontRef idx="minor">
+            <a:schemeClr val="lt1"/>
+          </a:fontRef>
+        </p:style>
+        <p:txBody>
+          <a:bodyPr rot="0" spcFirstLastPara="0" vertOverflow="overflow" horzOverflow="overflow" vert="horz" wrap="square" lIns="91440" tIns="45720" rIns="91440" bIns="45720" numCol="1" spcCol="0" rtlCol="0" fromWordArt="0" anchor="ctr" anchorCtr="0" forceAA="0" compatLnSpc="1">
+            <a:prstTxWarp prst="textNoShape">
+              <a:avLst/>
+            </a:prstTxWarp>
+            <a:noAutofit/>
+          </a:bodyPr>
+          <a:lstStyle/>
+          <a:p>
+            <a:pPr algn="ctr"/>
+            <a:r>
+              <a:rPr lang="pt-BR" sz="2000" dirty="0">
+                <a:solidFill>
+                  <a:schemeClr val="tx1"/>
+                </a:solidFill>
+              </a:rPr>
+              <a:t>Titulo da Página</a:t>
+            </a:r>
+          </a:p>
+        </p:txBody>
+      </p:sp>
+      <p:sp>
+        <p:nvSpPr>
+          <p:cNvPr id="9" name="Seta: para a Direita 8">
+            <a:extLst>
+              <a:ext uri="{FF2B5EF4-FFF2-40B4-BE49-F238E27FC236}">
+                <a16:creationId xmlns:a16="http://schemas.microsoft.com/office/drawing/2014/main" id="{ED1640FB-FFF5-4EC2-AA5B-EF8B3AAEADA2}"/>
+              </a:ext>
+            </a:extLst>
+          </p:cNvPr>
+          <p:cNvSpPr/>
+          <p:nvPr/>
+        </p:nvSpPr>
+        <p:spPr>
+          <a:xfrm flipH="1">
+            <a:off x="6451600" y="2785531"/>
+            <a:ext cx="2243666" cy="1464735"/>
+          </a:xfrm>
+          <a:prstGeom prst="rightArrow">
+            <a:avLst/>
+          </a:prstGeom>
+          <a:solidFill>
+            <a:srgbClr val="FFFF00"/>
+          </a:solidFill>
+          <a:ln w="38100">
+            <a:solidFill>
+              <a:srgbClr val="FF0000"/>
+            </a:solidFill>
+          </a:ln>
+        </p:spPr>
+        <p:style>
+          <a:lnRef idx="2">
+            <a:schemeClr val="accent1">
+              <a:shade val="50000"/>
+            </a:schemeClr>
+          </a:lnRef>
+          <a:fillRef idx="1">
+            <a:schemeClr val="accent1"/>
+          </a:fillRef>
+          <a:effectRef idx="0">
+            <a:schemeClr val="accent1"/>
+          </a:effectRef>
+          <a:fontRef idx="minor">
+            <a:schemeClr val="lt1"/>
+          </a:fontRef>
+        </p:style>
+        <p:txBody>
+          <a:bodyPr rot="0" spcFirstLastPara="0" vertOverflow="overflow" horzOverflow="overflow" vert="horz" wrap="square" lIns="91440" tIns="45720" rIns="91440" bIns="45720" numCol="1" spcCol="0" rtlCol="0" fromWordArt="0" anchor="ctr" anchorCtr="0" forceAA="0" compatLnSpc="1">
+            <a:prstTxWarp prst="textNoShape">
+              <a:avLst/>
+            </a:prstTxWarp>
+            <a:noAutofit/>
+          </a:bodyPr>
+          <a:lstStyle/>
+          <a:p>
+            <a:pPr algn="ctr"/>
+            <a:r>
+              <a:rPr lang="pt-BR" sz="2000" dirty="0">
+                <a:solidFill>
+                  <a:schemeClr val="tx1"/>
+                </a:solidFill>
+              </a:rPr>
+              <a:t>Área de Estilos</a:t>
+            </a:r>
+          </a:p>
+        </p:txBody>
+      </p:sp>
+      <p:sp>
+        <p:nvSpPr>
+          <p:cNvPr id="10" name="Seta: para a Direita 9">
+            <a:extLst>
+              <a:ext uri="{FF2B5EF4-FFF2-40B4-BE49-F238E27FC236}">
+                <a16:creationId xmlns:a16="http://schemas.microsoft.com/office/drawing/2014/main" id="{F56C93DE-B650-49B3-954E-185D30C7B6F7}"/>
+              </a:ext>
+            </a:extLst>
+          </p:cNvPr>
+          <p:cNvSpPr/>
+          <p:nvPr/>
+        </p:nvSpPr>
+        <p:spPr>
+          <a:xfrm>
+            <a:off x="321733" y="4842932"/>
+            <a:ext cx="2150534" cy="1464735"/>
+          </a:xfrm>
+          <a:prstGeom prst="rightArrow">
+            <a:avLst/>
+          </a:prstGeom>
+          <a:solidFill>
+            <a:srgbClr val="FFFF00"/>
+          </a:solidFill>
+          <a:ln w="38100">
+            <a:solidFill>
+              <a:srgbClr val="FF0000"/>
+            </a:solidFill>
+          </a:ln>
+        </p:spPr>
+        <p:style>
+          <a:lnRef idx="2">
+            <a:schemeClr val="accent1">
+              <a:shade val="50000"/>
+            </a:schemeClr>
+          </a:lnRef>
+          <a:fillRef idx="1">
+            <a:schemeClr val="accent1"/>
+          </a:fillRef>
+          <a:effectRef idx="0">
+            <a:schemeClr val="accent1"/>
+          </a:effectRef>
+          <a:fontRef idx="minor">
+            <a:schemeClr val="lt1"/>
+          </a:fontRef>
+        </p:style>
+        <p:txBody>
+          <a:bodyPr rot="0" spcFirstLastPara="0" vertOverflow="overflow" horzOverflow="overflow" vert="horz" wrap="square" lIns="91440" tIns="45720" rIns="91440" bIns="45720" numCol="1" spcCol="0" rtlCol="0" fromWordArt="0" anchor="ctr" anchorCtr="0" forceAA="0" compatLnSpc="1">
+            <a:prstTxWarp prst="textNoShape">
+              <a:avLst/>
+            </a:prstTxWarp>
+            <a:noAutofit/>
+          </a:bodyPr>
+          <a:lstStyle/>
+          <a:p>
+            <a:pPr algn="ctr"/>
+            <a:r>
+              <a:rPr lang="pt-BR" sz="2000" dirty="0">
+                <a:solidFill>
+                  <a:schemeClr val="tx1"/>
+                </a:solidFill>
+              </a:rPr>
+              <a:t>h1</a:t>
+            </a:r>
+          </a:p>
+        </p:txBody>
+      </p:sp>
     </p:spTree>
     <p:extLst>
       <p:ext uri="{BB962C8B-B14F-4D97-AF65-F5344CB8AC3E}">
-        <p14:creationId xmlns:p14="http://schemas.microsoft.com/office/powerpoint/2010/main" val="2425625146"/>
+        <p14:creationId xmlns:p14="http://schemas.microsoft.com/office/powerpoint/2010/main" val="1741291376"/>
       </p:ext>
     </p:extLst>
   </p:cSld>
@@ -3594,63 +3996,128 @@
           <a:chExt cx="0" cy="0"/>
         </a:xfrm>
       </p:grpSpPr>
-      <p:sp>
-        <p:nvSpPr>
-          <p:cNvPr id="2" name="Título 1">
-            <a:extLst>
-              <a:ext uri="{FF2B5EF4-FFF2-40B4-BE49-F238E27FC236}">
-                <a16:creationId xmlns:a16="http://schemas.microsoft.com/office/drawing/2014/main" id="{F07E2C58-F40E-4E29-9FE6-E8952639D462}"/>
-              </a:ext>
-            </a:extLst>
-          </p:cNvPr>
-          <p:cNvSpPr>
-            <a:spLocks noGrp="1"/>
-          </p:cNvSpPr>
-          <p:nvPr>
-            <p:ph type="ctrTitle"/>
-          </p:nvPr>
-        </p:nvSpPr>
-        <p:spPr/>
-        <p:txBody>
-          <a:bodyPr/>
-          <a:lstStyle/>
-          <a:p>
-            <a:r>
-              <a:rPr lang="pt-BR" dirty="0"/>
-              <a:t>Criando os nossos estilos</a:t>
-            </a:r>
-          </a:p>
-        </p:txBody>
-      </p:sp>
-      <p:sp>
-        <p:nvSpPr>
-          <p:cNvPr id="3" name="Subtítulo 2">
-            <a:extLst>
-              <a:ext uri="{FF2B5EF4-FFF2-40B4-BE49-F238E27FC236}">
-                <a16:creationId xmlns:a16="http://schemas.microsoft.com/office/drawing/2014/main" id="{EA9F6EBC-5A88-43DF-AC8A-6ADEA96913A2}"/>
-              </a:ext>
-            </a:extLst>
-          </p:cNvPr>
-          <p:cNvSpPr>
-            <a:spLocks noGrp="1"/>
-          </p:cNvSpPr>
-          <p:nvPr>
-            <p:ph type="subTitle" idx="1"/>
-          </p:nvPr>
-        </p:nvSpPr>
-        <p:spPr/>
-        <p:txBody>
-          <a:bodyPr/>
-          <a:lstStyle/>
-          <a:p>
-            <a:endParaRPr lang="pt-BR"/>
-          </a:p>
-        </p:txBody>
-      </p:sp>
+      <p:pic>
+        <p:nvPicPr>
+          <p:cNvPr id="2" name="Imagem 1">
+            <a:extLst>
+              <a:ext uri="{FF2B5EF4-FFF2-40B4-BE49-F238E27FC236}">
+                <a16:creationId xmlns:a16="http://schemas.microsoft.com/office/drawing/2014/main" id="{8CFBB407-8F81-42FC-8C2D-060D24042ABC}"/>
+              </a:ext>
+            </a:extLst>
+          </p:cNvPr>
+          <p:cNvPicPr>
+            <a:picLocks noChangeAspect="1"/>
+          </p:cNvPicPr>
+          <p:nvPr/>
+        </p:nvPicPr>
+        <p:blipFill>
+          <a:blip r:embed="rId2"/>
+          <a:stretch>
+            <a:fillRect/>
+          </a:stretch>
+        </p:blipFill>
+        <p:spPr>
+          <a:xfrm>
+            <a:off x="1662112" y="1000125"/>
+            <a:ext cx="8867775" cy="4857750"/>
+          </a:xfrm>
+          <a:prstGeom prst="rect">
+            <a:avLst/>
+          </a:prstGeom>
+        </p:spPr>
+      </p:pic>
+      <p:cxnSp>
+        <p:nvCxnSpPr>
+          <p:cNvPr id="4" name="Conector de Seta Reta 3">
+            <a:extLst>
+              <a:ext uri="{FF2B5EF4-FFF2-40B4-BE49-F238E27FC236}">
+                <a16:creationId xmlns:a16="http://schemas.microsoft.com/office/drawing/2014/main" id="{48DE05A9-5B6F-4BE4-8E45-5B1EA272AB84}"/>
+              </a:ext>
+            </a:extLst>
+          </p:cNvPr>
+          <p:cNvCxnSpPr>
+            <a:cxnSpLocks/>
+          </p:cNvCxnSpPr>
+          <p:nvPr/>
+        </p:nvCxnSpPr>
+        <p:spPr>
+          <a:xfrm>
+            <a:off x="781579" y="2201333"/>
+            <a:ext cx="880533" cy="0"/>
+          </a:xfrm>
+          <a:prstGeom prst="straightConnector1">
+            <a:avLst/>
+          </a:prstGeom>
+          <a:ln w="38100">
+            <a:solidFill>
+              <a:srgbClr val="FF0000"/>
+            </a:solidFill>
+            <a:tailEnd type="triangle"/>
+          </a:ln>
+        </p:spPr>
+        <p:style>
+          <a:lnRef idx="1">
+            <a:schemeClr val="accent1"/>
+          </a:lnRef>
+          <a:fillRef idx="0">
+            <a:schemeClr val="accent1"/>
+          </a:fillRef>
+          <a:effectRef idx="0">
+            <a:schemeClr val="accent1"/>
+          </a:effectRef>
+          <a:fontRef idx="minor">
+            <a:schemeClr val="tx1"/>
+          </a:fontRef>
+        </p:style>
+      </p:cxnSp>
+      <p:cxnSp>
+        <p:nvCxnSpPr>
+          <p:cNvPr id="6" name="Conector de Seta Reta 5">
+            <a:extLst>
+              <a:ext uri="{FF2B5EF4-FFF2-40B4-BE49-F238E27FC236}">
+                <a16:creationId xmlns:a16="http://schemas.microsoft.com/office/drawing/2014/main" id="{EAFDC71E-90A1-4A1D-A628-2C2267A36F96}"/>
+              </a:ext>
+            </a:extLst>
+          </p:cNvPr>
+          <p:cNvCxnSpPr>
+            <a:cxnSpLocks/>
+          </p:cNvCxnSpPr>
+          <p:nvPr/>
+        </p:nvCxnSpPr>
+        <p:spPr>
+          <a:xfrm flipH="1">
+            <a:off x="3022600" y="372533"/>
+            <a:ext cx="364067" cy="627592"/>
+          </a:xfrm>
+          <a:prstGeom prst="straightConnector1">
+            <a:avLst/>
+          </a:prstGeom>
+          <a:ln w="38100">
+            <a:solidFill>
+              <a:srgbClr val="FF0000"/>
+            </a:solidFill>
+            <a:tailEnd type="triangle"/>
+          </a:ln>
+        </p:spPr>
+        <p:style>
+          <a:lnRef idx="1">
+            <a:schemeClr val="accent1"/>
+          </a:lnRef>
+          <a:fillRef idx="0">
+            <a:schemeClr val="accent1"/>
+          </a:fillRef>
+          <a:effectRef idx="0">
+            <a:schemeClr val="accent1"/>
+          </a:effectRef>
+          <a:fontRef idx="minor">
+            <a:schemeClr val="tx1"/>
+          </a:fontRef>
+        </p:style>
+      </p:cxnSp>
     </p:spTree>
     <p:extLst>
       <p:ext uri="{BB962C8B-B14F-4D97-AF65-F5344CB8AC3E}">
-        <p14:creationId xmlns:p14="http://schemas.microsoft.com/office/powerpoint/2010/main" val="2270942965"/>
+        <p14:creationId xmlns:p14="http://schemas.microsoft.com/office/powerpoint/2010/main" val="2425625146"/>
       </p:ext>
     </p:extLst>
   </p:cSld>
@@ -3677,126 +4144,63 @@
           <a:chExt cx="0" cy="0"/>
         </a:xfrm>
       </p:grpSpPr>
-      <p:pic>
-        <p:nvPicPr>
-          <p:cNvPr id="2" name="Imagem 1">
-            <a:extLst>
-              <a:ext uri="{FF2B5EF4-FFF2-40B4-BE49-F238E27FC236}">
-                <a16:creationId xmlns:a16="http://schemas.microsoft.com/office/drawing/2014/main" id="{9BE5DAF6-4080-4E45-857A-6CDB9793A3B6}"/>
-              </a:ext>
-            </a:extLst>
-          </p:cNvPr>
-          <p:cNvPicPr>
-            <a:picLocks noChangeAspect="1"/>
-          </p:cNvPicPr>
-          <p:nvPr/>
-        </p:nvPicPr>
-        <p:blipFill>
-          <a:blip r:embed="rId2"/>
-          <a:stretch>
-            <a:fillRect/>
-          </a:stretch>
-        </p:blipFill>
-        <p:spPr>
-          <a:xfrm>
-            <a:off x="1837376" y="311728"/>
-            <a:ext cx="8517246" cy="6234545"/>
-          </a:xfrm>
-          <a:prstGeom prst="rect">
-            <a:avLst/>
-          </a:prstGeom>
-        </p:spPr>
-      </p:pic>
-      <p:cxnSp>
-        <p:nvCxnSpPr>
-          <p:cNvPr id="4" name="Conector de Seta Reta 3">
-            <a:extLst>
-              <a:ext uri="{FF2B5EF4-FFF2-40B4-BE49-F238E27FC236}">
-                <a16:creationId xmlns:a16="http://schemas.microsoft.com/office/drawing/2014/main" id="{D49C1A62-0866-45C8-8ADA-ACD01C51489C}"/>
-              </a:ext>
-            </a:extLst>
-          </p:cNvPr>
-          <p:cNvCxnSpPr>
-            <a:cxnSpLocks/>
-          </p:cNvCxnSpPr>
-          <p:nvPr/>
-        </p:nvCxnSpPr>
-        <p:spPr>
-          <a:xfrm>
-            <a:off x="872067" y="237067"/>
-            <a:ext cx="1718733" cy="440266"/>
-          </a:xfrm>
-          <a:prstGeom prst="straightConnector1">
-            <a:avLst/>
-          </a:prstGeom>
-          <a:ln w="38100">
-            <a:solidFill>
-              <a:srgbClr val="FF0000"/>
-            </a:solidFill>
-            <a:tailEnd type="triangle"/>
-          </a:ln>
-        </p:spPr>
-        <p:style>
-          <a:lnRef idx="1">
-            <a:schemeClr val="accent1"/>
-          </a:lnRef>
-          <a:fillRef idx="0">
-            <a:schemeClr val="accent1"/>
-          </a:fillRef>
-          <a:effectRef idx="0">
-            <a:schemeClr val="accent1"/>
-          </a:effectRef>
-          <a:fontRef idx="minor">
-            <a:schemeClr val="tx1"/>
-          </a:fontRef>
-        </p:style>
-      </p:cxnSp>
-      <p:cxnSp>
-        <p:nvCxnSpPr>
-          <p:cNvPr id="8" name="Conector de Seta Reta 7">
-            <a:extLst>
-              <a:ext uri="{FF2B5EF4-FFF2-40B4-BE49-F238E27FC236}">
-                <a16:creationId xmlns:a16="http://schemas.microsoft.com/office/drawing/2014/main" id="{6C86D291-5FE5-45C4-988B-2AE44C4A9511}"/>
-              </a:ext>
-            </a:extLst>
-          </p:cNvPr>
-          <p:cNvCxnSpPr/>
-          <p:nvPr/>
-        </p:nvCxnSpPr>
-        <p:spPr>
-          <a:xfrm flipV="1">
-            <a:off x="1210733" y="1464733"/>
-            <a:ext cx="1185334" cy="1041400"/>
-          </a:xfrm>
-          <a:prstGeom prst="straightConnector1">
-            <a:avLst/>
-          </a:prstGeom>
-          <a:ln w="38100">
-            <a:solidFill>
-              <a:srgbClr val="FF0000"/>
-            </a:solidFill>
-            <a:tailEnd type="triangle"/>
-          </a:ln>
-        </p:spPr>
-        <p:style>
-          <a:lnRef idx="1">
-            <a:schemeClr val="accent1"/>
-          </a:lnRef>
-          <a:fillRef idx="0">
-            <a:schemeClr val="accent1"/>
-          </a:fillRef>
-          <a:effectRef idx="0">
-            <a:schemeClr val="accent1"/>
-          </a:effectRef>
-          <a:fontRef idx="minor">
-            <a:schemeClr val="tx1"/>
-          </a:fontRef>
-        </p:style>
-      </p:cxnSp>
+      <p:sp>
+        <p:nvSpPr>
+          <p:cNvPr id="2" name="Título 1">
+            <a:extLst>
+              <a:ext uri="{FF2B5EF4-FFF2-40B4-BE49-F238E27FC236}">
+                <a16:creationId xmlns:a16="http://schemas.microsoft.com/office/drawing/2014/main" id="{F07E2C58-F40E-4E29-9FE6-E8952639D462}"/>
+              </a:ext>
+            </a:extLst>
+          </p:cNvPr>
+          <p:cNvSpPr>
+            <a:spLocks noGrp="1"/>
+          </p:cNvSpPr>
+          <p:nvPr>
+            <p:ph type="ctrTitle"/>
+          </p:nvPr>
+        </p:nvSpPr>
+        <p:spPr/>
+        <p:txBody>
+          <a:bodyPr/>
+          <a:lstStyle/>
+          <a:p>
+            <a:r>
+              <a:rPr lang="pt-BR" dirty="0"/>
+              <a:t>Criando os nossos estilos</a:t>
+            </a:r>
+          </a:p>
+        </p:txBody>
+      </p:sp>
+      <p:sp>
+        <p:nvSpPr>
+          <p:cNvPr id="3" name="Subtítulo 2">
+            <a:extLst>
+              <a:ext uri="{FF2B5EF4-FFF2-40B4-BE49-F238E27FC236}">
+                <a16:creationId xmlns:a16="http://schemas.microsoft.com/office/drawing/2014/main" id="{EA9F6EBC-5A88-43DF-AC8A-6ADEA96913A2}"/>
+              </a:ext>
+            </a:extLst>
+          </p:cNvPr>
+          <p:cNvSpPr>
+            <a:spLocks noGrp="1"/>
+          </p:cNvSpPr>
+          <p:nvPr>
+            <p:ph type="subTitle" idx="1"/>
+          </p:nvPr>
+        </p:nvSpPr>
+        <p:spPr/>
+        <p:txBody>
+          <a:bodyPr/>
+          <a:lstStyle/>
+          <a:p>
+            <a:endParaRPr lang="pt-BR"/>
+          </a:p>
+        </p:txBody>
+      </p:sp>
     </p:spTree>
     <p:extLst>
       <p:ext uri="{BB962C8B-B14F-4D97-AF65-F5344CB8AC3E}">
-        <p14:creationId xmlns:p14="http://schemas.microsoft.com/office/powerpoint/2010/main" val="179870412"/>
+        <p14:creationId xmlns:p14="http://schemas.microsoft.com/office/powerpoint/2010/main" val="2270942965"/>
       </p:ext>
     </p:extLst>
   </p:cSld>
@@ -3828,7 +4232,7 @@
           <p:cNvPr id="2" name="Imagem 1">
             <a:extLst>
               <a:ext uri="{FF2B5EF4-FFF2-40B4-BE49-F238E27FC236}">
-                <a16:creationId xmlns:a16="http://schemas.microsoft.com/office/drawing/2014/main" id="{E2A85DE0-1B21-4747-984F-3E345976F04E}"/>
+                <a16:creationId xmlns:a16="http://schemas.microsoft.com/office/drawing/2014/main" id="{9BE5DAF6-4080-4E45-857A-6CDB9793A3B6}"/>
               </a:ext>
             </a:extLst>
           </p:cNvPr>
@@ -3853,10 +4257,96 @@
           </a:prstGeom>
         </p:spPr>
       </p:pic>
+      <p:cxnSp>
+        <p:nvCxnSpPr>
+          <p:cNvPr id="4" name="Conector de Seta Reta 3">
+            <a:extLst>
+              <a:ext uri="{FF2B5EF4-FFF2-40B4-BE49-F238E27FC236}">
+                <a16:creationId xmlns:a16="http://schemas.microsoft.com/office/drawing/2014/main" id="{D49C1A62-0866-45C8-8ADA-ACD01C51489C}"/>
+              </a:ext>
+            </a:extLst>
+          </p:cNvPr>
+          <p:cNvCxnSpPr>
+            <a:cxnSpLocks/>
+          </p:cNvCxnSpPr>
+          <p:nvPr/>
+        </p:nvCxnSpPr>
+        <p:spPr>
+          <a:xfrm>
+            <a:off x="872067" y="237067"/>
+            <a:ext cx="1718733" cy="440266"/>
+          </a:xfrm>
+          <a:prstGeom prst="straightConnector1">
+            <a:avLst/>
+          </a:prstGeom>
+          <a:ln w="38100">
+            <a:solidFill>
+              <a:srgbClr val="FF0000"/>
+            </a:solidFill>
+            <a:tailEnd type="triangle"/>
+          </a:ln>
+        </p:spPr>
+        <p:style>
+          <a:lnRef idx="1">
+            <a:schemeClr val="accent1"/>
+          </a:lnRef>
+          <a:fillRef idx="0">
+            <a:schemeClr val="accent1"/>
+          </a:fillRef>
+          <a:effectRef idx="0">
+            <a:schemeClr val="accent1"/>
+          </a:effectRef>
+          <a:fontRef idx="minor">
+            <a:schemeClr val="tx1"/>
+          </a:fontRef>
+        </p:style>
+      </p:cxnSp>
+      <p:cxnSp>
+        <p:nvCxnSpPr>
+          <p:cNvPr id="8" name="Conector de Seta Reta 7">
+            <a:extLst>
+              <a:ext uri="{FF2B5EF4-FFF2-40B4-BE49-F238E27FC236}">
+                <a16:creationId xmlns:a16="http://schemas.microsoft.com/office/drawing/2014/main" id="{6C86D291-5FE5-45C4-988B-2AE44C4A9511}"/>
+              </a:ext>
+            </a:extLst>
+          </p:cNvPr>
+          <p:cNvCxnSpPr/>
+          <p:nvPr/>
+        </p:nvCxnSpPr>
+        <p:spPr>
+          <a:xfrm flipV="1">
+            <a:off x="1210733" y="1464733"/>
+            <a:ext cx="1185334" cy="1041400"/>
+          </a:xfrm>
+          <a:prstGeom prst="straightConnector1">
+            <a:avLst/>
+          </a:prstGeom>
+          <a:ln w="38100">
+            <a:solidFill>
+              <a:srgbClr val="FF0000"/>
+            </a:solidFill>
+            <a:tailEnd type="triangle"/>
+          </a:ln>
+        </p:spPr>
+        <p:style>
+          <a:lnRef idx="1">
+            <a:schemeClr val="accent1"/>
+          </a:lnRef>
+          <a:fillRef idx="0">
+            <a:schemeClr val="accent1"/>
+          </a:fillRef>
+          <a:effectRef idx="0">
+            <a:schemeClr val="accent1"/>
+          </a:effectRef>
+          <a:fontRef idx="minor">
+            <a:schemeClr val="tx1"/>
+          </a:fontRef>
+        </p:style>
+      </p:cxnSp>
     </p:spTree>
     <p:extLst>
       <p:ext uri="{BB962C8B-B14F-4D97-AF65-F5344CB8AC3E}">
-        <p14:creationId xmlns:p14="http://schemas.microsoft.com/office/powerpoint/2010/main" val="890225345"/>
+        <p14:creationId xmlns:p14="http://schemas.microsoft.com/office/powerpoint/2010/main" val="179870412"/>
       </p:ext>
     </p:extLst>
   </p:cSld>
@@ -3885,10 +4375,10 @@
       </p:grpSpPr>
       <p:pic>
         <p:nvPicPr>
-          <p:cNvPr id="3" name="Imagem 2">
-            <a:extLst>
-              <a:ext uri="{FF2B5EF4-FFF2-40B4-BE49-F238E27FC236}">
-                <a16:creationId xmlns:a16="http://schemas.microsoft.com/office/drawing/2014/main" id="{6656BAE6-00CD-4E2E-B124-C2786199F850}"/>
+          <p:cNvPr id="2" name="Imagem 1">
+            <a:extLst>
+              <a:ext uri="{FF2B5EF4-FFF2-40B4-BE49-F238E27FC236}">
+                <a16:creationId xmlns:a16="http://schemas.microsoft.com/office/drawing/2014/main" id="{E2A85DE0-1B21-4747-984F-3E345976F04E}"/>
               </a:ext>
             </a:extLst>
           </p:cNvPr>
@@ -3898,97 +4388,67 @@
           <p:nvPr/>
         </p:nvPicPr>
         <p:blipFill>
-          <a:blip r:embed="rId2">
-            <a:extLst>
-              <a:ext uri="{28A0092B-C50C-407E-A947-70E740481C1C}">
-                <a14:useLocalDpi xmlns:a14="http://schemas.microsoft.com/office/drawing/2010/main" val="0"/>
-              </a:ext>
-            </a:extLst>
-          </a:blip>
+          <a:blip r:embed="rId2"/>
           <a:stretch>
             <a:fillRect/>
           </a:stretch>
         </p:blipFill>
         <p:spPr>
           <a:xfrm>
-            <a:off x="421589" y="120376"/>
-            <a:ext cx="3701678" cy="6489752"/>
+            <a:off x="1837376" y="311728"/>
+            <a:ext cx="8517246" cy="6234545"/>
           </a:xfrm>
           <a:prstGeom prst="rect">
             <a:avLst/>
           </a:prstGeom>
         </p:spPr>
       </p:pic>
-      <p:sp>
-        <p:nvSpPr>
-          <p:cNvPr id="4" name="Seta: para a Esquerda 3">
-            <a:extLst>
-              <a:ext uri="{FF2B5EF4-FFF2-40B4-BE49-F238E27FC236}">
-                <a16:creationId xmlns:a16="http://schemas.microsoft.com/office/drawing/2014/main" id="{10DB37B8-EC39-4380-9406-CA7D0879EAF7}"/>
-              </a:ext>
-            </a:extLst>
-          </p:cNvPr>
-          <p:cNvSpPr/>
+      <p:cxnSp>
+        <p:nvCxnSpPr>
+          <p:cNvPr id="4" name="Conector de Seta Reta 3">
+            <a:extLst>
+              <a:ext uri="{FF2B5EF4-FFF2-40B4-BE49-F238E27FC236}">
+                <a16:creationId xmlns:a16="http://schemas.microsoft.com/office/drawing/2014/main" id="{382C23F1-6B76-4F11-B452-577C38A177C5}"/>
+              </a:ext>
+            </a:extLst>
+          </p:cNvPr>
+          <p:cNvCxnSpPr/>
           <p:nvPr/>
-        </p:nvSpPr>
-        <p:spPr>
-          <a:xfrm>
-            <a:off x="2302933" y="4030133"/>
-            <a:ext cx="3369734" cy="872067"/>
-          </a:xfrm>
-          <a:prstGeom prst="leftArrow">
-            <a:avLst/>
-          </a:prstGeom>
-          <a:solidFill>
-            <a:srgbClr val="FFFF00"/>
-          </a:solidFill>
+        </p:nvCxnSpPr>
+        <p:spPr>
+          <a:xfrm flipH="1" flipV="1">
+            <a:off x="2581835" y="1463040"/>
+            <a:ext cx="1796527" cy="1226372"/>
+          </a:xfrm>
+          <a:prstGeom prst="straightConnector1">
+            <a:avLst/>
+          </a:prstGeom>
           <a:ln w="38100">
             <a:solidFill>
               <a:srgbClr val="FF0000"/>
             </a:solidFill>
+            <a:tailEnd type="triangle"/>
           </a:ln>
         </p:spPr>
         <p:style>
-          <a:lnRef idx="2">
-            <a:schemeClr val="accent1">
-              <a:shade val="50000"/>
-            </a:schemeClr>
+          <a:lnRef idx="1">
+            <a:schemeClr val="accent1"/>
           </a:lnRef>
-          <a:fillRef idx="1">
+          <a:fillRef idx="0">
             <a:schemeClr val="accent1"/>
           </a:fillRef>
           <a:effectRef idx="0">
             <a:schemeClr val="accent1"/>
           </a:effectRef>
           <a:fontRef idx="minor">
-            <a:schemeClr val="lt1"/>
+            <a:schemeClr val="tx1"/>
           </a:fontRef>
         </p:style>
-        <p:txBody>
-          <a:bodyPr rot="0" spcFirstLastPara="0" vertOverflow="overflow" horzOverflow="overflow" vert="horz" wrap="square" lIns="91440" tIns="45720" rIns="91440" bIns="45720" numCol="1" spcCol="0" rtlCol="0" fromWordArt="0" anchor="ctr" anchorCtr="0" forceAA="0" compatLnSpc="1">
-            <a:prstTxWarp prst="textNoShape">
-              <a:avLst/>
-            </a:prstTxWarp>
-            <a:noAutofit/>
-          </a:bodyPr>
-          <a:lstStyle/>
-          <a:p>
-            <a:pPr algn="ctr"/>
-            <a:r>
-              <a:rPr lang="pt-BR" sz="2400" dirty="0">
-                <a:solidFill>
-                  <a:schemeClr val="tx1"/>
-                </a:solidFill>
-              </a:rPr>
-              <a:t>Clique </a:t>
-            </a:r>
-          </a:p>
-        </p:txBody>
-      </p:sp>
+      </p:cxnSp>
     </p:spTree>
     <p:extLst>
       <p:ext uri="{BB962C8B-B14F-4D97-AF65-F5344CB8AC3E}">
-        <p14:creationId xmlns:p14="http://schemas.microsoft.com/office/powerpoint/2010/main" val="943063370"/>
+        <p14:creationId xmlns:p14="http://schemas.microsoft.com/office/powerpoint/2010/main" val="890225345"/>
       </p:ext>
     </p:extLst>
   </p:cSld>
@@ -4017,10 +4477,10 @@
       </p:grpSpPr>
       <p:pic>
         <p:nvPicPr>
-          <p:cNvPr id="2" name="Imagem 1">
-            <a:extLst>
-              <a:ext uri="{FF2B5EF4-FFF2-40B4-BE49-F238E27FC236}">
-                <a16:creationId xmlns:a16="http://schemas.microsoft.com/office/drawing/2014/main" id="{4FAC6EA2-18C3-4273-A8B0-B9C517A88DE1}"/>
+          <p:cNvPr id="3" name="Imagem 2">
+            <a:extLst>
+              <a:ext uri="{FF2B5EF4-FFF2-40B4-BE49-F238E27FC236}">
+                <a16:creationId xmlns:a16="http://schemas.microsoft.com/office/drawing/2014/main" id="{6656BAE6-00CD-4E2E-B124-C2786199F850}"/>
               </a:ext>
             </a:extLst>
           </p:cNvPr>
@@ -4030,15 +4490,21 @@
           <p:nvPr/>
         </p:nvPicPr>
         <p:blipFill>
-          <a:blip r:embed="rId2"/>
+          <a:blip r:embed="rId2">
+            <a:extLst>
+              <a:ext uri="{28A0092B-C50C-407E-A947-70E740481C1C}">
+                <a14:useLocalDpi xmlns:a14="http://schemas.microsoft.com/office/drawing/2010/main" val="0"/>
+              </a:ext>
+            </a:extLst>
+          </a:blip>
           <a:stretch>
             <a:fillRect/>
           </a:stretch>
         </p:blipFill>
         <p:spPr>
           <a:xfrm>
-            <a:off x="1563366" y="0"/>
-            <a:ext cx="9065267" cy="6858000"/>
+            <a:off x="421589" y="120376"/>
+            <a:ext cx="3701678" cy="6489752"/>
           </a:xfrm>
           <a:prstGeom prst="rect">
             <a:avLst/>
@@ -4047,10 +4513,10 @@
       </p:pic>
       <p:sp>
         <p:nvSpPr>
-          <p:cNvPr id="3" name="Retângulo 2">
-            <a:extLst>
-              <a:ext uri="{FF2B5EF4-FFF2-40B4-BE49-F238E27FC236}">
-                <a16:creationId xmlns:a16="http://schemas.microsoft.com/office/drawing/2014/main" id="{C7C986D0-788A-485F-AD9D-1D1A42D42001}"/>
+          <p:cNvPr id="4" name="Seta: para a Esquerda 3">
+            <a:extLst>
+              <a:ext uri="{FF2B5EF4-FFF2-40B4-BE49-F238E27FC236}">
+                <a16:creationId xmlns:a16="http://schemas.microsoft.com/office/drawing/2014/main" id="{10DB37B8-EC39-4380-9406-CA7D0879EAF7}"/>
               </a:ext>
             </a:extLst>
           </p:cNvPr>
@@ -4059,13 +4525,15 @@
         </p:nvSpPr>
         <p:spPr>
           <a:xfrm>
-            <a:off x="3462867" y="4910667"/>
-            <a:ext cx="6510866" cy="1024466"/>
-          </a:xfrm>
-          <a:prstGeom prst="rect">
-            <a:avLst/>
-          </a:prstGeom>
-          <a:noFill/>
+            <a:off x="2302933" y="4030133"/>
+            <a:ext cx="3369734" cy="872067"/>
+          </a:xfrm>
+          <a:prstGeom prst="leftArrow">
+            <a:avLst/>
+          </a:prstGeom>
+          <a:solidFill>
+            <a:srgbClr val="FFFF00"/>
+          </a:solidFill>
           <a:ln w="38100">
             <a:solidFill>
               <a:srgbClr val="FF0000"/>
@@ -4098,18 +4566,21 @@
           <a:lstStyle/>
           <a:p>
             <a:pPr algn="ctr"/>
-            <a:endParaRPr lang="pt-BR" sz="2400" dirty="0">
-              <a:solidFill>
-                <a:schemeClr val="tx1"/>
-              </a:solidFill>
-            </a:endParaRPr>
+            <a:r>
+              <a:rPr lang="pt-BR" sz="2400" dirty="0">
+                <a:solidFill>
+                  <a:schemeClr val="tx1"/>
+                </a:solidFill>
+              </a:rPr>
+              <a:t>Clique </a:t>
+            </a:r>
           </a:p>
         </p:txBody>
       </p:sp>
     </p:spTree>
     <p:extLst>
       <p:ext uri="{BB962C8B-B14F-4D97-AF65-F5344CB8AC3E}">
-        <p14:creationId xmlns:p14="http://schemas.microsoft.com/office/powerpoint/2010/main" val="3427454766"/>
+        <p14:creationId xmlns:p14="http://schemas.microsoft.com/office/powerpoint/2010/main" val="943063370"/>
       </p:ext>
     </p:extLst>
   </p:cSld>
@@ -4141,7 +4612,7 @@
           <p:cNvPr id="2" name="Imagem 1">
             <a:extLst>
               <a:ext uri="{FF2B5EF4-FFF2-40B4-BE49-F238E27FC236}">
-                <a16:creationId xmlns:a16="http://schemas.microsoft.com/office/drawing/2014/main" id="{9B3ACFE2-A26E-4572-A7B7-93F9871F5065}"/>
+                <a16:creationId xmlns:a16="http://schemas.microsoft.com/office/drawing/2014/main" id="{4FAC6EA2-18C3-4273-A8B0-B9C517A88DE1}"/>
               </a:ext>
             </a:extLst>
           </p:cNvPr>
@@ -4168,10 +4639,10 @@
       </p:pic>
       <p:sp>
         <p:nvSpPr>
-          <p:cNvPr id="3" name="Seta: para a Direita 2">
-            <a:extLst>
-              <a:ext uri="{FF2B5EF4-FFF2-40B4-BE49-F238E27FC236}">
-                <a16:creationId xmlns:a16="http://schemas.microsoft.com/office/drawing/2014/main" id="{359C3963-F87C-45DA-B528-7475CD6B32BA}"/>
+          <p:cNvPr id="3" name="Retângulo 2">
+            <a:extLst>
+              <a:ext uri="{FF2B5EF4-FFF2-40B4-BE49-F238E27FC236}">
+                <a16:creationId xmlns:a16="http://schemas.microsoft.com/office/drawing/2014/main" id="{C7C986D0-788A-485F-AD9D-1D1A42D42001}"/>
               </a:ext>
             </a:extLst>
           </p:cNvPr>
@@ -4180,15 +4651,13 @@
         </p:nvSpPr>
         <p:spPr>
           <a:xfrm>
-            <a:off x="635000" y="3623733"/>
-            <a:ext cx="1185333" cy="838200"/>
-          </a:xfrm>
-          <a:prstGeom prst="rightArrow">
-            <a:avLst/>
-          </a:prstGeom>
-          <a:solidFill>
-            <a:srgbClr val="FFFF00"/>
-          </a:solidFill>
+            <a:off x="3462867" y="4910667"/>
+            <a:ext cx="6510866" cy="1024466"/>
+          </a:xfrm>
+          <a:prstGeom prst="rect">
+            <a:avLst/>
+          </a:prstGeom>
+          <a:noFill/>
           <a:ln w="38100">
             <a:solidFill>
               <a:srgbClr val="FF0000"/>
@@ -4221,21 +4690,18 @@
           <a:lstStyle/>
           <a:p>
             <a:pPr algn="ctr"/>
-            <a:r>
-              <a:rPr lang="pt-BR" sz="2400" dirty="0">
-                <a:solidFill>
-                  <a:schemeClr val="tx1"/>
-                </a:solidFill>
-              </a:rPr>
-              <a:t>clique</a:t>
-            </a:r>
+            <a:endParaRPr lang="pt-BR" sz="2400" dirty="0">
+              <a:solidFill>
+                <a:schemeClr val="tx1"/>
+              </a:solidFill>
+            </a:endParaRPr>
           </a:p>
         </p:txBody>
       </p:sp>
     </p:spTree>
     <p:extLst>
       <p:ext uri="{BB962C8B-B14F-4D97-AF65-F5344CB8AC3E}">
-        <p14:creationId xmlns:p14="http://schemas.microsoft.com/office/powerpoint/2010/main" val="1349885603"/>
+        <p14:creationId xmlns:p14="http://schemas.microsoft.com/office/powerpoint/2010/main" val="3427454766"/>
       </p:ext>
     </p:extLst>
   </p:cSld>
@@ -4267,7 +4733,7 @@
           <p:cNvPr id="2" name="Imagem 1">
             <a:extLst>
               <a:ext uri="{FF2B5EF4-FFF2-40B4-BE49-F238E27FC236}">
-                <a16:creationId xmlns:a16="http://schemas.microsoft.com/office/drawing/2014/main" id="{2380E3FB-6F71-49EF-9BA3-C34479686E54}"/>
+                <a16:creationId xmlns:a16="http://schemas.microsoft.com/office/drawing/2014/main" id="{9B3ACFE2-A26E-4572-A7B7-93F9871F5065}"/>
               </a:ext>
             </a:extLst>
           </p:cNvPr>
@@ -4284,18 +4750,84 @@
         </p:blipFill>
         <p:spPr>
           <a:xfrm>
-            <a:off x="1411514" y="0"/>
-            <a:ext cx="9368971" cy="6858000"/>
+            <a:off x="1563366" y="0"/>
+            <a:ext cx="9065267" cy="6858000"/>
           </a:xfrm>
           <a:prstGeom prst="rect">
             <a:avLst/>
           </a:prstGeom>
         </p:spPr>
       </p:pic>
+      <p:sp>
+        <p:nvSpPr>
+          <p:cNvPr id="3" name="Seta: para a Direita 2">
+            <a:extLst>
+              <a:ext uri="{FF2B5EF4-FFF2-40B4-BE49-F238E27FC236}">
+                <a16:creationId xmlns:a16="http://schemas.microsoft.com/office/drawing/2014/main" id="{359C3963-F87C-45DA-B528-7475CD6B32BA}"/>
+              </a:ext>
+            </a:extLst>
+          </p:cNvPr>
+          <p:cNvSpPr/>
+          <p:nvPr/>
+        </p:nvSpPr>
+        <p:spPr>
+          <a:xfrm>
+            <a:off x="635000" y="3623733"/>
+            <a:ext cx="1185333" cy="838200"/>
+          </a:xfrm>
+          <a:prstGeom prst="rightArrow">
+            <a:avLst/>
+          </a:prstGeom>
+          <a:solidFill>
+            <a:srgbClr val="FFFF00"/>
+          </a:solidFill>
+          <a:ln w="38100">
+            <a:solidFill>
+              <a:srgbClr val="FF0000"/>
+            </a:solidFill>
+          </a:ln>
+        </p:spPr>
+        <p:style>
+          <a:lnRef idx="2">
+            <a:schemeClr val="accent1">
+              <a:shade val="50000"/>
+            </a:schemeClr>
+          </a:lnRef>
+          <a:fillRef idx="1">
+            <a:schemeClr val="accent1"/>
+          </a:fillRef>
+          <a:effectRef idx="0">
+            <a:schemeClr val="accent1"/>
+          </a:effectRef>
+          <a:fontRef idx="minor">
+            <a:schemeClr val="lt1"/>
+          </a:fontRef>
+        </p:style>
+        <p:txBody>
+          <a:bodyPr rot="0" spcFirstLastPara="0" vertOverflow="overflow" horzOverflow="overflow" vert="horz" wrap="square" lIns="91440" tIns="45720" rIns="91440" bIns="45720" numCol="1" spcCol="0" rtlCol="0" fromWordArt="0" anchor="ctr" anchorCtr="0" forceAA="0" compatLnSpc="1">
+            <a:prstTxWarp prst="textNoShape">
+              <a:avLst/>
+            </a:prstTxWarp>
+            <a:noAutofit/>
+          </a:bodyPr>
+          <a:lstStyle/>
+          <a:p>
+            <a:pPr algn="ctr"/>
+            <a:r>
+              <a:rPr lang="pt-BR" sz="2400" dirty="0">
+                <a:solidFill>
+                  <a:schemeClr val="tx1"/>
+                </a:solidFill>
+              </a:rPr>
+              <a:t>clique</a:t>
+            </a:r>
+          </a:p>
+        </p:txBody>
+      </p:sp>
     </p:spTree>
     <p:extLst>
       <p:ext uri="{BB962C8B-B14F-4D97-AF65-F5344CB8AC3E}">
-        <p14:creationId xmlns:p14="http://schemas.microsoft.com/office/powerpoint/2010/main" val="721103933"/>
+        <p14:creationId xmlns:p14="http://schemas.microsoft.com/office/powerpoint/2010/main" val="1349885603"/>
       </p:ext>
     </p:extLst>
   </p:cSld>
@@ -4327,7 +4859,7 @@
           <p:cNvPr id="2" name="Imagem 1">
             <a:extLst>
               <a:ext uri="{FF2B5EF4-FFF2-40B4-BE49-F238E27FC236}">
-                <a16:creationId xmlns:a16="http://schemas.microsoft.com/office/drawing/2014/main" id="{B091BAA4-EBED-4D9A-838F-BBBBD2825670}"/>
+                <a16:creationId xmlns:a16="http://schemas.microsoft.com/office/drawing/2014/main" id="{2380E3FB-6F71-49EF-9BA3-C34479686E54}"/>
               </a:ext>
             </a:extLst>
           </p:cNvPr>
@@ -4344,8 +4876,8 @@
         </p:blipFill>
         <p:spPr>
           <a:xfrm>
-            <a:off x="454236" y="1267138"/>
-            <a:ext cx="11283527" cy="4323725"/>
+            <a:off x="1411514" y="0"/>
+            <a:ext cx="9368971" cy="6858000"/>
           </a:xfrm>
           <a:prstGeom prst="rect">
             <a:avLst/>
@@ -4355,7 +4887,7 @@
     </p:spTree>
     <p:extLst>
       <p:ext uri="{BB962C8B-B14F-4D97-AF65-F5344CB8AC3E}">
-        <p14:creationId xmlns:p14="http://schemas.microsoft.com/office/powerpoint/2010/main" val="1815061036"/>
+        <p14:creationId xmlns:p14="http://schemas.microsoft.com/office/powerpoint/2010/main" val="721103933"/>
       </p:ext>
     </p:extLst>
   </p:cSld>
@@ -4384,10 +4916,10 @@
       </p:grpSpPr>
       <p:pic>
         <p:nvPicPr>
-          <p:cNvPr id="3" name="Imagem 2">
-            <a:extLst>
-              <a:ext uri="{FF2B5EF4-FFF2-40B4-BE49-F238E27FC236}">
-                <a16:creationId xmlns:a16="http://schemas.microsoft.com/office/drawing/2014/main" id="{F7A966D4-2F83-4D18-AE71-36AC78FBB36A}"/>
+          <p:cNvPr id="2" name="Imagem 1">
+            <a:extLst>
+              <a:ext uri="{FF2B5EF4-FFF2-40B4-BE49-F238E27FC236}">
+                <a16:creationId xmlns:a16="http://schemas.microsoft.com/office/drawing/2014/main" id="{B091BAA4-EBED-4D9A-838F-BBBBD2825670}"/>
               </a:ext>
             </a:extLst>
           </p:cNvPr>
@@ -4397,102 +4929,25 @@
           <p:nvPr/>
         </p:nvPicPr>
         <p:blipFill>
-          <a:blip r:embed="rId2">
-            <a:extLst>
-              <a:ext uri="{28A0092B-C50C-407E-A947-70E740481C1C}">
-                <a14:useLocalDpi xmlns:a14="http://schemas.microsoft.com/office/drawing/2010/main" val="0"/>
-              </a:ext>
-            </a:extLst>
-          </a:blip>
+          <a:blip r:embed="rId2"/>
           <a:stretch>
             <a:fillRect/>
           </a:stretch>
         </p:blipFill>
         <p:spPr>
           <a:xfrm>
-            <a:off x="1068560" y="1161039"/>
-            <a:ext cx="10054879" cy="3994056"/>
+            <a:off x="454236" y="1267138"/>
+            <a:ext cx="11283527" cy="4323725"/>
           </a:xfrm>
           <a:prstGeom prst="rect">
             <a:avLst/>
           </a:prstGeom>
-          <a:ln>
-            <a:solidFill>
-              <a:srgbClr val="FF0000"/>
-            </a:solidFill>
-          </a:ln>
         </p:spPr>
       </p:pic>
-      <p:sp>
-        <p:nvSpPr>
-          <p:cNvPr id="4" name="Retângulo 3">
-            <a:extLst>
-              <a:ext uri="{FF2B5EF4-FFF2-40B4-BE49-F238E27FC236}">
-                <a16:creationId xmlns:a16="http://schemas.microsoft.com/office/drawing/2014/main" id="{B16492F7-6703-404E-B4EA-D2F772952CB2}"/>
-              </a:ext>
-            </a:extLst>
-          </p:cNvPr>
-          <p:cNvSpPr/>
-          <p:nvPr/>
-        </p:nvSpPr>
-        <p:spPr>
-          <a:xfrm>
-            <a:off x="4732867" y="5359400"/>
-            <a:ext cx="3623733" cy="1253067"/>
-          </a:xfrm>
-          <a:prstGeom prst="rect">
-            <a:avLst/>
-          </a:prstGeom>
-          <a:solidFill>
-            <a:srgbClr val="FFFF00"/>
-          </a:solidFill>
-          <a:ln w="38100">
-            <a:solidFill>
-              <a:srgbClr val="FF0000"/>
-            </a:solidFill>
-          </a:ln>
-        </p:spPr>
-        <p:style>
-          <a:lnRef idx="2">
-            <a:schemeClr val="accent1">
-              <a:shade val="50000"/>
-            </a:schemeClr>
-          </a:lnRef>
-          <a:fillRef idx="1">
-            <a:schemeClr val="accent1"/>
-          </a:fillRef>
-          <a:effectRef idx="0">
-            <a:schemeClr val="accent1"/>
-          </a:effectRef>
-          <a:fontRef idx="minor">
-            <a:schemeClr val="lt1"/>
-          </a:fontRef>
-        </p:style>
-        <p:txBody>
-          <a:bodyPr rot="0" spcFirstLastPara="0" vertOverflow="overflow" horzOverflow="overflow" vert="horz" wrap="square" lIns="91440" tIns="45720" rIns="91440" bIns="45720" numCol="1" spcCol="0" rtlCol="0" fromWordArt="0" anchor="ctr" anchorCtr="0" forceAA="0" compatLnSpc="1">
-            <a:prstTxWarp prst="textNoShape">
-              <a:avLst/>
-            </a:prstTxWarp>
-            <a:noAutofit/>
-          </a:bodyPr>
-          <a:lstStyle/>
-          <a:p>
-            <a:pPr algn="ctr"/>
-            <a:r>
-              <a:rPr lang="pt-BR" sz="2400" dirty="0">
-                <a:solidFill>
-                  <a:schemeClr val="tx1"/>
-                </a:solidFill>
-              </a:rPr>
-              <a:t>Encontre o seu tom cor favorito</a:t>
-            </a:r>
-          </a:p>
-        </p:txBody>
-      </p:sp>
     </p:spTree>
     <p:extLst>
       <p:ext uri="{BB962C8B-B14F-4D97-AF65-F5344CB8AC3E}">
-        <p14:creationId xmlns:p14="http://schemas.microsoft.com/office/powerpoint/2010/main" val="2375562967"/>
+        <p14:creationId xmlns:p14="http://schemas.microsoft.com/office/powerpoint/2010/main" val="1815061036"/>
       </p:ext>
     </p:extLst>
   </p:cSld>
@@ -4524,7 +4979,7 @@
           <p:cNvPr id="4" name="Imagem 3">
             <a:extLst>
               <a:ext uri="{FF2B5EF4-FFF2-40B4-BE49-F238E27FC236}">
-                <a16:creationId xmlns:a16="http://schemas.microsoft.com/office/drawing/2014/main" id="{6A183221-BF10-4457-84FC-F376A3AD9B4A}"/>
+                <a16:creationId xmlns:a16="http://schemas.microsoft.com/office/drawing/2014/main" id="{BD6CAB12-58C8-4464-9D76-ECA1FE62696F}"/>
               </a:ext>
             </a:extLst>
           </p:cNvPr>
@@ -4541,8 +4996,8 @@
         </p:blipFill>
         <p:spPr>
           <a:xfrm>
-            <a:off x="554182" y="450273"/>
-            <a:ext cx="11083636" cy="5957455"/>
+            <a:off x="554182" y="311728"/>
+            <a:ext cx="11083636" cy="6234545"/>
           </a:xfrm>
           <a:prstGeom prst="rect">
             <a:avLst/>
@@ -4552,7 +5007,7 @@
     </p:spTree>
     <p:extLst>
       <p:ext uri="{BB962C8B-B14F-4D97-AF65-F5344CB8AC3E}">
-        <p14:creationId xmlns:p14="http://schemas.microsoft.com/office/powerpoint/2010/main" val="2592073764"/>
+        <p14:creationId xmlns:p14="http://schemas.microsoft.com/office/powerpoint/2010/main" val="3193926057"/>
       </p:ext>
     </p:extLst>
   </p:cSld>
@@ -4584,7 +5039,7 @@
           <p:cNvPr id="3" name="Imagem 2">
             <a:extLst>
               <a:ext uri="{FF2B5EF4-FFF2-40B4-BE49-F238E27FC236}">
-                <a16:creationId xmlns:a16="http://schemas.microsoft.com/office/drawing/2014/main" id="{33F68E8A-B4E1-4DA1-8CCA-A0BEBECDD57C}"/>
+                <a16:creationId xmlns:a16="http://schemas.microsoft.com/office/drawing/2014/main" id="{F7A966D4-2F83-4D18-AE71-36AC78FBB36A}"/>
               </a:ext>
             </a:extLst>
           </p:cNvPr>
@@ -4607,81 +5062,25 @@
         </p:blipFill>
         <p:spPr>
           <a:xfrm>
-            <a:off x="1676316" y="483888"/>
-            <a:ext cx="8483768" cy="5890224"/>
+            <a:off x="1068560" y="1161039"/>
+            <a:ext cx="10054879" cy="3994056"/>
           </a:xfrm>
           <a:prstGeom prst="rect">
             <a:avLst/>
           </a:prstGeom>
-        </p:spPr>
-      </p:pic>
-      <p:sp>
-        <p:nvSpPr>
-          <p:cNvPr id="4" name="Retângulo 3">
-            <a:extLst>
-              <a:ext uri="{FF2B5EF4-FFF2-40B4-BE49-F238E27FC236}">
-                <a16:creationId xmlns:a16="http://schemas.microsoft.com/office/drawing/2014/main" id="{1D985D94-96BA-4327-9A71-059DE315F754}"/>
-              </a:ext>
-            </a:extLst>
-          </p:cNvPr>
-          <p:cNvSpPr/>
-          <p:nvPr/>
-        </p:nvSpPr>
-        <p:spPr>
-          <a:xfrm>
-            <a:off x="2700867" y="1092200"/>
-            <a:ext cx="3708400" cy="1168400"/>
-          </a:xfrm>
-          <a:prstGeom prst="rect">
-            <a:avLst/>
-          </a:prstGeom>
-          <a:noFill/>
-          <a:ln w="38100">
+          <a:ln>
             <a:solidFill>
               <a:srgbClr val="FF0000"/>
             </a:solidFill>
           </a:ln>
         </p:spPr>
-        <p:style>
-          <a:lnRef idx="2">
-            <a:schemeClr val="accent1">
-              <a:shade val="50000"/>
-            </a:schemeClr>
-          </a:lnRef>
-          <a:fillRef idx="1">
-            <a:schemeClr val="accent1"/>
-          </a:fillRef>
-          <a:effectRef idx="0">
-            <a:schemeClr val="accent1"/>
-          </a:effectRef>
-          <a:fontRef idx="minor">
-            <a:schemeClr val="lt1"/>
-          </a:fontRef>
-        </p:style>
-        <p:txBody>
-          <a:bodyPr rot="0" spcFirstLastPara="0" vertOverflow="overflow" horzOverflow="overflow" vert="horz" wrap="square" lIns="91440" tIns="45720" rIns="91440" bIns="45720" numCol="1" spcCol="0" rtlCol="0" fromWordArt="0" anchor="ctr" anchorCtr="0" forceAA="0" compatLnSpc="1">
-            <a:prstTxWarp prst="textNoShape">
-              <a:avLst/>
-            </a:prstTxWarp>
-            <a:noAutofit/>
-          </a:bodyPr>
-          <a:lstStyle/>
-          <a:p>
-            <a:pPr algn="ctr"/>
-            <a:endParaRPr lang="pt-BR" sz="2400" dirty="0">
-              <a:solidFill>
-                <a:schemeClr val="tx1"/>
-              </a:solidFill>
-            </a:endParaRPr>
-          </a:p>
-        </p:txBody>
-      </p:sp>
-      <p:sp>
-        <p:nvSpPr>
-          <p:cNvPr id="5" name="Seta: para a Direita 4">
-            <a:extLst>
-              <a:ext uri="{FF2B5EF4-FFF2-40B4-BE49-F238E27FC236}">
-                <a16:creationId xmlns:a16="http://schemas.microsoft.com/office/drawing/2014/main" id="{1914A80A-9DE2-47DD-8EC8-43D3769A3DDA}"/>
+      </p:pic>
+      <p:sp>
+        <p:nvSpPr>
+          <p:cNvPr id="4" name="Retângulo 3">
+            <a:extLst>
+              <a:ext uri="{FF2B5EF4-FFF2-40B4-BE49-F238E27FC236}">
+                <a16:creationId xmlns:a16="http://schemas.microsoft.com/office/drawing/2014/main" id="{B16492F7-6703-404E-B4EA-D2F772952CB2}"/>
               </a:ext>
             </a:extLst>
           </p:cNvPr>
@@ -4690,10 +5089,10 @@
         </p:nvSpPr>
         <p:spPr>
           <a:xfrm>
-            <a:off x="338667" y="973667"/>
-            <a:ext cx="2099733" cy="1286933"/>
-          </a:xfrm>
-          <a:prstGeom prst="rightArrow">
+            <a:off x="4732867" y="5359400"/>
+            <a:ext cx="3623733" cy="1253067"/>
+          </a:xfrm>
+          <a:prstGeom prst="rect">
             <a:avLst/>
           </a:prstGeom>
           <a:solidFill>
@@ -4732,62 +5131,20 @@
           <a:p>
             <a:pPr algn="ctr"/>
             <a:r>
-              <a:rPr lang="pt-BR" dirty="0">
+              <a:rPr lang="pt-BR" sz="2400" dirty="0">
                 <a:solidFill>
                   <a:schemeClr val="tx1"/>
                 </a:solidFill>
               </a:rPr>
-              <a:t>Digite este código</a:t>
+              <a:t>Encontre o seu tom cor favorito</a:t>
             </a:r>
           </a:p>
         </p:txBody>
       </p:sp>
-      <p:cxnSp>
-        <p:nvCxnSpPr>
-          <p:cNvPr id="7" name="Conector de Seta Reta 6">
-            <a:extLst>
-              <a:ext uri="{FF2B5EF4-FFF2-40B4-BE49-F238E27FC236}">
-                <a16:creationId xmlns:a16="http://schemas.microsoft.com/office/drawing/2014/main" id="{E87DAD5E-6792-4C8B-93FE-A76742B88AE3}"/>
-              </a:ext>
-            </a:extLst>
-          </p:cNvPr>
-          <p:cNvCxnSpPr/>
-          <p:nvPr/>
-        </p:nvCxnSpPr>
-        <p:spPr>
-          <a:xfrm>
-            <a:off x="4360333" y="2142067"/>
-            <a:ext cx="1634067" cy="2768600"/>
-          </a:xfrm>
-          <a:prstGeom prst="straightConnector1">
-            <a:avLst/>
-          </a:prstGeom>
-          <a:ln w="38100">
-            <a:solidFill>
-              <a:srgbClr val="FF0000"/>
-            </a:solidFill>
-            <a:tailEnd type="triangle"/>
-          </a:ln>
-        </p:spPr>
-        <p:style>
-          <a:lnRef idx="1">
-            <a:schemeClr val="accent1"/>
-          </a:lnRef>
-          <a:fillRef idx="0">
-            <a:schemeClr val="accent1"/>
-          </a:fillRef>
-          <a:effectRef idx="0">
-            <a:schemeClr val="accent1"/>
-          </a:effectRef>
-          <a:fontRef idx="minor">
-            <a:schemeClr val="tx1"/>
-          </a:fontRef>
-        </p:style>
-      </p:cxnSp>
     </p:spTree>
     <p:extLst>
       <p:ext uri="{BB962C8B-B14F-4D97-AF65-F5344CB8AC3E}">
-        <p14:creationId xmlns:p14="http://schemas.microsoft.com/office/powerpoint/2010/main" val="1589432742"/>
+        <p14:creationId xmlns:p14="http://schemas.microsoft.com/office/powerpoint/2010/main" val="2375562967"/>
       </p:ext>
     </p:extLst>
   </p:cSld>
@@ -4816,10 +5173,10 @@
       </p:grpSpPr>
       <p:pic>
         <p:nvPicPr>
-          <p:cNvPr id="2" name="Imagem 1">
-            <a:extLst>
-              <a:ext uri="{FF2B5EF4-FFF2-40B4-BE49-F238E27FC236}">
-                <a16:creationId xmlns:a16="http://schemas.microsoft.com/office/drawing/2014/main" id="{A6BD2F7C-82EC-4440-BD0C-271313EADFB9}"/>
+          <p:cNvPr id="3" name="Imagem 2">
+            <a:extLst>
+              <a:ext uri="{FF2B5EF4-FFF2-40B4-BE49-F238E27FC236}">
+                <a16:creationId xmlns:a16="http://schemas.microsoft.com/office/drawing/2014/main" id="{33F68E8A-B4E1-4DA1-8CCA-A0BEBECDD57C}"/>
               </a:ext>
             </a:extLst>
           </p:cNvPr>
@@ -4829,15 +5186,21 @@
           <p:nvPr/>
         </p:nvPicPr>
         <p:blipFill>
-          <a:blip r:embed="rId2"/>
+          <a:blip r:embed="rId2">
+            <a:extLst>
+              <a:ext uri="{28A0092B-C50C-407E-A947-70E740481C1C}">
+                <a14:useLocalDpi xmlns:a14="http://schemas.microsoft.com/office/drawing/2010/main" val="0"/>
+              </a:ext>
+            </a:extLst>
+          </a:blip>
           <a:stretch>
             <a:fillRect/>
           </a:stretch>
         </p:blipFill>
         <p:spPr>
           <a:xfrm>
-            <a:off x="442075" y="662554"/>
-            <a:ext cx="11307848" cy="5532892"/>
+            <a:off x="1676316" y="483888"/>
+            <a:ext cx="8483768" cy="5890224"/>
           </a:xfrm>
           <a:prstGeom prst="rect">
             <a:avLst/>
@@ -4846,10 +5209,10 @@
       </p:pic>
       <p:sp>
         <p:nvSpPr>
-          <p:cNvPr id="3" name="Retângulo 2">
-            <a:extLst>
-              <a:ext uri="{FF2B5EF4-FFF2-40B4-BE49-F238E27FC236}">
-                <a16:creationId xmlns:a16="http://schemas.microsoft.com/office/drawing/2014/main" id="{B387BF45-89CF-4699-877E-96CDC5FD3B62}"/>
+          <p:cNvPr id="4" name="Retângulo 3">
+            <a:extLst>
+              <a:ext uri="{FF2B5EF4-FFF2-40B4-BE49-F238E27FC236}">
+                <a16:creationId xmlns:a16="http://schemas.microsoft.com/office/drawing/2014/main" id="{1D985D94-96BA-4327-9A71-059DE315F754}"/>
               </a:ext>
             </a:extLst>
           </p:cNvPr>
@@ -4858,8 +5221,8 @@
         </p:nvSpPr>
         <p:spPr>
           <a:xfrm>
-            <a:off x="1159933" y="2523067"/>
-            <a:ext cx="3674534" cy="1227666"/>
+            <a:off x="2700867" y="1092200"/>
+            <a:ext cx="3708400" cy="1168400"/>
           </a:xfrm>
           <a:prstGeom prst="rect">
             <a:avLst/>
@@ -4907,10 +5270,10 @@
       </p:sp>
       <p:sp>
         <p:nvSpPr>
-          <p:cNvPr id="4" name="Seta: Dobrada para Cima 3">
-            <a:extLst>
-              <a:ext uri="{FF2B5EF4-FFF2-40B4-BE49-F238E27FC236}">
-                <a16:creationId xmlns:a16="http://schemas.microsoft.com/office/drawing/2014/main" id="{0E483484-75CB-4852-A557-45CF9FA34CEA}"/>
+          <p:cNvPr id="5" name="Seta: para a Direita 4">
+            <a:extLst>
+              <a:ext uri="{FF2B5EF4-FFF2-40B4-BE49-F238E27FC236}">
+                <a16:creationId xmlns:a16="http://schemas.microsoft.com/office/drawing/2014/main" id="{1914A80A-9DE2-47DD-8EC8-43D3769A3DDA}"/>
               </a:ext>
             </a:extLst>
           </p:cNvPr>
@@ -4918,11 +5281,11 @@
           <p:nvPr/>
         </p:nvSpPr>
         <p:spPr>
-          <a:xfrm rot="5400000">
-            <a:off x="2332566" y="4034367"/>
-            <a:ext cx="1566332" cy="999068"/>
-          </a:xfrm>
-          <a:prstGeom prst="bentUpArrow">
+          <a:xfrm>
+            <a:off x="338667" y="973667"/>
+            <a:ext cx="2099733" cy="1286933"/>
+          </a:xfrm>
+          <a:prstGeom prst="rightArrow">
             <a:avLst/>
           </a:prstGeom>
           <a:solidFill>
@@ -4960,18 +5323,63 @@
           <a:lstStyle/>
           <a:p>
             <a:pPr algn="ctr"/>
-            <a:endParaRPr lang="pt-BR" sz="2400" dirty="0">
-              <a:solidFill>
-                <a:schemeClr val="tx1"/>
-              </a:solidFill>
-            </a:endParaRPr>
-          </a:p>
-        </p:txBody>
-      </p:sp>
+            <a:r>
+              <a:rPr lang="pt-BR" dirty="0">
+                <a:solidFill>
+                  <a:schemeClr val="tx1"/>
+                </a:solidFill>
+              </a:rPr>
+              <a:t>Digite este código</a:t>
+            </a:r>
+          </a:p>
+        </p:txBody>
+      </p:sp>
+      <p:cxnSp>
+        <p:nvCxnSpPr>
+          <p:cNvPr id="7" name="Conector de Seta Reta 6">
+            <a:extLst>
+              <a:ext uri="{FF2B5EF4-FFF2-40B4-BE49-F238E27FC236}">
+                <a16:creationId xmlns:a16="http://schemas.microsoft.com/office/drawing/2014/main" id="{E87DAD5E-6792-4C8B-93FE-A76742B88AE3}"/>
+              </a:ext>
+            </a:extLst>
+          </p:cNvPr>
+          <p:cNvCxnSpPr/>
+          <p:nvPr/>
+        </p:nvCxnSpPr>
+        <p:spPr>
+          <a:xfrm>
+            <a:off x="4360333" y="2142067"/>
+            <a:ext cx="1634067" cy="2768600"/>
+          </a:xfrm>
+          <a:prstGeom prst="straightConnector1">
+            <a:avLst/>
+          </a:prstGeom>
+          <a:ln w="38100">
+            <a:solidFill>
+              <a:srgbClr val="FF0000"/>
+            </a:solidFill>
+            <a:tailEnd type="triangle"/>
+          </a:ln>
+        </p:spPr>
+        <p:style>
+          <a:lnRef idx="1">
+            <a:schemeClr val="accent1"/>
+          </a:lnRef>
+          <a:fillRef idx="0">
+            <a:schemeClr val="accent1"/>
+          </a:fillRef>
+          <a:effectRef idx="0">
+            <a:schemeClr val="accent1"/>
+          </a:effectRef>
+          <a:fontRef idx="minor">
+            <a:schemeClr val="tx1"/>
+          </a:fontRef>
+        </p:style>
+      </p:cxnSp>
     </p:spTree>
     <p:extLst>
       <p:ext uri="{BB962C8B-B14F-4D97-AF65-F5344CB8AC3E}">
-        <p14:creationId xmlns:p14="http://schemas.microsoft.com/office/powerpoint/2010/main" val="3050351918"/>
+        <p14:creationId xmlns:p14="http://schemas.microsoft.com/office/powerpoint/2010/main" val="1589432742"/>
       </p:ext>
     </p:extLst>
   </p:cSld>
@@ -5003,7 +5411,7 @@
           <p:cNvPr id="2" name="Imagem 1">
             <a:extLst>
               <a:ext uri="{FF2B5EF4-FFF2-40B4-BE49-F238E27FC236}">
-                <a16:creationId xmlns:a16="http://schemas.microsoft.com/office/drawing/2014/main" id="{77426FC4-0F16-4A3E-8FD8-694EF3B397F9}"/>
+                <a16:creationId xmlns:a16="http://schemas.microsoft.com/office/drawing/2014/main" id="{A6BD2F7C-82EC-4440-BD0C-271313EADFB9}"/>
               </a:ext>
             </a:extLst>
           </p:cNvPr>
@@ -5020,18 +5428,142 @@
         </p:blipFill>
         <p:spPr>
           <a:xfrm>
-            <a:off x="377525" y="506365"/>
-            <a:ext cx="11436949" cy="5845270"/>
+            <a:off x="442075" y="662554"/>
+            <a:ext cx="11307848" cy="5532892"/>
           </a:xfrm>
           <a:prstGeom prst="rect">
             <a:avLst/>
           </a:prstGeom>
         </p:spPr>
       </p:pic>
+      <p:sp>
+        <p:nvSpPr>
+          <p:cNvPr id="3" name="Retângulo 2">
+            <a:extLst>
+              <a:ext uri="{FF2B5EF4-FFF2-40B4-BE49-F238E27FC236}">
+                <a16:creationId xmlns:a16="http://schemas.microsoft.com/office/drawing/2014/main" id="{B387BF45-89CF-4699-877E-96CDC5FD3B62}"/>
+              </a:ext>
+            </a:extLst>
+          </p:cNvPr>
+          <p:cNvSpPr/>
+          <p:nvPr/>
+        </p:nvSpPr>
+        <p:spPr>
+          <a:xfrm>
+            <a:off x="1159933" y="2523067"/>
+            <a:ext cx="3674534" cy="1227666"/>
+          </a:xfrm>
+          <a:prstGeom prst="rect">
+            <a:avLst/>
+          </a:prstGeom>
+          <a:noFill/>
+          <a:ln w="38100">
+            <a:solidFill>
+              <a:srgbClr val="FF0000"/>
+            </a:solidFill>
+          </a:ln>
+        </p:spPr>
+        <p:style>
+          <a:lnRef idx="2">
+            <a:schemeClr val="accent1">
+              <a:shade val="50000"/>
+            </a:schemeClr>
+          </a:lnRef>
+          <a:fillRef idx="1">
+            <a:schemeClr val="accent1"/>
+          </a:fillRef>
+          <a:effectRef idx="0">
+            <a:schemeClr val="accent1"/>
+          </a:effectRef>
+          <a:fontRef idx="minor">
+            <a:schemeClr val="lt1"/>
+          </a:fontRef>
+        </p:style>
+        <p:txBody>
+          <a:bodyPr rot="0" spcFirstLastPara="0" vertOverflow="overflow" horzOverflow="overflow" vert="horz" wrap="square" lIns="91440" tIns="45720" rIns="91440" bIns="45720" numCol="1" spcCol="0" rtlCol="0" fromWordArt="0" anchor="ctr" anchorCtr="0" forceAA="0" compatLnSpc="1">
+            <a:prstTxWarp prst="textNoShape">
+              <a:avLst/>
+            </a:prstTxWarp>
+            <a:noAutofit/>
+          </a:bodyPr>
+          <a:lstStyle/>
+          <a:p>
+            <a:pPr algn="ctr"/>
+            <a:endParaRPr lang="pt-BR" sz="2400" dirty="0">
+              <a:solidFill>
+                <a:schemeClr val="tx1"/>
+              </a:solidFill>
+            </a:endParaRPr>
+          </a:p>
+        </p:txBody>
+      </p:sp>
+      <p:sp>
+        <p:nvSpPr>
+          <p:cNvPr id="4" name="Seta: Dobrada para Cima 3">
+            <a:extLst>
+              <a:ext uri="{FF2B5EF4-FFF2-40B4-BE49-F238E27FC236}">
+                <a16:creationId xmlns:a16="http://schemas.microsoft.com/office/drawing/2014/main" id="{0E483484-75CB-4852-A557-45CF9FA34CEA}"/>
+              </a:ext>
+            </a:extLst>
+          </p:cNvPr>
+          <p:cNvSpPr/>
+          <p:nvPr/>
+        </p:nvSpPr>
+        <p:spPr>
+          <a:xfrm rot="5400000">
+            <a:off x="2332566" y="4034367"/>
+            <a:ext cx="1566332" cy="999068"/>
+          </a:xfrm>
+          <a:prstGeom prst="bentUpArrow">
+            <a:avLst/>
+          </a:prstGeom>
+          <a:solidFill>
+            <a:srgbClr val="FFFF00"/>
+          </a:solidFill>
+          <a:ln w="38100">
+            <a:solidFill>
+              <a:srgbClr val="FF0000"/>
+            </a:solidFill>
+          </a:ln>
+        </p:spPr>
+        <p:style>
+          <a:lnRef idx="2">
+            <a:schemeClr val="accent1">
+              <a:shade val="50000"/>
+            </a:schemeClr>
+          </a:lnRef>
+          <a:fillRef idx="1">
+            <a:schemeClr val="accent1"/>
+          </a:fillRef>
+          <a:effectRef idx="0">
+            <a:schemeClr val="accent1"/>
+          </a:effectRef>
+          <a:fontRef idx="minor">
+            <a:schemeClr val="lt1"/>
+          </a:fontRef>
+        </p:style>
+        <p:txBody>
+          <a:bodyPr rot="0" spcFirstLastPara="0" vertOverflow="overflow" horzOverflow="overflow" vert="horz" wrap="square" lIns="91440" tIns="45720" rIns="91440" bIns="45720" numCol="1" spcCol="0" rtlCol="0" fromWordArt="0" anchor="ctr" anchorCtr="0" forceAA="0" compatLnSpc="1">
+            <a:prstTxWarp prst="textNoShape">
+              <a:avLst/>
+            </a:prstTxWarp>
+            <a:noAutofit/>
+          </a:bodyPr>
+          <a:lstStyle/>
+          <a:p>
+            <a:pPr algn="ctr"/>
+            <a:endParaRPr lang="pt-BR" sz="2400" dirty="0">
+              <a:solidFill>
+                <a:schemeClr val="tx1"/>
+              </a:solidFill>
+            </a:endParaRPr>
+          </a:p>
+        </p:txBody>
+      </p:sp>
     </p:spTree>
     <p:extLst>
       <p:ext uri="{BB962C8B-B14F-4D97-AF65-F5344CB8AC3E}">
-        <p14:creationId xmlns:p14="http://schemas.microsoft.com/office/powerpoint/2010/main" val="2085173874"/>
+        <p14:creationId xmlns:p14="http://schemas.microsoft.com/office/powerpoint/2010/main" val="3050351918"/>
       </p:ext>
     </p:extLst>
   </p:cSld>
@@ -5063,7 +5595,7 @@
           <p:cNvPr id="2" name="Imagem 1">
             <a:extLst>
               <a:ext uri="{FF2B5EF4-FFF2-40B4-BE49-F238E27FC236}">
-                <a16:creationId xmlns:a16="http://schemas.microsoft.com/office/drawing/2014/main" id="{1B684170-25FF-4560-A8E7-454A428945A2}"/>
+                <a16:creationId xmlns:a16="http://schemas.microsoft.com/office/drawing/2014/main" id="{77426FC4-0F16-4A3E-8FD8-694EF3B397F9}"/>
               </a:ext>
             </a:extLst>
           </p:cNvPr>
@@ -5080,8 +5612,8 @@
         </p:blipFill>
         <p:spPr>
           <a:xfrm>
-            <a:off x="874334" y="437779"/>
-            <a:ext cx="10443333" cy="5982440"/>
+            <a:off x="377525" y="506365"/>
+            <a:ext cx="11436949" cy="5845270"/>
           </a:xfrm>
           <a:prstGeom prst="rect">
             <a:avLst/>
@@ -5091,7 +5623,7 @@
     </p:spTree>
     <p:extLst>
       <p:ext uri="{BB962C8B-B14F-4D97-AF65-F5344CB8AC3E}">
-        <p14:creationId xmlns:p14="http://schemas.microsoft.com/office/powerpoint/2010/main" val="1558970743"/>
+        <p14:creationId xmlns:p14="http://schemas.microsoft.com/office/powerpoint/2010/main" val="2085173874"/>
       </p:ext>
     </p:extLst>
   </p:cSld>
@@ -5123,7 +5655,7 @@
           <p:cNvPr id="2" name="Imagem 1">
             <a:extLst>
               <a:ext uri="{FF2B5EF4-FFF2-40B4-BE49-F238E27FC236}">
-                <a16:creationId xmlns:a16="http://schemas.microsoft.com/office/drawing/2014/main" id="{8B60E392-DA8D-48AA-830D-BE0B0C2A3ABE}"/>
+                <a16:creationId xmlns:a16="http://schemas.microsoft.com/office/drawing/2014/main" id="{1B684170-25FF-4560-A8E7-454A428945A2}"/>
               </a:ext>
             </a:extLst>
           </p:cNvPr>
@@ -5140,145 +5672,18 @@
         </p:blipFill>
         <p:spPr>
           <a:xfrm>
-            <a:off x="1411514" y="0"/>
-            <a:ext cx="9368971" cy="6858000"/>
+            <a:off x="874334" y="437779"/>
+            <a:ext cx="10443333" cy="5982440"/>
           </a:xfrm>
           <a:prstGeom prst="rect">
             <a:avLst/>
           </a:prstGeom>
         </p:spPr>
       </p:pic>
-      <p:sp>
-        <p:nvSpPr>
-          <p:cNvPr id="3" name="Seta: para a Direita 2">
-            <a:extLst>
-              <a:ext uri="{FF2B5EF4-FFF2-40B4-BE49-F238E27FC236}">
-                <a16:creationId xmlns:a16="http://schemas.microsoft.com/office/drawing/2014/main" id="{4CB8F477-B88F-4364-87AC-493BEA7D883F}"/>
-              </a:ext>
-            </a:extLst>
-          </p:cNvPr>
-          <p:cNvSpPr/>
-          <p:nvPr/>
-        </p:nvSpPr>
-        <p:spPr>
-          <a:xfrm>
-            <a:off x="220133" y="2971800"/>
-            <a:ext cx="1363134" cy="880533"/>
-          </a:xfrm>
-          <a:prstGeom prst="rightArrow">
-            <a:avLst/>
-          </a:prstGeom>
-          <a:solidFill>
-            <a:srgbClr val="FFFF00"/>
-          </a:solidFill>
-          <a:ln w="38100">
-            <a:solidFill>
-              <a:srgbClr val="FF0000"/>
-            </a:solidFill>
-          </a:ln>
-        </p:spPr>
-        <p:style>
-          <a:lnRef idx="2">
-            <a:schemeClr val="accent1">
-              <a:shade val="50000"/>
-            </a:schemeClr>
-          </a:lnRef>
-          <a:fillRef idx="1">
-            <a:schemeClr val="accent1"/>
-          </a:fillRef>
-          <a:effectRef idx="0">
-            <a:schemeClr val="accent1"/>
-          </a:effectRef>
-          <a:fontRef idx="minor">
-            <a:schemeClr val="lt1"/>
-          </a:fontRef>
-        </p:style>
-        <p:txBody>
-          <a:bodyPr rot="0" spcFirstLastPara="0" vertOverflow="overflow" horzOverflow="overflow" vert="horz" wrap="square" lIns="91440" tIns="45720" rIns="91440" bIns="45720" numCol="1" spcCol="0" rtlCol="0" fromWordArt="0" anchor="ctr" anchorCtr="0" forceAA="0" compatLnSpc="1">
-            <a:prstTxWarp prst="textNoShape">
-              <a:avLst/>
-            </a:prstTxWarp>
-            <a:noAutofit/>
-          </a:bodyPr>
-          <a:lstStyle/>
-          <a:p>
-            <a:pPr algn="ctr"/>
-            <a:r>
-              <a:rPr lang="pt-BR" sz="2400" dirty="0">
-                <a:solidFill>
-                  <a:schemeClr val="tx1"/>
-                </a:solidFill>
-              </a:rPr>
-              <a:t>clique</a:t>
-            </a:r>
-          </a:p>
-        </p:txBody>
-      </p:sp>
-      <p:sp>
-        <p:nvSpPr>
-          <p:cNvPr id="4" name="Retângulo 3">
-            <a:extLst>
-              <a:ext uri="{FF2B5EF4-FFF2-40B4-BE49-F238E27FC236}">
-                <a16:creationId xmlns:a16="http://schemas.microsoft.com/office/drawing/2014/main" id="{8A57F256-C78F-477C-8606-70673D041A75}"/>
-              </a:ext>
-            </a:extLst>
-          </p:cNvPr>
-          <p:cNvSpPr/>
-          <p:nvPr/>
-        </p:nvSpPr>
-        <p:spPr>
-          <a:xfrm>
-            <a:off x="3166533" y="3429000"/>
-            <a:ext cx="5113867" cy="1329267"/>
-          </a:xfrm>
-          <a:prstGeom prst="rect">
-            <a:avLst/>
-          </a:prstGeom>
-          <a:noFill/>
-          <a:ln w="38100">
-            <a:solidFill>
-              <a:srgbClr val="FF0000"/>
-            </a:solidFill>
-          </a:ln>
-        </p:spPr>
-        <p:style>
-          <a:lnRef idx="2">
-            <a:schemeClr val="accent1">
-              <a:shade val="50000"/>
-            </a:schemeClr>
-          </a:lnRef>
-          <a:fillRef idx="1">
-            <a:schemeClr val="accent1"/>
-          </a:fillRef>
-          <a:effectRef idx="0">
-            <a:schemeClr val="accent1"/>
-          </a:effectRef>
-          <a:fontRef idx="minor">
-            <a:schemeClr val="lt1"/>
-          </a:fontRef>
-        </p:style>
-        <p:txBody>
-          <a:bodyPr rot="0" spcFirstLastPara="0" vertOverflow="overflow" horzOverflow="overflow" vert="horz" wrap="square" lIns="91440" tIns="45720" rIns="91440" bIns="45720" numCol="1" spcCol="0" rtlCol="0" fromWordArt="0" anchor="ctr" anchorCtr="0" forceAA="0" compatLnSpc="1">
-            <a:prstTxWarp prst="textNoShape">
-              <a:avLst/>
-            </a:prstTxWarp>
-            <a:noAutofit/>
-          </a:bodyPr>
-          <a:lstStyle/>
-          <a:p>
-            <a:pPr algn="ctr"/>
-            <a:endParaRPr lang="pt-BR" sz="2400" dirty="0">
-              <a:solidFill>
-                <a:schemeClr val="tx1"/>
-              </a:solidFill>
-            </a:endParaRPr>
-          </a:p>
-        </p:txBody>
-      </p:sp>
     </p:spTree>
     <p:extLst>
       <p:ext uri="{BB962C8B-B14F-4D97-AF65-F5344CB8AC3E}">
-        <p14:creationId xmlns:p14="http://schemas.microsoft.com/office/powerpoint/2010/main" val="2933681266"/>
+        <p14:creationId xmlns:p14="http://schemas.microsoft.com/office/powerpoint/2010/main" val="1558970743"/>
       </p:ext>
     </p:extLst>
   </p:cSld>
@@ -5310,7 +5715,7 @@
           <p:cNvPr id="2" name="Imagem 1">
             <a:extLst>
               <a:ext uri="{FF2B5EF4-FFF2-40B4-BE49-F238E27FC236}">
-                <a16:creationId xmlns:a16="http://schemas.microsoft.com/office/drawing/2014/main" id="{A7987A8B-63D1-466C-BB14-D10103C6CDEF}"/>
+                <a16:creationId xmlns:a16="http://schemas.microsoft.com/office/drawing/2014/main" id="{8B60E392-DA8D-48AA-830D-BE0B0C2A3ABE}"/>
               </a:ext>
             </a:extLst>
           </p:cNvPr>
@@ -5327,18 +5732,145 @@
         </p:blipFill>
         <p:spPr>
           <a:xfrm>
-            <a:off x="1744610" y="1175498"/>
-            <a:ext cx="8702779" cy="4507003"/>
+            <a:off x="1411514" y="0"/>
+            <a:ext cx="9368971" cy="6858000"/>
           </a:xfrm>
           <a:prstGeom prst="rect">
             <a:avLst/>
           </a:prstGeom>
         </p:spPr>
       </p:pic>
+      <p:sp>
+        <p:nvSpPr>
+          <p:cNvPr id="3" name="Seta: para a Direita 2">
+            <a:extLst>
+              <a:ext uri="{FF2B5EF4-FFF2-40B4-BE49-F238E27FC236}">
+                <a16:creationId xmlns:a16="http://schemas.microsoft.com/office/drawing/2014/main" id="{4CB8F477-B88F-4364-87AC-493BEA7D883F}"/>
+              </a:ext>
+            </a:extLst>
+          </p:cNvPr>
+          <p:cNvSpPr/>
+          <p:nvPr/>
+        </p:nvSpPr>
+        <p:spPr>
+          <a:xfrm>
+            <a:off x="220133" y="2971800"/>
+            <a:ext cx="1363134" cy="880533"/>
+          </a:xfrm>
+          <a:prstGeom prst="rightArrow">
+            <a:avLst/>
+          </a:prstGeom>
+          <a:solidFill>
+            <a:srgbClr val="FFFF00"/>
+          </a:solidFill>
+          <a:ln w="38100">
+            <a:solidFill>
+              <a:srgbClr val="FF0000"/>
+            </a:solidFill>
+          </a:ln>
+        </p:spPr>
+        <p:style>
+          <a:lnRef idx="2">
+            <a:schemeClr val="accent1">
+              <a:shade val="50000"/>
+            </a:schemeClr>
+          </a:lnRef>
+          <a:fillRef idx="1">
+            <a:schemeClr val="accent1"/>
+          </a:fillRef>
+          <a:effectRef idx="0">
+            <a:schemeClr val="accent1"/>
+          </a:effectRef>
+          <a:fontRef idx="minor">
+            <a:schemeClr val="lt1"/>
+          </a:fontRef>
+        </p:style>
+        <p:txBody>
+          <a:bodyPr rot="0" spcFirstLastPara="0" vertOverflow="overflow" horzOverflow="overflow" vert="horz" wrap="square" lIns="91440" tIns="45720" rIns="91440" bIns="45720" numCol="1" spcCol="0" rtlCol="0" fromWordArt="0" anchor="ctr" anchorCtr="0" forceAA="0" compatLnSpc="1">
+            <a:prstTxWarp prst="textNoShape">
+              <a:avLst/>
+            </a:prstTxWarp>
+            <a:noAutofit/>
+          </a:bodyPr>
+          <a:lstStyle/>
+          <a:p>
+            <a:pPr algn="ctr"/>
+            <a:r>
+              <a:rPr lang="pt-BR" sz="2400" dirty="0">
+                <a:solidFill>
+                  <a:schemeClr val="tx1"/>
+                </a:solidFill>
+              </a:rPr>
+              <a:t>clique</a:t>
+            </a:r>
+          </a:p>
+        </p:txBody>
+      </p:sp>
+      <p:sp>
+        <p:nvSpPr>
+          <p:cNvPr id="4" name="Retângulo 3">
+            <a:extLst>
+              <a:ext uri="{FF2B5EF4-FFF2-40B4-BE49-F238E27FC236}">
+                <a16:creationId xmlns:a16="http://schemas.microsoft.com/office/drawing/2014/main" id="{8A57F256-C78F-477C-8606-70673D041A75}"/>
+              </a:ext>
+            </a:extLst>
+          </p:cNvPr>
+          <p:cNvSpPr/>
+          <p:nvPr/>
+        </p:nvSpPr>
+        <p:spPr>
+          <a:xfrm>
+            <a:off x="3166533" y="3429000"/>
+            <a:ext cx="5113867" cy="1329267"/>
+          </a:xfrm>
+          <a:prstGeom prst="rect">
+            <a:avLst/>
+          </a:prstGeom>
+          <a:noFill/>
+          <a:ln w="38100">
+            <a:solidFill>
+              <a:srgbClr val="FF0000"/>
+            </a:solidFill>
+          </a:ln>
+        </p:spPr>
+        <p:style>
+          <a:lnRef idx="2">
+            <a:schemeClr val="accent1">
+              <a:shade val="50000"/>
+            </a:schemeClr>
+          </a:lnRef>
+          <a:fillRef idx="1">
+            <a:schemeClr val="accent1"/>
+          </a:fillRef>
+          <a:effectRef idx="0">
+            <a:schemeClr val="accent1"/>
+          </a:effectRef>
+          <a:fontRef idx="minor">
+            <a:schemeClr val="lt1"/>
+          </a:fontRef>
+        </p:style>
+        <p:txBody>
+          <a:bodyPr rot="0" spcFirstLastPara="0" vertOverflow="overflow" horzOverflow="overflow" vert="horz" wrap="square" lIns="91440" tIns="45720" rIns="91440" bIns="45720" numCol="1" spcCol="0" rtlCol="0" fromWordArt="0" anchor="ctr" anchorCtr="0" forceAA="0" compatLnSpc="1">
+            <a:prstTxWarp prst="textNoShape">
+              <a:avLst/>
+            </a:prstTxWarp>
+            <a:noAutofit/>
+          </a:bodyPr>
+          <a:lstStyle/>
+          <a:p>
+            <a:pPr algn="ctr"/>
+            <a:endParaRPr lang="pt-BR" sz="2400" dirty="0">
+              <a:solidFill>
+                <a:schemeClr val="tx1"/>
+              </a:solidFill>
+            </a:endParaRPr>
+          </a:p>
+        </p:txBody>
+      </p:sp>
     </p:spTree>
     <p:extLst>
       <p:ext uri="{BB962C8B-B14F-4D97-AF65-F5344CB8AC3E}">
-        <p14:creationId xmlns:p14="http://schemas.microsoft.com/office/powerpoint/2010/main" val="954674866"/>
+        <p14:creationId xmlns:p14="http://schemas.microsoft.com/office/powerpoint/2010/main" val="2933681266"/>
       </p:ext>
     </p:extLst>
   </p:cSld>
@@ -5370,7 +5902,7 @@
           <p:cNvPr id="2" name="Imagem 1">
             <a:extLst>
               <a:ext uri="{FF2B5EF4-FFF2-40B4-BE49-F238E27FC236}">
-                <a16:creationId xmlns:a16="http://schemas.microsoft.com/office/drawing/2014/main" id="{9E0BB6B8-CE35-4430-9056-50E8F4B02966}"/>
+                <a16:creationId xmlns:a16="http://schemas.microsoft.com/office/drawing/2014/main" id="{A7987A8B-63D1-466C-BB14-D10103C6CDEF}"/>
               </a:ext>
             </a:extLst>
           </p:cNvPr>
@@ -5387,89 +5919,18 @@
         </p:blipFill>
         <p:spPr>
           <a:xfrm>
-            <a:off x="600685" y="692897"/>
-            <a:ext cx="10990630" cy="4337672"/>
+            <a:off x="1744610" y="1175498"/>
+            <a:ext cx="8702779" cy="4507003"/>
           </a:xfrm>
           <a:prstGeom prst="rect">
             <a:avLst/>
           </a:prstGeom>
-          <a:ln>
-            <a:solidFill>
-              <a:srgbClr val="FF0000"/>
-            </a:solidFill>
-          </a:ln>
         </p:spPr>
       </p:pic>
-      <p:sp>
-        <p:nvSpPr>
-          <p:cNvPr id="3" name="Retângulo 2">
-            <a:extLst>
-              <a:ext uri="{FF2B5EF4-FFF2-40B4-BE49-F238E27FC236}">
-                <a16:creationId xmlns:a16="http://schemas.microsoft.com/office/drawing/2014/main" id="{916D378D-3913-4FDB-8851-151B3D0C4CCE}"/>
-              </a:ext>
-            </a:extLst>
-          </p:cNvPr>
-          <p:cNvSpPr/>
-          <p:nvPr/>
-        </p:nvSpPr>
-        <p:spPr>
-          <a:xfrm>
-            <a:off x="4732867" y="5359400"/>
-            <a:ext cx="3623733" cy="1253067"/>
-          </a:xfrm>
-          <a:prstGeom prst="rect">
-            <a:avLst/>
-          </a:prstGeom>
-          <a:solidFill>
-            <a:srgbClr val="FFFF00"/>
-          </a:solidFill>
-          <a:ln w="38100">
-            <a:solidFill>
-              <a:srgbClr val="FF0000"/>
-            </a:solidFill>
-          </a:ln>
-        </p:spPr>
-        <p:style>
-          <a:lnRef idx="2">
-            <a:schemeClr val="accent1">
-              <a:shade val="50000"/>
-            </a:schemeClr>
-          </a:lnRef>
-          <a:fillRef idx="1">
-            <a:schemeClr val="accent1"/>
-          </a:fillRef>
-          <a:effectRef idx="0">
-            <a:schemeClr val="accent1"/>
-          </a:effectRef>
-          <a:fontRef idx="minor">
-            <a:schemeClr val="lt1"/>
-          </a:fontRef>
-        </p:style>
-        <p:txBody>
-          <a:bodyPr rot="0" spcFirstLastPara="0" vertOverflow="overflow" horzOverflow="overflow" vert="horz" wrap="square" lIns="91440" tIns="45720" rIns="91440" bIns="45720" numCol="1" spcCol="0" rtlCol="0" fromWordArt="0" anchor="ctr" anchorCtr="0" forceAA="0" compatLnSpc="1">
-            <a:prstTxWarp prst="textNoShape">
-              <a:avLst/>
-            </a:prstTxWarp>
-            <a:noAutofit/>
-          </a:bodyPr>
-          <a:lstStyle/>
-          <a:p>
-            <a:pPr algn="ctr"/>
-            <a:r>
-              <a:rPr lang="pt-BR" sz="2400" dirty="0">
-                <a:solidFill>
-                  <a:schemeClr val="tx1"/>
-                </a:solidFill>
-              </a:rPr>
-              <a:t>Encontre o seu tom cor favorito</a:t>
-            </a:r>
-          </a:p>
-        </p:txBody>
-      </p:sp>
     </p:spTree>
     <p:extLst>
       <p:ext uri="{BB962C8B-B14F-4D97-AF65-F5344CB8AC3E}">
-        <p14:creationId xmlns:p14="http://schemas.microsoft.com/office/powerpoint/2010/main" val="4177492020"/>
+        <p14:creationId xmlns:p14="http://schemas.microsoft.com/office/powerpoint/2010/main" val="954674866"/>
       </p:ext>
     </p:extLst>
   </p:cSld>
@@ -5501,7 +5962,7 @@
           <p:cNvPr id="2" name="Imagem 1">
             <a:extLst>
               <a:ext uri="{FF2B5EF4-FFF2-40B4-BE49-F238E27FC236}">
-                <a16:creationId xmlns:a16="http://schemas.microsoft.com/office/drawing/2014/main" id="{B1A42639-B23B-4D83-9321-3587CE6BCD0C}"/>
+                <a16:creationId xmlns:a16="http://schemas.microsoft.com/office/drawing/2014/main" id="{9E0BB6B8-CE35-4430-9056-50E8F4B02966}"/>
               </a:ext>
             </a:extLst>
           </p:cNvPr>
@@ -5518,81 +5979,25 @@
         </p:blipFill>
         <p:spPr>
           <a:xfrm>
-            <a:off x="943493" y="426253"/>
-            <a:ext cx="10305012" cy="6005494"/>
+            <a:off x="600685" y="692897"/>
+            <a:ext cx="10990630" cy="4337672"/>
           </a:xfrm>
           <a:prstGeom prst="rect">
             <a:avLst/>
           </a:prstGeom>
-        </p:spPr>
-      </p:pic>
-      <p:sp>
-        <p:nvSpPr>
-          <p:cNvPr id="3" name="Retângulo 2">
-            <a:extLst>
-              <a:ext uri="{FF2B5EF4-FFF2-40B4-BE49-F238E27FC236}">
-                <a16:creationId xmlns:a16="http://schemas.microsoft.com/office/drawing/2014/main" id="{6DF95E7D-BB53-4185-9FF2-8A04C2163965}"/>
-              </a:ext>
-            </a:extLst>
-          </p:cNvPr>
-          <p:cNvSpPr/>
-          <p:nvPr/>
-        </p:nvSpPr>
-        <p:spPr>
-          <a:xfrm>
-            <a:off x="2421465" y="3623733"/>
-            <a:ext cx="3742268" cy="431800"/>
-          </a:xfrm>
-          <a:prstGeom prst="rect">
-            <a:avLst/>
-          </a:prstGeom>
-          <a:noFill/>
-          <a:ln w="38100">
+          <a:ln>
             <a:solidFill>
               <a:srgbClr val="FF0000"/>
             </a:solidFill>
           </a:ln>
         </p:spPr>
-        <p:style>
-          <a:lnRef idx="2">
-            <a:schemeClr val="accent1">
-              <a:shade val="50000"/>
-            </a:schemeClr>
-          </a:lnRef>
-          <a:fillRef idx="1">
-            <a:schemeClr val="accent1"/>
-          </a:fillRef>
-          <a:effectRef idx="0">
-            <a:schemeClr val="accent1"/>
-          </a:effectRef>
-          <a:fontRef idx="minor">
-            <a:schemeClr val="lt1"/>
-          </a:fontRef>
-        </p:style>
-        <p:txBody>
-          <a:bodyPr rot="0" spcFirstLastPara="0" vertOverflow="overflow" horzOverflow="overflow" vert="horz" wrap="square" lIns="91440" tIns="45720" rIns="91440" bIns="45720" numCol="1" spcCol="0" rtlCol="0" fromWordArt="0" anchor="ctr" anchorCtr="0" forceAA="0" compatLnSpc="1">
-            <a:prstTxWarp prst="textNoShape">
-              <a:avLst/>
-            </a:prstTxWarp>
-            <a:noAutofit/>
-          </a:bodyPr>
-          <a:lstStyle/>
-          <a:p>
-            <a:pPr algn="ctr"/>
-            <a:endParaRPr lang="pt-BR" sz="2400" dirty="0">
-              <a:solidFill>
-                <a:schemeClr val="tx1"/>
-              </a:solidFill>
-            </a:endParaRPr>
-          </a:p>
-        </p:txBody>
-      </p:sp>
-      <p:sp>
-        <p:nvSpPr>
-          <p:cNvPr id="4" name="Seta: Dobrada para Cima 3">
-            <a:extLst>
-              <a:ext uri="{FF2B5EF4-FFF2-40B4-BE49-F238E27FC236}">
-                <a16:creationId xmlns:a16="http://schemas.microsoft.com/office/drawing/2014/main" id="{A45DC54E-9B7E-46BC-9BC0-D7920C54DAA0}"/>
+      </p:pic>
+      <p:sp>
+        <p:nvSpPr>
+          <p:cNvPr id="3" name="Retângulo 2">
+            <a:extLst>
+              <a:ext uri="{FF2B5EF4-FFF2-40B4-BE49-F238E27FC236}">
+                <a16:creationId xmlns:a16="http://schemas.microsoft.com/office/drawing/2014/main" id="{916D378D-3913-4FDB-8851-151B3D0C4CCE}"/>
               </a:ext>
             </a:extLst>
           </p:cNvPr>
@@ -5600,16 +6005,12 @@
           <p:nvPr/>
         </p:nvSpPr>
         <p:spPr>
-          <a:xfrm rot="5400000">
-            <a:off x="1833031" y="4643968"/>
-            <a:ext cx="1735668" cy="558801"/>
-          </a:xfrm>
-          <a:prstGeom prst="bentUpArrow">
-            <a:avLst>
-              <a:gd name="adj1" fmla="val 38637"/>
-              <a:gd name="adj2" fmla="val 34091"/>
-              <a:gd name="adj3" fmla="val 23485"/>
-            </a:avLst>
+          <a:xfrm>
+            <a:off x="4732867" y="5359400"/>
+            <a:ext cx="3623733" cy="1253067"/>
+          </a:xfrm>
+          <a:prstGeom prst="rect">
+            <a:avLst/>
           </a:prstGeom>
           <a:solidFill>
             <a:srgbClr val="FFFF00"/>
@@ -5646,18 +6047,21 @@
           <a:lstStyle/>
           <a:p>
             <a:pPr algn="ctr"/>
-            <a:endParaRPr lang="pt-BR" sz="2400" dirty="0">
-              <a:solidFill>
-                <a:schemeClr val="tx1"/>
-              </a:solidFill>
-            </a:endParaRPr>
+            <a:r>
+              <a:rPr lang="pt-BR" sz="2400" dirty="0">
+                <a:solidFill>
+                  <a:schemeClr val="tx1"/>
+                </a:solidFill>
+              </a:rPr>
+              <a:t>Encontre o seu tom cor favorito</a:t>
+            </a:r>
           </a:p>
         </p:txBody>
       </p:sp>
     </p:spTree>
     <p:extLst>
       <p:ext uri="{BB962C8B-B14F-4D97-AF65-F5344CB8AC3E}">
-        <p14:creationId xmlns:p14="http://schemas.microsoft.com/office/powerpoint/2010/main" val="3707325996"/>
+        <p14:creationId xmlns:p14="http://schemas.microsoft.com/office/powerpoint/2010/main" val="4177492020"/>
       </p:ext>
     </p:extLst>
   </p:cSld>
@@ -5686,10 +6090,10 @@
       </p:grpSpPr>
       <p:pic>
         <p:nvPicPr>
-          <p:cNvPr id="3" name="Imagem 2">
-            <a:extLst>
-              <a:ext uri="{FF2B5EF4-FFF2-40B4-BE49-F238E27FC236}">
-                <a16:creationId xmlns:a16="http://schemas.microsoft.com/office/drawing/2014/main" id="{98E21326-334F-4998-B7E4-29A69E74FEF3}"/>
+          <p:cNvPr id="2" name="Imagem 1">
+            <a:extLst>
+              <a:ext uri="{FF2B5EF4-FFF2-40B4-BE49-F238E27FC236}">
+                <a16:creationId xmlns:a16="http://schemas.microsoft.com/office/drawing/2014/main" id="{B1A42639-B23B-4D83-9321-3587CE6BCD0C}"/>
               </a:ext>
             </a:extLst>
           </p:cNvPr>
@@ -5699,21 +6103,15 @@
           <p:nvPr/>
         </p:nvPicPr>
         <p:blipFill>
-          <a:blip r:embed="rId2">
-            <a:extLst>
-              <a:ext uri="{28A0092B-C50C-407E-A947-70E740481C1C}">
-                <a14:useLocalDpi xmlns:a14="http://schemas.microsoft.com/office/drawing/2010/main" val="0"/>
-              </a:ext>
-            </a:extLst>
-          </a:blip>
+          <a:blip r:embed="rId2"/>
           <a:stretch>
             <a:fillRect/>
           </a:stretch>
         </p:blipFill>
         <p:spPr>
           <a:xfrm>
-            <a:off x="2268110" y="191785"/>
-            <a:ext cx="7655781" cy="6474428"/>
+            <a:off x="943493" y="426253"/>
+            <a:ext cx="10305012" cy="6005494"/>
           </a:xfrm>
           <a:prstGeom prst="rect">
             <a:avLst/>
@@ -5722,10 +6120,10 @@
       </p:pic>
       <p:sp>
         <p:nvSpPr>
-          <p:cNvPr id="4" name="Retângulo 3">
-            <a:extLst>
-              <a:ext uri="{FF2B5EF4-FFF2-40B4-BE49-F238E27FC236}">
-                <a16:creationId xmlns:a16="http://schemas.microsoft.com/office/drawing/2014/main" id="{2A171431-7509-4510-8FF6-14A91B20882C}"/>
+          <p:cNvPr id="3" name="Retângulo 2">
+            <a:extLst>
+              <a:ext uri="{FF2B5EF4-FFF2-40B4-BE49-F238E27FC236}">
+                <a16:creationId xmlns:a16="http://schemas.microsoft.com/office/drawing/2014/main" id="{6DF95E7D-BB53-4185-9FF2-8A04C2163965}"/>
               </a:ext>
             </a:extLst>
           </p:cNvPr>
@@ -5734,8 +6132,8 @@
         </p:nvSpPr>
         <p:spPr>
           <a:xfrm>
-            <a:off x="2667000" y="1557867"/>
-            <a:ext cx="6798733" cy="4055533"/>
+            <a:off x="2421465" y="3623733"/>
+            <a:ext cx="3742268" cy="431800"/>
           </a:xfrm>
           <a:prstGeom prst="rect">
             <a:avLst/>
@@ -5783,10 +6181,10 @@
       </p:sp>
       <p:sp>
         <p:nvSpPr>
-          <p:cNvPr id="5" name="Retângulo 4">
-            <a:extLst>
-              <a:ext uri="{FF2B5EF4-FFF2-40B4-BE49-F238E27FC236}">
-                <a16:creationId xmlns:a16="http://schemas.microsoft.com/office/drawing/2014/main" id="{1697FE24-3AAB-4563-99F5-6A7153D0ABA0}"/>
+          <p:cNvPr id="4" name="Seta: Dobrada para Cima 3">
+            <a:extLst>
+              <a:ext uri="{FF2B5EF4-FFF2-40B4-BE49-F238E27FC236}">
+                <a16:creationId xmlns:a16="http://schemas.microsoft.com/office/drawing/2014/main" id="{A45DC54E-9B7E-46BC-9BC0-D7920C54DAA0}"/>
               </a:ext>
             </a:extLst>
           </p:cNvPr>
@@ -5794,178 +6192,16 @@
           <p:nvPr/>
         </p:nvSpPr>
         <p:spPr>
-          <a:xfrm>
-            <a:off x="3445933" y="2201333"/>
-            <a:ext cx="2717800" cy="626534"/>
-          </a:xfrm>
-          <a:prstGeom prst="rect">
-            <a:avLst/>
-          </a:prstGeom>
-          <a:noFill/>
-          <a:ln w="38100">
-            <a:solidFill>
-              <a:srgbClr val="00B050"/>
-            </a:solidFill>
-          </a:ln>
-        </p:spPr>
-        <p:style>
-          <a:lnRef idx="2">
-            <a:schemeClr val="accent1">
-              <a:shade val="50000"/>
-            </a:schemeClr>
-          </a:lnRef>
-          <a:fillRef idx="1">
-            <a:schemeClr val="accent1"/>
-          </a:fillRef>
-          <a:effectRef idx="0">
-            <a:schemeClr val="accent1"/>
-          </a:effectRef>
-          <a:fontRef idx="minor">
-            <a:schemeClr val="lt1"/>
-          </a:fontRef>
-        </p:style>
-        <p:txBody>
-          <a:bodyPr rot="0" spcFirstLastPara="0" vertOverflow="overflow" horzOverflow="overflow" vert="horz" wrap="square" lIns="91440" tIns="45720" rIns="91440" bIns="45720" numCol="1" spcCol="0" rtlCol="0" fromWordArt="0" anchor="ctr" anchorCtr="0" forceAA="0" compatLnSpc="1">
-            <a:prstTxWarp prst="textNoShape">
-              <a:avLst/>
-            </a:prstTxWarp>
-            <a:noAutofit/>
-          </a:bodyPr>
-          <a:lstStyle/>
-          <a:p>
-            <a:pPr algn="ctr"/>
-            <a:endParaRPr lang="pt-BR" sz="2400" dirty="0">
-              <a:solidFill>
-                <a:schemeClr val="tx1"/>
-              </a:solidFill>
-            </a:endParaRPr>
-          </a:p>
-        </p:txBody>
-      </p:sp>
-      <p:sp>
-        <p:nvSpPr>
-          <p:cNvPr id="6" name="Retângulo 5">
-            <a:extLst>
-              <a:ext uri="{FF2B5EF4-FFF2-40B4-BE49-F238E27FC236}">
-                <a16:creationId xmlns:a16="http://schemas.microsoft.com/office/drawing/2014/main" id="{60640DB5-26E0-4B7A-BAE7-A913E4FAF3C0}"/>
-              </a:ext>
-            </a:extLst>
-          </p:cNvPr>
-          <p:cNvSpPr/>
-          <p:nvPr/>
-        </p:nvSpPr>
-        <p:spPr>
-          <a:xfrm>
-            <a:off x="3445932" y="2997199"/>
-            <a:ext cx="5748867" cy="1456268"/>
-          </a:xfrm>
-          <a:prstGeom prst="rect">
-            <a:avLst/>
-          </a:prstGeom>
-          <a:noFill/>
-          <a:ln w="38100">
-            <a:solidFill>
-              <a:srgbClr val="7030A0"/>
-            </a:solidFill>
-          </a:ln>
-        </p:spPr>
-        <p:style>
-          <a:lnRef idx="2">
-            <a:schemeClr val="accent1">
-              <a:shade val="50000"/>
-            </a:schemeClr>
-          </a:lnRef>
-          <a:fillRef idx="1">
-            <a:schemeClr val="accent1"/>
-          </a:fillRef>
-          <a:effectRef idx="0">
-            <a:schemeClr val="accent1"/>
-          </a:effectRef>
-          <a:fontRef idx="minor">
-            <a:schemeClr val="lt1"/>
-          </a:fontRef>
-        </p:style>
-        <p:txBody>
-          <a:bodyPr rot="0" spcFirstLastPara="0" vertOverflow="overflow" horzOverflow="overflow" vert="horz" wrap="square" lIns="91440" tIns="45720" rIns="91440" bIns="45720" numCol="1" spcCol="0" rtlCol="0" fromWordArt="0" anchor="ctr" anchorCtr="0" forceAA="0" compatLnSpc="1">
-            <a:prstTxWarp prst="textNoShape">
-              <a:avLst/>
-            </a:prstTxWarp>
-            <a:noAutofit/>
-          </a:bodyPr>
-          <a:lstStyle/>
-          <a:p>
-            <a:pPr algn="ctr"/>
-            <a:endParaRPr lang="pt-BR" sz="2400" dirty="0">
-              <a:solidFill>
-                <a:schemeClr val="tx1"/>
-              </a:solidFill>
-            </a:endParaRPr>
-          </a:p>
-        </p:txBody>
-      </p:sp>
-      <p:cxnSp>
-        <p:nvCxnSpPr>
-          <p:cNvPr id="8" name="Conector de Seta Reta 7">
-            <a:extLst>
-              <a:ext uri="{FF2B5EF4-FFF2-40B4-BE49-F238E27FC236}">
-                <a16:creationId xmlns:a16="http://schemas.microsoft.com/office/drawing/2014/main" id="{2CC3C52A-7A81-483F-B2DD-ADCF549B03E8}"/>
-              </a:ext>
-            </a:extLst>
-          </p:cNvPr>
-          <p:cNvCxnSpPr>
-            <a:cxnSpLocks/>
-          </p:cNvCxnSpPr>
-          <p:nvPr/>
-        </p:nvCxnSpPr>
-        <p:spPr>
-          <a:xfrm>
-            <a:off x="948267" y="711200"/>
-            <a:ext cx="1981200" cy="1109133"/>
-          </a:xfrm>
-          <a:prstGeom prst="straightConnector1">
-            <a:avLst/>
-          </a:prstGeom>
-          <a:ln w="38100">
-            <a:solidFill>
-              <a:srgbClr val="FF0000"/>
-            </a:solidFill>
-            <a:tailEnd type="triangle"/>
-          </a:ln>
-        </p:spPr>
-        <p:style>
-          <a:lnRef idx="1">
-            <a:schemeClr val="accent1"/>
-          </a:lnRef>
-          <a:fillRef idx="0">
-            <a:schemeClr val="accent1"/>
-          </a:fillRef>
-          <a:effectRef idx="0">
-            <a:schemeClr val="accent1"/>
-          </a:effectRef>
-          <a:fontRef idx="minor">
-            <a:schemeClr val="tx1"/>
-          </a:fontRef>
-        </p:style>
-      </p:cxnSp>
-      <p:sp>
-        <p:nvSpPr>
-          <p:cNvPr id="9" name="Elipse 8">
-            <a:extLst>
-              <a:ext uri="{FF2B5EF4-FFF2-40B4-BE49-F238E27FC236}">
-                <a16:creationId xmlns:a16="http://schemas.microsoft.com/office/drawing/2014/main" id="{4A89E98D-D3C9-40D6-920D-AE48DCD3A6E5}"/>
-              </a:ext>
-            </a:extLst>
-          </p:cNvPr>
-          <p:cNvSpPr/>
-          <p:nvPr/>
-        </p:nvSpPr>
-        <p:spPr>
-          <a:xfrm>
-            <a:off x="388989" y="258234"/>
-            <a:ext cx="1219200" cy="948266"/>
-          </a:xfrm>
-          <a:prstGeom prst="ellipse">
-            <a:avLst/>
+          <a:xfrm rot="5400000">
+            <a:off x="1833031" y="4643968"/>
+            <a:ext cx="1735668" cy="558801"/>
+          </a:xfrm>
+          <a:prstGeom prst="bentUpArrow">
+            <a:avLst>
+              <a:gd name="adj1" fmla="val 38637"/>
+              <a:gd name="adj2" fmla="val 34091"/>
+              <a:gd name="adj3" fmla="val 23485"/>
+            </a:avLst>
           </a:prstGeom>
           <a:solidFill>
             <a:srgbClr val="FFFF00"/>
@@ -6002,14 +6238,6 @@
           <a:lstStyle/>
           <a:p>
             <a:pPr algn="ctr"/>
-            <a:r>
-              <a:rPr lang="pt-BR" sz="2400" dirty="0" err="1">
-                <a:solidFill>
-                  <a:schemeClr val="tx1"/>
-                </a:solidFill>
-              </a:rPr>
-              <a:t>div</a:t>
-            </a:r>
             <a:endParaRPr lang="pt-BR" sz="2400" dirty="0">
               <a:solidFill>
                 <a:schemeClr val="tx1"/>
@@ -6018,230 +6246,10 @@
           </a:p>
         </p:txBody>
       </p:sp>
-      <p:sp>
-        <p:nvSpPr>
-          <p:cNvPr id="11" name="Elipse 10">
-            <a:extLst>
-              <a:ext uri="{FF2B5EF4-FFF2-40B4-BE49-F238E27FC236}">
-                <a16:creationId xmlns:a16="http://schemas.microsoft.com/office/drawing/2014/main" id="{282A24D4-68C3-4077-A009-397E4BD0C5DF}"/>
-              </a:ext>
-            </a:extLst>
-          </p:cNvPr>
-          <p:cNvSpPr/>
-          <p:nvPr/>
-        </p:nvSpPr>
-        <p:spPr>
-          <a:xfrm>
-            <a:off x="439551" y="2154767"/>
-            <a:ext cx="1219200" cy="948266"/>
-          </a:xfrm>
-          <a:prstGeom prst="ellipse">
-            <a:avLst/>
-          </a:prstGeom>
-          <a:solidFill>
-            <a:srgbClr val="FFFF00"/>
-          </a:solidFill>
-          <a:ln w="38100">
-            <a:solidFill>
-              <a:srgbClr val="00B050"/>
-            </a:solidFill>
-          </a:ln>
-        </p:spPr>
-        <p:style>
-          <a:lnRef idx="2">
-            <a:schemeClr val="accent1">
-              <a:shade val="50000"/>
-            </a:schemeClr>
-          </a:lnRef>
-          <a:fillRef idx="1">
-            <a:schemeClr val="accent1"/>
-          </a:fillRef>
-          <a:effectRef idx="0">
-            <a:schemeClr val="accent1"/>
-          </a:effectRef>
-          <a:fontRef idx="minor">
-            <a:schemeClr val="lt1"/>
-          </a:fontRef>
-        </p:style>
-        <p:txBody>
-          <a:bodyPr rot="0" spcFirstLastPara="0" vertOverflow="overflow" horzOverflow="overflow" vert="horz" wrap="square" lIns="91440" tIns="45720" rIns="91440" bIns="45720" numCol="1" spcCol="0" rtlCol="0" fromWordArt="0" anchor="ctr" anchorCtr="0" forceAA="0" compatLnSpc="1">
-            <a:prstTxWarp prst="textNoShape">
-              <a:avLst/>
-            </a:prstTxWarp>
-            <a:noAutofit/>
-          </a:bodyPr>
-          <a:lstStyle/>
-          <a:p>
-            <a:pPr algn="ctr"/>
-            <a:r>
-              <a:rPr lang="pt-BR" sz="2400" dirty="0">
-                <a:solidFill>
-                  <a:schemeClr val="tx1"/>
-                </a:solidFill>
-              </a:rPr>
-              <a:t>h3</a:t>
-            </a:r>
-          </a:p>
-        </p:txBody>
-      </p:sp>
-      <p:cxnSp>
-        <p:nvCxnSpPr>
-          <p:cNvPr id="13" name="Conector de Seta Reta 12">
-            <a:extLst>
-              <a:ext uri="{FF2B5EF4-FFF2-40B4-BE49-F238E27FC236}">
-                <a16:creationId xmlns:a16="http://schemas.microsoft.com/office/drawing/2014/main" id="{43B2D97E-3537-48E1-A973-4779579CAF80}"/>
-              </a:ext>
-            </a:extLst>
-          </p:cNvPr>
-          <p:cNvCxnSpPr>
-            <a:stCxn id="11" idx="6"/>
-          </p:cNvCxnSpPr>
-          <p:nvPr/>
-        </p:nvCxnSpPr>
-        <p:spPr>
-          <a:xfrm flipV="1">
-            <a:off x="1658751" y="2514600"/>
-            <a:ext cx="1787181" cy="114300"/>
-          </a:xfrm>
-          <a:prstGeom prst="straightConnector1">
-            <a:avLst/>
-          </a:prstGeom>
-          <a:ln w="38100">
-            <a:solidFill>
-              <a:srgbClr val="00B050"/>
-            </a:solidFill>
-            <a:tailEnd type="triangle"/>
-          </a:ln>
-        </p:spPr>
-        <p:style>
-          <a:lnRef idx="1">
-            <a:schemeClr val="accent1"/>
-          </a:lnRef>
-          <a:fillRef idx="0">
-            <a:schemeClr val="accent1"/>
-          </a:fillRef>
-          <a:effectRef idx="0">
-            <a:schemeClr val="accent1"/>
-          </a:effectRef>
-          <a:fontRef idx="minor">
-            <a:schemeClr val="tx1"/>
-          </a:fontRef>
-        </p:style>
-      </p:cxnSp>
-      <p:sp>
-        <p:nvSpPr>
-          <p:cNvPr id="14" name="Elipse 13">
-            <a:extLst>
-              <a:ext uri="{FF2B5EF4-FFF2-40B4-BE49-F238E27FC236}">
-                <a16:creationId xmlns:a16="http://schemas.microsoft.com/office/drawing/2014/main" id="{0DC9536E-B423-415D-B2D5-C39064AEBF07}"/>
-              </a:ext>
-            </a:extLst>
-          </p:cNvPr>
-          <p:cNvSpPr/>
-          <p:nvPr/>
-        </p:nvSpPr>
-        <p:spPr>
-          <a:xfrm>
-            <a:off x="439551" y="3949700"/>
-            <a:ext cx="1219200" cy="884767"/>
-          </a:xfrm>
-          <a:prstGeom prst="ellipse">
-            <a:avLst/>
-          </a:prstGeom>
-          <a:solidFill>
-            <a:srgbClr val="FFFF00"/>
-          </a:solidFill>
-          <a:ln w="38100">
-            <a:solidFill>
-              <a:srgbClr val="7030A0"/>
-            </a:solidFill>
-          </a:ln>
-        </p:spPr>
-        <p:style>
-          <a:lnRef idx="2">
-            <a:schemeClr val="accent1">
-              <a:shade val="50000"/>
-            </a:schemeClr>
-          </a:lnRef>
-          <a:fillRef idx="1">
-            <a:schemeClr val="accent1"/>
-          </a:fillRef>
-          <a:effectRef idx="0">
-            <a:schemeClr val="accent1"/>
-          </a:effectRef>
-          <a:fontRef idx="minor">
-            <a:schemeClr val="lt1"/>
-          </a:fontRef>
-        </p:style>
-        <p:txBody>
-          <a:bodyPr rot="0" spcFirstLastPara="0" vertOverflow="overflow" horzOverflow="overflow" vert="horz" wrap="square" lIns="91440" tIns="45720" rIns="91440" bIns="45720" numCol="1" spcCol="0" rtlCol="0" fromWordArt="0" anchor="ctr" anchorCtr="0" forceAA="0" compatLnSpc="1">
-            <a:prstTxWarp prst="textNoShape">
-              <a:avLst/>
-            </a:prstTxWarp>
-            <a:noAutofit/>
-          </a:bodyPr>
-          <a:lstStyle/>
-          <a:p>
-            <a:pPr algn="ctr"/>
-            <a:r>
-              <a:rPr lang="pt-BR" sz="2400" dirty="0">
-                <a:solidFill>
-                  <a:schemeClr val="tx1"/>
-                </a:solidFill>
-              </a:rPr>
-              <a:t>p</a:t>
-            </a:r>
-          </a:p>
-        </p:txBody>
-      </p:sp>
-      <p:cxnSp>
-        <p:nvCxnSpPr>
-          <p:cNvPr id="16" name="Conector de Seta Reta 15">
-            <a:extLst>
-              <a:ext uri="{FF2B5EF4-FFF2-40B4-BE49-F238E27FC236}">
-                <a16:creationId xmlns:a16="http://schemas.microsoft.com/office/drawing/2014/main" id="{9DF33E28-308A-4DC2-BF40-3291F8B614D8}"/>
-              </a:ext>
-            </a:extLst>
-          </p:cNvPr>
-          <p:cNvCxnSpPr>
-            <a:stCxn id="14" idx="6"/>
-          </p:cNvCxnSpPr>
-          <p:nvPr/>
-        </p:nvCxnSpPr>
-        <p:spPr>
-          <a:xfrm flipV="1">
-            <a:off x="1658751" y="3217333"/>
-            <a:ext cx="1939582" cy="1174751"/>
-          </a:xfrm>
-          <a:prstGeom prst="straightConnector1">
-            <a:avLst/>
-          </a:prstGeom>
-          <a:ln w="38100">
-            <a:solidFill>
-              <a:srgbClr val="7030A0"/>
-            </a:solidFill>
-            <a:tailEnd type="triangle"/>
-          </a:ln>
-        </p:spPr>
-        <p:style>
-          <a:lnRef idx="1">
-            <a:schemeClr val="accent1"/>
-          </a:lnRef>
-          <a:fillRef idx="0">
-            <a:schemeClr val="accent1"/>
-          </a:fillRef>
-          <a:effectRef idx="0">
-            <a:schemeClr val="accent1"/>
-          </a:effectRef>
-          <a:fontRef idx="minor">
-            <a:schemeClr val="tx1"/>
-          </a:fontRef>
-        </p:style>
-      </p:cxnSp>
     </p:spTree>
     <p:extLst>
       <p:ext uri="{BB962C8B-B14F-4D97-AF65-F5344CB8AC3E}">
-        <p14:creationId xmlns:p14="http://schemas.microsoft.com/office/powerpoint/2010/main" val="1874544638"/>
+        <p14:creationId xmlns:p14="http://schemas.microsoft.com/office/powerpoint/2010/main" val="3707325996"/>
       </p:ext>
     </p:extLst>
   </p:cSld>
@@ -6270,10 +6278,10 @@
       </p:grpSpPr>
       <p:pic>
         <p:nvPicPr>
-          <p:cNvPr id="2" name="Imagem 1">
-            <a:extLst>
-              <a:ext uri="{FF2B5EF4-FFF2-40B4-BE49-F238E27FC236}">
-                <a16:creationId xmlns:a16="http://schemas.microsoft.com/office/drawing/2014/main" id="{A7622AE0-817B-4AE7-94D6-309BE47ADD45}"/>
+          <p:cNvPr id="3" name="Imagem 2">
+            <a:extLst>
+              <a:ext uri="{FF2B5EF4-FFF2-40B4-BE49-F238E27FC236}">
+                <a16:creationId xmlns:a16="http://schemas.microsoft.com/office/drawing/2014/main" id="{98E21326-334F-4998-B7E4-29A69E74FEF3}"/>
               </a:ext>
             </a:extLst>
           </p:cNvPr>
@@ -6283,15 +6291,21 @@
           <p:nvPr/>
         </p:nvPicPr>
         <p:blipFill>
-          <a:blip r:embed="rId2"/>
+          <a:blip r:embed="rId2">
+            <a:extLst>
+              <a:ext uri="{28A0092B-C50C-407E-A947-70E740481C1C}">
+                <a14:useLocalDpi xmlns:a14="http://schemas.microsoft.com/office/drawing/2010/main" val="0"/>
+              </a:ext>
+            </a:extLst>
+          </a:blip>
           <a:stretch>
             <a:fillRect/>
           </a:stretch>
         </p:blipFill>
         <p:spPr>
           <a:xfrm>
-            <a:off x="2771775" y="1000125"/>
-            <a:ext cx="6648450" cy="4857750"/>
+            <a:off x="2268110" y="191785"/>
+            <a:ext cx="7655781" cy="6474428"/>
           </a:xfrm>
           <a:prstGeom prst="rect">
             <a:avLst/>
@@ -6300,10 +6314,10 @@
       </p:pic>
       <p:sp>
         <p:nvSpPr>
-          <p:cNvPr id="3" name="Elipse 2">
-            <a:extLst>
-              <a:ext uri="{FF2B5EF4-FFF2-40B4-BE49-F238E27FC236}">
-                <a16:creationId xmlns:a16="http://schemas.microsoft.com/office/drawing/2014/main" id="{F6F5F683-A10D-46F8-8C58-4F651FA985C6}"/>
+          <p:cNvPr id="4" name="Retângulo 3">
+            <a:extLst>
+              <a:ext uri="{FF2B5EF4-FFF2-40B4-BE49-F238E27FC236}">
+                <a16:creationId xmlns:a16="http://schemas.microsoft.com/office/drawing/2014/main" id="{2A171431-7509-4510-8FF6-14A91B20882C}"/>
               </a:ext>
             </a:extLst>
           </p:cNvPr>
@@ -6312,26 +6326,33 @@
         </p:nvSpPr>
         <p:spPr>
           <a:xfrm>
-            <a:off x="8729133" y="4893733"/>
-            <a:ext cx="2065867" cy="1608667"/>
-          </a:xfrm>
-          <a:prstGeom prst="ellipse">
-            <a:avLst/>
-          </a:prstGeom>
-          <a:ln/>
+            <a:off x="2667000" y="1557867"/>
+            <a:ext cx="6798733" cy="4055533"/>
+          </a:xfrm>
+          <a:prstGeom prst="rect">
+            <a:avLst/>
+          </a:prstGeom>
+          <a:noFill/>
+          <a:ln w="38100">
+            <a:solidFill>
+              <a:srgbClr val="FF0000"/>
+            </a:solidFill>
+          </a:ln>
         </p:spPr>
         <p:style>
-          <a:lnRef idx="1">
-            <a:schemeClr val="accent4"/>
+          <a:lnRef idx="2">
+            <a:schemeClr val="accent1">
+              <a:shade val="50000"/>
+            </a:schemeClr>
           </a:lnRef>
-          <a:fillRef idx="2">
-            <a:schemeClr val="accent4"/>
+          <a:fillRef idx="1">
+            <a:schemeClr val="accent1"/>
           </a:fillRef>
-          <a:effectRef idx="1">
-            <a:schemeClr val="accent4"/>
+          <a:effectRef idx="0">
+            <a:schemeClr val="accent1"/>
           </a:effectRef>
           <a:fontRef idx="minor">
-            <a:schemeClr val="dk1"/>
+            <a:schemeClr val="lt1"/>
           </a:fontRef>
         </p:style>
         <p:txBody>
@@ -6344,21 +6365,475 @@
           <a:lstStyle/>
           <a:p>
             <a:pPr algn="ctr"/>
+            <a:endParaRPr lang="pt-BR" sz="2400" dirty="0">
+              <a:solidFill>
+                <a:schemeClr val="tx1"/>
+              </a:solidFill>
+            </a:endParaRPr>
+          </a:p>
+        </p:txBody>
+      </p:sp>
+      <p:sp>
+        <p:nvSpPr>
+          <p:cNvPr id="5" name="Retângulo 4">
+            <a:extLst>
+              <a:ext uri="{FF2B5EF4-FFF2-40B4-BE49-F238E27FC236}">
+                <a16:creationId xmlns:a16="http://schemas.microsoft.com/office/drawing/2014/main" id="{1697FE24-3AAB-4563-99F5-6A7153D0ABA0}"/>
+              </a:ext>
+            </a:extLst>
+          </p:cNvPr>
+          <p:cNvSpPr/>
+          <p:nvPr/>
+        </p:nvSpPr>
+        <p:spPr>
+          <a:xfrm>
+            <a:off x="3445933" y="2201333"/>
+            <a:ext cx="2717800" cy="626534"/>
+          </a:xfrm>
+          <a:prstGeom prst="rect">
+            <a:avLst/>
+          </a:prstGeom>
+          <a:noFill/>
+          <a:ln w="38100">
+            <a:solidFill>
+              <a:srgbClr val="00B050"/>
+            </a:solidFill>
+          </a:ln>
+        </p:spPr>
+        <p:style>
+          <a:lnRef idx="2">
+            <a:schemeClr val="accent1">
+              <a:shade val="50000"/>
+            </a:schemeClr>
+          </a:lnRef>
+          <a:fillRef idx="1">
+            <a:schemeClr val="accent1"/>
+          </a:fillRef>
+          <a:effectRef idx="0">
+            <a:schemeClr val="accent1"/>
+          </a:effectRef>
+          <a:fontRef idx="minor">
+            <a:schemeClr val="lt1"/>
+          </a:fontRef>
+        </p:style>
+        <p:txBody>
+          <a:bodyPr rot="0" spcFirstLastPara="0" vertOverflow="overflow" horzOverflow="overflow" vert="horz" wrap="square" lIns="91440" tIns="45720" rIns="91440" bIns="45720" numCol="1" spcCol="0" rtlCol="0" fromWordArt="0" anchor="ctr" anchorCtr="0" forceAA="0" compatLnSpc="1">
+            <a:prstTxWarp prst="textNoShape">
+              <a:avLst/>
+            </a:prstTxWarp>
+            <a:noAutofit/>
+          </a:bodyPr>
+          <a:lstStyle/>
+          <a:p>
+            <a:pPr algn="ctr"/>
+            <a:endParaRPr lang="pt-BR" sz="2400" dirty="0">
+              <a:solidFill>
+                <a:schemeClr val="tx1"/>
+              </a:solidFill>
+            </a:endParaRPr>
+          </a:p>
+        </p:txBody>
+      </p:sp>
+      <p:sp>
+        <p:nvSpPr>
+          <p:cNvPr id="6" name="Retângulo 5">
+            <a:extLst>
+              <a:ext uri="{FF2B5EF4-FFF2-40B4-BE49-F238E27FC236}">
+                <a16:creationId xmlns:a16="http://schemas.microsoft.com/office/drawing/2014/main" id="{60640DB5-26E0-4B7A-BAE7-A913E4FAF3C0}"/>
+              </a:ext>
+            </a:extLst>
+          </p:cNvPr>
+          <p:cNvSpPr/>
+          <p:nvPr/>
+        </p:nvSpPr>
+        <p:spPr>
+          <a:xfrm>
+            <a:off x="3445932" y="2997199"/>
+            <a:ext cx="5748867" cy="1456268"/>
+          </a:xfrm>
+          <a:prstGeom prst="rect">
+            <a:avLst/>
+          </a:prstGeom>
+          <a:noFill/>
+          <a:ln w="38100">
+            <a:solidFill>
+              <a:srgbClr val="7030A0"/>
+            </a:solidFill>
+          </a:ln>
+        </p:spPr>
+        <p:style>
+          <a:lnRef idx="2">
+            <a:schemeClr val="accent1">
+              <a:shade val="50000"/>
+            </a:schemeClr>
+          </a:lnRef>
+          <a:fillRef idx="1">
+            <a:schemeClr val="accent1"/>
+          </a:fillRef>
+          <a:effectRef idx="0">
+            <a:schemeClr val="accent1"/>
+          </a:effectRef>
+          <a:fontRef idx="minor">
+            <a:schemeClr val="lt1"/>
+          </a:fontRef>
+        </p:style>
+        <p:txBody>
+          <a:bodyPr rot="0" spcFirstLastPara="0" vertOverflow="overflow" horzOverflow="overflow" vert="horz" wrap="square" lIns="91440" tIns="45720" rIns="91440" bIns="45720" numCol="1" spcCol="0" rtlCol="0" fromWordArt="0" anchor="ctr" anchorCtr="0" forceAA="0" compatLnSpc="1">
+            <a:prstTxWarp prst="textNoShape">
+              <a:avLst/>
+            </a:prstTxWarp>
+            <a:noAutofit/>
+          </a:bodyPr>
+          <a:lstStyle/>
+          <a:p>
+            <a:pPr algn="ctr"/>
+            <a:endParaRPr lang="pt-BR" sz="2400" dirty="0">
+              <a:solidFill>
+                <a:schemeClr val="tx1"/>
+              </a:solidFill>
+            </a:endParaRPr>
+          </a:p>
+        </p:txBody>
+      </p:sp>
+      <p:cxnSp>
+        <p:nvCxnSpPr>
+          <p:cNvPr id="8" name="Conector de Seta Reta 7">
+            <a:extLst>
+              <a:ext uri="{FF2B5EF4-FFF2-40B4-BE49-F238E27FC236}">
+                <a16:creationId xmlns:a16="http://schemas.microsoft.com/office/drawing/2014/main" id="{2CC3C52A-7A81-483F-B2DD-ADCF549B03E8}"/>
+              </a:ext>
+            </a:extLst>
+          </p:cNvPr>
+          <p:cNvCxnSpPr>
+            <a:cxnSpLocks/>
+          </p:cNvCxnSpPr>
+          <p:nvPr/>
+        </p:nvCxnSpPr>
+        <p:spPr>
+          <a:xfrm>
+            <a:off x="948267" y="711200"/>
+            <a:ext cx="1981200" cy="1109133"/>
+          </a:xfrm>
+          <a:prstGeom prst="straightConnector1">
+            <a:avLst/>
+          </a:prstGeom>
+          <a:ln w="38100">
+            <a:solidFill>
+              <a:srgbClr val="FF0000"/>
+            </a:solidFill>
+            <a:tailEnd type="triangle"/>
+          </a:ln>
+        </p:spPr>
+        <p:style>
+          <a:lnRef idx="1">
+            <a:schemeClr val="accent1"/>
+          </a:lnRef>
+          <a:fillRef idx="0">
+            <a:schemeClr val="accent1"/>
+          </a:fillRef>
+          <a:effectRef idx="0">
+            <a:schemeClr val="accent1"/>
+          </a:effectRef>
+          <a:fontRef idx="minor">
+            <a:schemeClr val="tx1"/>
+          </a:fontRef>
+        </p:style>
+      </p:cxnSp>
+      <p:sp>
+        <p:nvSpPr>
+          <p:cNvPr id="9" name="Elipse 8">
+            <a:extLst>
+              <a:ext uri="{FF2B5EF4-FFF2-40B4-BE49-F238E27FC236}">
+                <a16:creationId xmlns:a16="http://schemas.microsoft.com/office/drawing/2014/main" id="{4A89E98D-D3C9-40D6-920D-AE48DCD3A6E5}"/>
+              </a:ext>
+            </a:extLst>
+          </p:cNvPr>
+          <p:cNvSpPr/>
+          <p:nvPr/>
+        </p:nvSpPr>
+        <p:spPr>
+          <a:xfrm>
+            <a:off x="388989" y="258234"/>
+            <a:ext cx="1219200" cy="948266"/>
+          </a:xfrm>
+          <a:prstGeom prst="ellipse">
+            <a:avLst/>
+          </a:prstGeom>
+          <a:solidFill>
+            <a:srgbClr val="FFFF00"/>
+          </a:solidFill>
+          <a:ln w="38100">
+            <a:solidFill>
+              <a:srgbClr val="FF0000"/>
+            </a:solidFill>
+          </a:ln>
+        </p:spPr>
+        <p:style>
+          <a:lnRef idx="2">
+            <a:schemeClr val="accent1">
+              <a:shade val="50000"/>
+            </a:schemeClr>
+          </a:lnRef>
+          <a:fillRef idx="1">
+            <a:schemeClr val="accent1"/>
+          </a:fillRef>
+          <a:effectRef idx="0">
+            <a:schemeClr val="accent1"/>
+          </a:effectRef>
+          <a:fontRef idx="minor">
+            <a:schemeClr val="lt1"/>
+          </a:fontRef>
+        </p:style>
+        <p:txBody>
+          <a:bodyPr rot="0" spcFirstLastPara="0" vertOverflow="overflow" horzOverflow="overflow" vert="horz" wrap="square" lIns="91440" tIns="45720" rIns="91440" bIns="45720" numCol="1" spcCol="0" rtlCol="0" fromWordArt="0" anchor="ctr" anchorCtr="0" forceAA="0" compatLnSpc="1">
+            <a:prstTxWarp prst="textNoShape">
+              <a:avLst/>
+            </a:prstTxWarp>
+            <a:noAutofit/>
+          </a:bodyPr>
+          <a:lstStyle/>
+          <a:p>
+            <a:pPr algn="ctr"/>
+            <a:r>
+              <a:rPr lang="pt-BR" sz="2400" dirty="0" err="1">
+                <a:solidFill>
+                  <a:schemeClr val="tx1"/>
+                </a:solidFill>
+              </a:rPr>
+              <a:t>div</a:t>
+            </a:r>
+            <a:endParaRPr lang="pt-BR" sz="2400" dirty="0">
+              <a:solidFill>
+                <a:schemeClr val="tx1"/>
+              </a:solidFill>
+            </a:endParaRPr>
+          </a:p>
+        </p:txBody>
+      </p:sp>
+      <p:sp>
+        <p:nvSpPr>
+          <p:cNvPr id="11" name="Elipse 10">
+            <a:extLst>
+              <a:ext uri="{FF2B5EF4-FFF2-40B4-BE49-F238E27FC236}">
+                <a16:creationId xmlns:a16="http://schemas.microsoft.com/office/drawing/2014/main" id="{282A24D4-68C3-4077-A009-397E4BD0C5DF}"/>
+              </a:ext>
+            </a:extLst>
+          </p:cNvPr>
+          <p:cNvSpPr/>
+          <p:nvPr/>
+        </p:nvSpPr>
+        <p:spPr>
+          <a:xfrm>
+            <a:off x="439551" y="2154767"/>
+            <a:ext cx="1219200" cy="948266"/>
+          </a:xfrm>
+          <a:prstGeom prst="ellipse">
+            <a:avLst/>
+          </a:prstGeom>
+          <a:solidFill>
+            <a:srgbClr val="FFFF00"/>
+          </a:solidFill>
+          <a:ln w="38100">
+            <a:solidFill>
+              <a:srgbClr val="00B050"/>
+            </a:solidFill>
+          </a:ln>
+        </p:spPr>
+        <p:style>
+          <a:lnRef idx="2">
+            <a:schemeClr val="accent1">
+              <a:shade val="50000"/>
+            </a:schemeClr>
+          </a:lnRef>
+          <a:fillRef idx="1">
+            <a:schemeClr val="accent1"/>
+          </a:fillRef>
+          <a:effectRef idx="0">
+            <a:schemeClr val="accent1"/>
+          </a:effectRef>
+          <a:fontRef idx="minor">
+            <a:schemeClr val="lt1"/>
+          </a:fontRef>
+        </p:style>
+        <p:txBody>
+          <a:bodyPr rot="0" spcFirstLastPara="0" vertOverflow="overflow" horzOverflow="overflow" vert="horz" wrap="square" lIns="91440" tIns="45720" rIns="91440" bIns="45720" numCol="1" spcCol="0" rtlCol="0" fromWordArt="0" anchor="ctr" anchorCtr="0" forceAA="0" compatLnSpc="1">
+            <a:prstTxWarp prst="textNoShape">
+              <a:avLst/>
+            </a:prstTxWarp>
+            <a:noAutofit/>
+          </a:bodyPr>
+          <a:lstStyle/>
+          <a:p>
+            <a:pPr algn="ctr"/>
             <a:r>
               <a:rPr lang="pt-BR" sz="2400" dirty="0">
                 <a:solidFill>
                   <a:schemeClr val="tx1"/>
                 </a:solidFill>
               </a:rPr>
-              <a:t>Resultado Parcial</a:t>
+              <a:t>h3</a:t>
             </a:r>
           </a:p>
         </p:txBody>
       </p:sp>
+      <p:cxnSp>
+        <p:nvCxnSpPr>
+          <p:cNvPr id="13" name="Conector de Seta Reta 12">
+            <a:extLst>
+              <a:ext uri="{FF2B5EF4-FFF2-40B4-BE49-F238E27FC236}">
+                <a16:creationId xmlns:a16="http://schemas.microsoft.com/office/drawing/2014/main" id="{43B2D97E-3537-48E1-A973-4779579CAF80}"/>
+              </a:ext>
+            </a:extLst>
+          </p:cNvPr>
+          <p:cNvCxnSpPr>
+            <a:stCxn id="11" idx="6"/>
+          </p:cNvCxnSpPr>
+          <p:nvPr/>
+        </p:nvCxnSpPr>
+        <p:spPr>
+          <a:xfrm flipV="1">
+            <a:off x="1658751" y="2514600"/>
+            <a:ext cx="1787181" cy="114300"/>
+          </a:xfrm>
+          <a:prstGeom prst="straightConnector1">
+            <a:avLst/>
+          </a:prstGeom>
+          <a:ln w="38100">
+            <a:solidFill>
+              <a:srgbClr val="00B050"/>
+            </a:solidFill>
+            <a:tailEnd type="triangle"/>
+          </a:ln>
+        </p:spPr>
+        <p:style>
+          <a:lnRef idx="1">
+            <a:schemeClr val="accent1"/>
+          </a:lnRef>
+          <a:fillRef idx="0">
+            <a:schemeClr val="accent1"/>
+          </a:fillRef>
+          <a:effectRef idx="0">
+            <a:schemeClr val="accent1"/>
+          </a:effectRef>
+          <a:fontRef idx="minor">
+            <a:schemeClr val="tx1"/>
+          </a:fontRef>
+        </p:style>
+      </p:cxnSp>
+      <p:sp>
+        <p:nvSpPr>
+          <p:cNvPr id="14" name="Elipse 13">
+            <a:extLst>
+              <a:ext uri="{FF2B5EF4-FFF2-40B4-BE49-F238E27FC236}">
+                <a16:creationId xmlns:a16="http://schemas.microsoft.com/office/drawing/2014/main" id="{0DC9536E-B423-415D-B2D5-C39064AEBF07}"/>
+              </a:ext>
+            </a:extLst>
+          </p:cNvPr>
+          <p:cNvSpPr/>
+          <p:nvPr/>
+        </p:nvSpPr>
+        <p:spPr>
+          <a:xfrm>
+            <a:off x="439551" y="3949700"/>
+            <a:ext cx="1219200" cy="884767"/>
+          </a:xfrm>
+          <a:prstGeom prst="ellipse">
+            <a:avLst/>
+          </a:prstGeom>
+          <a:solidFill>
+            <a:srgbClr val="FFFF00"/>
+          </a:solidFill>
+          <a:ln w="38100">
+            <a:solidFill>
+              <a:srgbClr val="7030A0"/>
+            </a:solidFill>
+          </a:ln>
+        </p:spPr>
+        <p:style>
+          <a:lnRef idx="2">
+            <a:schemeClr val="accent1">
+              <a:shade val="50000"/>
+            </a:schemeClr>
+          </a:lnRef>
+          <a:fillRef idx="1">
+            <a:schemeClr val="accent1"/>
+          </a:fillRef>
+          <a:effectRef idx="0">
+            <a:schemeClr val="accent1"/>
+          </a:effectRef>
+          <a:fontRef idx="minor">
+            <a:schemeClr val="lt1"/>
+          </a:fontRef>
+        </p:style>
+        <p:txBody>
+          <a:bodyPr rot="0" spcFirstLastPara="0" vertOverflow="overflow" horzOverflow="overflow" vert="horz" wrap="square" lIns="91440" tIns="45720" rIns="91440" bIns="45720" numCol="1" spcCol="0" rtlCol="0" fromWordArt="0" anchor="ctr" anchorCtr="0" forceAA="0" compatLnSpc="1">
+            <a:prstTxWarp prst="textNoShape">
+              <a:avLst/>
+            </a:prstTxWarp>
+            <a:noAutofit/>
+          </a:bodyPr>
+          <a:lstStyle/>
+          <a:p>
+            <a:pPr algn="ctr"/>
+            <a:r>
+              <a:rPr lang="pt-BR" sz="2400" dirty="0">
+                <a:solidFill>
+                  <a:schemeClr val="tx1"/>
+                </a:solidFill>
+              </a:rPr>
+              <a:t>p</a:t>
+            </a:r>
+          </a:p>
+        </p:txBody>
+      </p:sp>
+      <p:cxnSp>
+        <p:nvCxnSpPr>
+          <p:cNvPr id="16" name="Conector de Seta Reta 15">
+            <a:extLst>
+              <a:ext uri="{FF2B5EF4-FFF2-40B4-BE49-F238E27FC236}">
+                <a16:creationId xmlns:a16="http://schemas.microsoft.com/office/drawing/2014/main" id="{9DF33E28-308A-4DC2-BF40-3291F8B614D8}"/>
+              </a:ext>
+            </a:extLst>
+          </p:cNvPr>
+          <p:cNvCxnSpPr>
+            <a:stCxn id="14" idx="6"/>
+          </p:cNvCxnSpPr>
+          <p:nvPr/>
+        </p:nvCxnSpPr>
+        <p:spPr>
+          <a:xfrm flipV="1">
+            <a:off x="1658751" y="3217333"/>
+            <a:ext cx="1939582" cy="1174751"/>
+          </a:xfrm>
+          <a:prstGeom prst="straightConnector1">
+            <a:avLst/>
+          </a:prstGeom>
+          <a:ln w="38100">
+            <a:solidFill>
+              <a:srgbClr val="7030A0"/>
+            </a:solidFill>
+            <a:tailEnd type="triangle"/>
+          </a:ln>
+        </p:spPr>
+        <p:style>
+          <a:lnRef idx="1">
+            <a:schemeClr val="accent1"/>
+          </a:lnRef>
+          <a:fillRef idx="0">
+            <a:schemeClr val="accent1"/>
+          </a:fillRef>
+          <a:effectRef idx="0">
+            <a:schemeClr val="accent1"/>
+          </a:effectRef>
+          <a:fontRef idx="minor">
+            <a:schemeClr val="tx1"/>
+          </a:fontRef>
+        </p:style>
+      </p:cxnSp>
     </p:spTree>
     <p:extLst>
       <p:ext uri="{BB962C8B-B14F-4D97-AF65-F5344CB8AC3E}">
-        <p14:creationId xmlns:p14="http://schemas.microsoft.com/office/powerpoint/2010/main" val="3259708915"/>
+        <p14:creationId xmlns:p14="http://schemas.microsoft.com/office/powerpoint/2010/main" val="1874544638"/>
       </p:ext>
     </p:extLst>
   </p:cSld>
@@ -6390,7 +6865,7 @@
           <p:cNvPr id="4" name="Imagem 3">
             <a:extLst>
               <a:ext uri="{FF2B5EF4-FFF2-40B4-BE49-F238E27FC236}">
-                <a16:creationId xmlns:a16="http://schemas.microsoft.com/office/drawing/2014/main" id="{D19E5CFC-BF3D-4F01-990B-9341B77D0D68}"/>
+                <a16:creationId xmlns:a16="http://schemas.microsoft.com/office/drawing/2014/main" id="{6A183221-BF10-4457-84FC-F376A3AD9B4A}"/>
               </a:ext>
             </a:extLst>
           </p:cNvPr>
@@ -6407,8 +6882,8 @@
         </p:blipFill>
         <p:spPr>
           <a:xfrm>
-            <a:off x="1524000" y="247650"/>
-            <a:ext cx="9144000" cy="6362700"/>
+            <a:off x="554182" y="450273"/>
+            <a:ext cx="11083636" cy="5957455"/>
           </a:xfrm>
           <a:prstGeom prst="rect">
             <a:avLst/>
@@ -6418,7 +6893,7 @@
     </p:spTree>
     <p:extLst>
       <p:ext uri="{BB962C8B-B14F-4D97-AF65-F5344CB8AC3E}">
-        <p14:creationId xmlns:p14="http://schemas.microsoft.com/office/powerpoint/2010/main" val="1982557280"/>
+        <p14:creationId xmlns:p14="http://schemas.microsoft.com/office/powerpoint/2010/main" val="2592073764"/>
       </p:ext>
     </p:extLst>
   </p:cSld>
@@ -6447,6 +6922,123 @@
       </p:grpSpPr>
       <p:pic>
         <p:nvPicPr>
+          <p:cNvPr id="2" name="Imagem 1">
+            <a:extLst>
+              <a:ext uri="{FF2B5EF4-FFF2-40B4-BE49-F238E27FC236}">
+                <a16:creationId xmlns:a16="http://schemas.microsoft.com/office/drawing/2014/main" id="{A7622AE0-817B-4AE7-94D6-309BE47ADD45}"/>
+              </a:ext>
+            </a:extLst>
+          </p:cNvPr>
+          <p:cNvPicPr>
+            <a:picLocks noChangeAspect="1"/>
+          </p:cNvPicPr>
+          <p:nvPr/>
+        </p:nvPicPr>
+        <p:blipFill>
+          <a:blip r:embed="rId2"/>
+          <a:stretch>
+            <a:fillRect/>
+          </a:stretch>
+        </p:blipFill>
+        <p:spPr>
+          <a:xfrm>
+            <a:off x="2771775" y="1000125"/>
+            <a:ext cx="6648450" cy="4857750"/>
+          </a:xfrm>
+          <a:prstGeom prst="rect">
+            <a:avLst/>
+          </a:prstGeom>
+        </p:spPr>
+      </p:pic>
+      <p:sp>
+        <p:nvSpPr>
+          <p:cNvPr id="3" name="Elipse 2">
+            <a:extLst>
+              <a:ext uri="{FF2B5EF4-FFF2-40B4-BE49-F238E27FC236}">
+                <a16:creationId xmlns:a16="http://schemas.microsoft.com/office/drawing/2014/main" id="{F6F5F683-A10D-46F8-8C58-4F651FA985C6}"/>
+              </a:ext>
+            </a:extLst>
+          </p:cNvPr>
+          <p:cNvSpPr/>
+          <p:nvPr/>
+        </p:nvSpPr>
+        <p:spPr>
+          <a:xfrm>
+            <a:off x="8729133" y="4893733"/>
+            <a:ext cx="2065867" cy="1608667"/>
+          </a:xfrm>
+          <a:prstGeom prst="ellipse">
+            <a:avLst/>
+          </a:prstGeom>
+          <a:ln/>
+        </p:spPr>
+        <p:style>
+          <a:lnRef idx="1">
+            <a:schemeClr val="accent4"/>
+          </a:lnRef>
+          <a:fillRef idx="2">
+            <a:schemeClr val="accent4"/>
+          </a:fillRef>
+          <a:effectRef idx="1">
+            <a:schemeClr val="accent4"/>
+          </a:effectRef>
+          <a:fontRef idx="minor">
+            <a:schemeClr val="dk1"/>
+          </a:fontRef>
+        </p:style>
+        <p:txBody>
+          <a:bodyPr rot="0" spcFirstLastPara="0" vertOverflow="overflow" horzOverflow="overflow" vert="horz" wrap="square" lIns="91440" tIns="45720" rIns="91440" bIns="45720" numCol="1" spcCol="0" rtlCol="0" fromWordArt="0" anchor="ctr" anchorCtr="0" forceAA="0" compatLnSpc="1">
+            <a:prstTxWarp prst="textNoShape">
+              <a:avLst/>
+            </a:prstTxWarp>
+            <a:noAutofit/>
+          </a:bodyPr>
+          <a:lstStyle/>
+          <a:p>
+            <a:pPr algn="ctr"/>
+            <a:r>
+              <a:rPr lang="pt-BR" sz="2400" dirty="0">
+                <a:solidFill>
+                  <a:schemeClr val="tx1"/>
+                </a:solidFill>
+              </a:rPr>
+              <a:t>Resultado Parcial</a:t>
+            </a:r>
+          </a:p>
+        </p:txBody>
+      </p:sp>
+    </p:spTree>
+    <p:extLst>
+      <p:ext uri="{BB962C8B-B14F-4D97-AF65-F5344CB8AC3E}">
+        <p14:creationId xmlns:p14="http://schemas.microsoft.com/office/powerpoint/2010/main" val="3259708915"/>
+      </p:ext>
+    </p:extLst>
+  </p:cSld>
+  <p:clrMapOvr>
+    <a:masterClrMapping/>
+  </p:clrMapOvr>
+</p:sld>
+</file>
+
+<file path=ppt/slides/slide31.xml><?xml version="1.0" encoding="utf-8"?>
+<p:sld xmlns:a="http://schemas.openxmlformats.org/drawingml/2006/main" xmlns:r="http://schemas.openxmlformats.org/officeDocument/2006/relationships" xmlns:p="http://schemas.openxmlformats.org/presentationml/2006/main">
+  <p:cSld>
+    <p:spTree>
+      <p:nvGrpSpPr>
+        <p:cNvPr id="1" name=""/>
+        <p:cNvGrpSpPr/>
+        <p:nvPr/>
+      </p:nvGrpSpPr>
+      <p:grpSpPr>
+        <a:xfrm>
+          <a:off x="0" y="0"/>
+          <a:ext cx="0" cy="0"/>
+          <a:chOff x="0" y="0"/>
+          <a:chExt cx="0" cy="0"/>
+        </a:xfrm>
+      </p:grpSpPr>
+      <p:pic>
+        <p:nvPicPr>
           <p:cNvPr id="3" name="Imagem 2">
             <a:extLst>
               <a:ext uri="{FF2B5EF4-FFF2-40B4-BE49-F238E27FC236}">
@@ -6616,7 +7208,7 @@
 </p:sld>
 </file>
 
-<file path=ppt/slides/slide31.xml><?xml version="1.0" encoding="utf-8"?>
+<file path=ppt/slides/slide32.xml><?xml version="1.0" encoding="utf-8"?>
 <p:sld xmlns:a="http://schemas.openxmlformats.org/drawingml/2006/main" xmlns:r="http://schemas.openxmlformats.org/officeDocument/2006/relationships" xmlns:p="http://schemas.openxmlformats.org/presentationml/2006/main">
   <p:cSld>
     <p:spTree>
@@ -6867,66 +7459,6 @@
 </p:sld>
 </file>
 
-<file path=ppt/slides/slide32.xml><?xml version="1.0" encoding="utf-8"?>
-<p:sld xmlns:a="http://schemas.openxmlformats.org/drawingml/2006/main" xmlns:r="http://schemas.openxmlformats.org/officeDocument/2006/relationships" xmlns:p="http://schemas.openxmlformats.org/presentationml/2006/main">
-  <p:cSld>
-    <p:spTree>
-      <p:nvGrpSpPr>
-        <p:cNvPr id="1" name=""/>
-        <p:cNvGrpSpPr/>
-        <p:nvPr/>
-      </p:nvGrpSpPr>
-      <p:grpSpPr>
-        <a:xfrm>
-          <a:off x="0" y="0"/>
-          <a:ext cx="0" cy="0"/>
-          <a:chOff x="0" y="0"/>
-          <a:chExt cx="0" cy="0"/>
-        </a:xfrm>
-      </p:grpSpPr>
-      <p:pic>
-        <p:nvPicPr>
-          <p:cNvPr id="2" name="Imagem 1">
-            <a:extLst>
-              <a:ext uri="{FF2B5EF4-FFF2-40B4-BE49-F238E27FC236}">
-                <a16:creationId xmlns:a16="http://schemas.microsoft.com/office/drawing/2014/main" id="{BCB84444-6119-45EF-B691-4E472AA9B697}"/>
-              </a:ext>
-            </a:extLst>
-          </p:cNvPr>
-          <p:cNvPicPr>
-            <a:picLocks noChangeAspect="1"/>
-          </p:cNvPicPr>
-          <p:nvPr/>
-        </p:nvPicPr>
-        <p:blipFill>
-          <a:blip r:embed="rId2"/>
-          <a:stretch>
-            <a:fillRect/>
-          </a:stretch>
-        </p:blipFill>
-        <p:spPr>
-          <a:xfrm>
-            <a:off x="2771775" y="1000125"/>
-            <a:ext cx="6648450" cy="4857750"/>
-          </a:xfrm>
-          <a:prstGeom prst="rect">
-            <a:avLst/>
-          </a:prstGeom>
-        </p:spPr>
-      </p:pic>
-    </p:spTree>
-    <p:extLst>
-      <p:ext uri="{BB962C8B-B14F-4D97-AF65-F5344CB8AC3E}">
-        <p14:creationId xmlns:p14="http://schemas.microsoft.com/office/powerpoint/2010/main" val="2468613962"/>
-      </p:ext>
-    </p:extLst>
-  </p:cSld>
-  <p:clrMapOvr>
-    <a:masterClrMapping/>
-  </p:clrMapOvr>
-</p:sld>
-</file>
-
 <file path=ppt/slides/slide33.xml><?xml version="1.0" encoding="utf-8"?>
 <p:sld xmlns:a="http://schemas.openxmlformats.org/drawingml/2006/main" xmlns:r="http://schemas.openxmlformats.org/officeDocument/2006/relationships" xmlns:p="http://schemas.openxmlformats.org/presentationml/2006/main">
   <p:cSld>
@@ -6949,7 +7481,7 @@
           <p:cNvPr id="2" name="Imagem 1">
             <a:extLst>
               <a:ext uri="{FF2B5EF4-FFF2-40B4-BE49-F238E27FC236}">
-                <a16:creationId xmlns:a16="http://schemas.microsoft.com/office/drawing/2014/main" id="{5184F165-06ED-450C-943B-524DAACA0184}"/>
+                <a16:creationId xmlns:a16="http://schemas.microsoft.com/office/drawing/2014/main" id="{BCB84444-6119-45EF-B691-4E472AA9B697}"/>
               </a:ext>
             </a:extLst>
           </p:cNvPr>
@@ -6966,79 +7498,18 @@
         </p:blipFill>
         <p:spPr>
           <a:xfrm>
-            <a:off x="1225903" y="599156"/>
-            <a:ext cx="9740195" cy="5659688"/>
+            <a:off x="2771775" y="1000125"/>
+            <a:ext cx="6648450" cy="4857750"/>
           </a:xfrm>
           <a:prstGeom prst="rect">
             <a:avLst/>
           </a:prstGeom>
         </p:spPr>
       </p:pic>
-      <p:sp>
-        <p:nvSpPr>
-          <p:cNvPr id="3" name="Retângulo 2">
-            <a:extLst>
-              <a:ext uri="{FF2B5EF4-FFF2-40B4-BE49-F238E27FC236}">
-                <a16:creationId xmlns:a16="http://schemas.microsoft.com/office/drawing/2014/main" id="{F9BB9F3C-4B44-4024-9960-36E49F29B2EA}"/>
-              </a:ext>
-            </a:extLst>
-          </p:cNvPr>
-          <p:cNvSpPr/>
-          <p:nvPr/>
-        </p:nvSpPr>
-        <p:spPr>
-          <a:xfrm>
-            <a:off x="2015067" y="2404533"/>
-            <a:ext cx="1930400" cy="423334"/>
-          </a:xfrm>
-          <a:prstGeom prst="rect">
-            <a:avLst/>
-          </a:prstGeom>
-          <a:noFill/>
-          <a:ln w="38100">
-            <a:solidFill>
-              <a:srgbClr val="FF0000"/>
-            </a:solidFill>
-          </a:ln>
-        </p:spPr>
-        <p:style>
-          <a:lnRef idx="2">
-            <a:schemeClr val="accent1">
-              <a:shade val="50000"/>
-            </a:schemeClr>
-          </a:lnRef>
-          <a:fillRef idx="1">
-            <a:schemeClr val="accent1"/>
-          </a:fillRef>
-          <a:effectRef idx="0">
-            <a:schemeClr val="accent1"/>
-          </a:effectRef>
-          <a:fontRef idx="minor">
-            <a:schemeClr val="lt1"/>
-          </a:fontRef>
-        </p:style>
-        <p:txBody>
-          <a:bodyPr rot="0" spcFirstLastPara="0" vertOverflow="overflow" horzOverflow="overflow" vert="horz" wrap="square" lIns="91440" tIns="45720" rIns="91440" bIns="45720" numCol="1" spcCol="0" rtlCol="0" fromWordArt="0" anchor="ctr" anchorCtr="0" forceAA="0" compatLnSpc="1">
-            <a:prstTxWarp prst="textNoShape">
-              <a:avLst/>
-            </a:prstTxWarp>
-            <a:noAutofit/>
-          </a:bodyPr>
-          <a:lstStyle/>
-          <a:p>
-            <a:pPr algn="ctr"/>
-            <a:endParaRPr lang="pt-BR" sz="2400" dirty="0">
-              <a:solidFill>
-                <a:schemeClr val="tx1"/>
-              </a:solidFill>
-            </a:endParaRPr>
-          </a:p>
-        </p:txBody>
-      </p:sp>
     </p:spTree>
     <p:extLst>
       <p:ext uri="{BB962C8B-B14F-4D97-AF65-F5344CB8AC3E}">
-        <p14:creationId xmlns:p14="http://schemas.microsoft.com/office/powerpoint/2010/main" val="4146083508"/>
+        <p14:creationId xmlns:p14="http://schemas.microsoft.com/office/powerpoint/2010/main" val="2468613962"/>
       </p:ext>
     </p:extLst>
   </p:cSld>
@@ -7070,7 +7541,7 @@
           <p:cNvPr id="2" name="Imagem 1">
             <a:extLst>
               <a:ext uri="{FF2B5EF4-FFF2-40B4-BE49-F238E27FC236}">
-                <a16:creationId xmlns:a16="http://schemas.microsoft.com/office/drawing/2014/main" id="{7450521B-A6FE-42E0-B836-C26B7C2F021E}"/>
+                <a16:creationId xmlns:a16="http://schemas.microsoft.com/office/drawing/2014/main" id="{5184F165-06ED-450C-943B-524DAACA0184}"/>
               </a:ext>
             </a:extLst>
           </p:cNvPr>
@@ -7087,18 +7558,79 @@
         </p:blipFill>
         <p:spPr>
           <a:xfrm>
-            <a:off x="554182" y="450273"/>
-            <a:ext cx="11083636" cy="5957455"/>
+            <a:off x="1225903" y="599156"/>
+            <a:ext cx="9740195" cy="5659688"/>
           </a:xfrm>
           <a:prstGeom prst="rect">
             <a:avLst/>
           </a:prstGeom>
         </p:spPr>
       </p:pic>
+      <p:sp>
+        <p:nvSpPr>
+          <p:cNvPr id="3" name="Retângulo 2">
+            <a:extLst>
+              <a:ext uri="{FF2B5EF4-FFF2-40B4-BE49-F238E27FC236}">
+                <a16:creationId xmlns:a16="http://schemas.microsoft.com/office/drawing/2014/main" id="{F9BB9F3C-4B44-4024-9960-36E49F29B2EA}"/>
+              </a:ext>
+            </a:extLst>
+          </p:cNvPr>
+          <p:cNvSpPr/>
+          <p:nvPr/>
+        </p:nvSpPr>
+        <p:spPr>
+          <a:xfrm>
+            <a:off x="2015067" y="2404533"/>
+            <a:ext cx="1930400" cy="423334"/>
+          </a:xfrm>
+          <a:prstGeom prst="rect">
+            <a:avLst/>
+          </a:prstGeom>
+          <a:noFill/>
+          <a:ln w="38100">
+            <a:solidFill>
+              <a:srgbClr val="FF0000"/>
+            </a:solidFill>
+          </a:ln>
+        </p:spPr>
+        <p:style>
+          <a:lnRef idx="2">
+            <a:schemeClr val="accent1">
+              <a:shade val="50000"/>
+            </a:schemeClr>
+          </a:lnRef>
+          <a:fillRef idx="1">
+            <a:schemeClr val="accent1"/>
+          </a:fillRef>
+          <a:effectRef idx="0">
+            <a:schemeClr val="accent1"/>
+          </a:effectRef>
+          <a:fontRef idx="minor">
+            <a:schemeClr val="lt1"/>
+          </a:fontRef>
+        </p:style>
+        <p:txBody>
+          <a:bodyPr rot="0" spcFirstLastPara="0" vertOverflow="overflow" horzOverflow="overflow" vert="horz" wrap="square" lIns="91440" tIns="45720" rIns="91440" bIns="45720" numCol="1" spcCol="0" rtlCol="0" fromWordArt="0" anchor="ctr" anchorCtr="0" forceAA="0" compatLnSpc="1">
+            <a:prstTxWarp prst="textNoShape">
+              <a:avLst/>
+            </a:prstTxWarp>
+            <a:noAutofit/>
+          </a:bodyPr>
+          <a:lstStyle/>
+          <a:p>
+            <a:pPr algn="ctr"/>
+            <a:endParaRPr lang="pt-BR" sz="2400" dirty="0">
+              <a:solidFill>
+                <a:schemeClr val="tx1"/>
+              </a:solidFill>
+            </a:endParaRPr>
+          </a:p>
+        </p:txBody>
+      </p:sp>
     </p:spTree>
     <p:extLst>
       <p:ext uri="{BB962C8B-B14F-4D97-AF65-F5344CB8AC3E}">
-        <p14:creationId xmlns:p14="http://schemas.microsoft.com/office/powerpoint/2010/main" val="2199699224"/>
+        <p14:creationId xmlns:p14="http://schemas.microsoft.com/office/powerpoint/2010/main" val="4146083508"/>
       </p:ext>
     </p:extLst>
   </p:cSld>
@@ -7130,7 +7662,7 @@
           <p:cNvPr id="2" name="Imagem 1">
             <a:extLst>
               <a:ext uri="{FF2B5EF4-FFF2-40B4-BE49-F238E27FC236}">
-                <a16:creationId xmlns:a16="http://schemas.microsoft.com/office/drawing/2014/main" id="{7F252B57-929B-4161-B4AE-65C9B5CCE7CD}"/>
+                <a16:creationId xmlns:a16="http://schemas.microsoft.com/office/drawing/2014/main" id="{7450521B-A6FE-42E0-B836-C26B7C2F021E}"/>
               </a:ext>
             </a:extLst>
           </p:cNvPr>
@@ -7147,79 +7679,18 @@
         </p:blipFill>
         <p:spPr>
           <a:xfrm>
-            <a:off x="1150977" y="109265"/>
-            <a:ext cx="9890045" cy="6639471"/>
+            <a:off x="554182" y="450273"/>
+            <a:ext cx="11083636" cy="5957455"/>
           </a:xfrm>
           <a:prstGeom prst="rect">
             <a:avLst/>
           </a:prstGeom>
         </p:spPr>
       </p:pic>
-      <p:sp>
-        <p:nvSpPr>
-          <p:cNvPr id="3" name="Retângulo 2">
-            <a:extLst>
-              <a:ext uri="{FF2B5EF4-FFF2-40B4-BE49-F238E27FC236}">
-                <a16:creationId xmlns:a16="http://schemas.microsoft.com/office/drawing/2014/main" id="{878CD48E-7C3D-4FE8-86A3-25FBAE013E4F}"/>
-              </a:ext>
-            </a:extLst>
-          </p:cNvPr>
-          <p:cNvSpPr/>
-          <p:nvPr/>
-        </p:nvSpPr>
-        <p:spPr>
-          <a:xfrm>
-            <a:off x="1837267" y="2057401"/>
-            <a:ext cx="1811866" cy="330200"/>
-          </a:xfrm>
-          <a:prstGeom prst="rect">
-            <a:avLst/>
-          </a:prstGeom>
-          <a:noFill/>
-          <a:ln w="38100">
-            <a:solidFill>
-              <a:srgbClr val="FF0000"/>
-            </a:solidFill>
-          </a:ln>
-        </p:spPr>
-        <p:style>
-          <a:lnRef idx="2">
-            <a:schemeClr val="accent1">
-              <a:shade val="50000"/>
-            </a:schemeClr>
-          </a:lnRef>
-          <a:fillRef idx="1">
-            <a:schemeClr val="accent1"/>
-          </a:fillRef>
-          <a:effectRef idx="0">
-            <a:schemeClr val="accent1"/>
-          </a:effectRef>
-          <a:fontRef idx="minor">
-            <a:schemeClr val="lt1"/>
-          </a:fontRef>
-        </p:style>
-        <p:txBody>
-          <a:bodyPr rot="0" spcFirstLastPara="0" vertOverflow="overflow" horzOverflow="overflow" vert="horz" wrap="square" lIns="91440" tIns="45720" rIns="91440" bIns="45720" numCol="1" spcCol="0" rtlCol="0" fromWordArt="0" anchor="ctr" anchorCtr="0" forceAA="0" compatLnSpc="1">
-            <a:prstTxWarp prst="textNoShape">
-              <a:avLst/>
-            </a:prstTxWarp>
-            <a:noAutofit/>
-          </a:bodyPr>
-          <a:lstStyle/>
-          <a:p>
-            <a:pPr algn="ctr"/>
-            <a:endParaRPr lang="pt-BR" sz="2400" dirty="0">
-              <a:solidFill>
-                <a:schemeClr val="tx1"/>
-              </a:solidFill>
-            </a:endParaRPr>
-          </a:p>
-        </p:txBody>
-      </p:sp>
     </p:spTree>
     <p:extLst>
       <p:ext uri="{BB962C8B-B14F-4D97-AF65-F5344CB8AC3E}">
-        <p14:creationId xmlns:p14="http://schemas.microsoft.com/office/powerpoint/2010/main" val="2834003094"/>
+        <p14:creationId xmlns:p14="http://schemas.microsoft.com/office/powerpoint/2010/main" val="2199699224"/>
       </p:ext>
     </p:extLst>
   </p:cSld>
@@ -7248,10 +7719,10 @@
       </p:grpSpPr>
       <p:pic>
         <p:nvPicPr>
-          <p:cNvPr id="3" name="Imagem 2">
-            <a:extLst>
-              <a:ext uri="{FF2B5EF4-FFF2-40B4-BE49-F238E27FC236}">
-                <a16:creationId xmlns:a16="http://schemas.microsoft.com/office/drawing/2014/main" id="{B8B7C041-7BBC-4A25-9D4C-1E34B80A8799}"/>
+          <p:cNvPr id="2" name="Imagem 1">
+            <a:extLst>
+              <a:ext uri="{FF2B5EF4-FFF2-40B4-BE49-F238E27FC236}">
+                <a16:creationId xmlns:a16="http://schemas.microsoft.com/office/drawing/2014/main" id="{7F252B57-929B-4161-B4AE-65C9B5CCE7CD}"/>
               </a:ext>
             </a:extLst>
           </p:cNvPr>
@@ -7261,21 +7732,15 @@
           <p:nvPr/>
         </p:nvPicPr>
         <p:blipFill>
-          <a:blip r:embed="rId2">
-            <a:extLst>
-              <a:ext uri="{28A0092B-C50C-407E-A947-70E740481C1C}">
-                <a14:useLocalDpi xmlns:a14="http://schemas.microsoft.com/office/drawing/2010/main" val="0"/>
-              </a:ext>
-            </a:extLst>
-          </a:blip>
+          <a:blip r:embed="rId2"/>
           <a:stretch>
             <a:fillRect/>
           </a:stretch>
         </p:blipFill>
         <p:spPr>
           <a:xfrm>
-            <a:off x="749533" y="170997"/>
-            <a:ext cx="10692935" cy="6516007"/>
+            <a:off x="1150977" y="109265"/>
+            <a:ext cx="9890045" cy="6639471"/>
           </a:xfrm>
           <a:prstGeom prst="rect">
             <a:avLst/>
@@ -7284,10 +7749,10 @@
       </p:pic>
       <p:sp>
         <p:nvSpPr>
-          <p:cNvPr id="4" name="Retângulo 3">
-            <a:extLst>
-              <a:ext uri="{FF2B5EF4-FFF2-40B4-BE49-F238E27FC236}">
-                <a16:creationId xmlns:a16="http://schemas.microsoft.com/office/drawing/2014/main" id="{19AF9769-E8EB-4E73-869D-D92E1E575BB1}"/>
+          <p:cNvPr id="3" name="Retângulo 2">
+            <a:extLst>
+              <a:ext uri="{FF2B5EF4-FFF2-40B4-BE49-F238E27FC236}">
+                <a16:creationId xmlns:a16="http://schemas.microsoft.com/office/drawing/2014/main" id="{878CD48E-7C3D-4FE8-86A3-25FBAE013E4F}"/>
               </a:ext>
             </a:extLst>
           </p:cNvPr>
@@ -7296,8 +7761,8 @@
         </p:nvSpPr>
         <p:spPr>
           <a:xfrm>
-            <a:off x="1286933" y="1515533"/>
-            <a:ext cx="9364134" cy="4131734"/>
+            <a:off x="1837267" y="2057401"/>
+            <a:ext cx="1811866" cy="330200"/>
           </a:xfrm>
           <a:prstGeom prst="rect">
             <a:avLst/>
@@ -7343,242 +7808,10 @@
           </a:p>
         </p:txBody>
       </p:sp>
-      <p:sp>
-        <p:nvSpPr>
-          <p:cNvPr id="5" name="Retângulo 4">
-            <a:extLst>
-              <a:ext uri="{FF2B5EF4-FFF2-40B4-BE49-F238E27FC236}">
-                <a16:creationId xmlns:a16="http://schemas.microsoft.com/office/drawing/2014/main" id="{E866D13B-162F-46FB-A1F2-1C63F02C24E6}"/>
-              </a:ext>
-            </a:extLst>
-          </p:cNvPr>
-          <p:cNvSpPr/>
-          <p:nvPr/>
-        </p:nvSpPr>
-        <p:spPr>
-          <a:xfrm>
-            <a:off x="2108200" y="1955800"/>
-            <a:ext cx="3445933" cy="533400"/>
-          </a:xfrm>
-          <a:prstGeom prst="rect">
-            <a:avLst/>
-          </a:prstGeom>
-          <a:noFill/>
-          <a:ln w="38100">
-            <a:solidFill>
-              <a:srgbClr val="00B050"/>
-            </a:solidFill>
-          </a:ln>
-        </p:spPr>
-        <p:style>
-          <a:lnRef idx="2">
-            <a:schemeClr val="accent1">
-              <a:shade val="50000"/>
-            </a:schemeClr>
-          </a:lnRef>
-          <a:fillRef idx="1">
-            <a:schemeClr val="accent1"/>
-          </a:fillRef>
-          <a:effectRef idx="0">
-            <a:schemeClr val="accent1"/>
-          </a:effectRef>
-          <a:fontRef idx="minor">
-            <a:schemeClr val="lt1"/>
-          </a:fontRef>
-        </p:style>
-        <p:txBody>
-          <a:bodyPr rot="0" spcFirstLastPara="0" vertOverflow="overflow" horzOverflow="overflow" vert="horz" wrap="square" lIns="91440" tIns="45720" rIns="91440" bIns="45720" numCol="1" spcCol="0" rtlCol="0" fromWordArt="0" anchor="ctr" anchorCtr="0" forceAA="0" compatLnSpc="1">
-            <a:prstTxWarp prst="textNoShape">
-              <a:avLst/>
-            </a:prstTxWarp>
-            <a:noAutofit/>
-          </a:bodyPr>
-          <a:lstStyle/>
-          <a:p>
-            <a:pPr algn="ctr"/>
-            <a:endParaRPr lang="pt-BR" sz="2400" dirty="0">
-              <a:solidFill>
-                <a:schemeClr val="tx1"/>
-              </a:solidFill>
-            </a:endParaRPr>
-          </a:p>
-        </p:txBody>
-      </p:sp>
-      <p:sp>
-        <p:nvSpPr>
-          <p:cNvPr id="6" name="Retângulo 5">
-            <a:extLst>
-              <a:ext uri="{FF2B5EF4-FFF2-40B4-BE49-F238E27FC236}">
-                <a16:creationId xmlns:a16="http://schemas.microsoft.com/office/drawing/2014/main" id="{4402F94F-D095-4BEA-93C6-C46B4C2FFDEF}"/>
-              </a:ext>
-            </a:extLst>
-          </p:cNvPr>
-          <p:cNvSpPr/>
-          <p:nvPr/>
-        </p:nvSpPr>
-        <p:spPr>
-          <a:xfrm>
-            <a:off x="2108200" y="2878667"/>
-            <a:ext cx="8415867" cy="2091266"/>
-          </a:xfrm>
-          <a:prstGeom prst="rect">
-            <a:avLst/>
-          </a:prstGeom>
-          <a:noFill/>
-          <a:ln w="38100">
-            <a:solidFill>
-              <a:srgbClr val="7030A0"/>
-            </a:solidFill>
-          </a:ln>
-        </p:spPr>
-        <p:style>
-          <a:lnRef idx="2">
-            <a:schemeClr val="accent1">
-              <a:shade val="50000"/>
-            </a:schemeClr>
-          </a:lnRef>
-          <a:fillRef idx="1">
-            <a:schemeClr val="accent1"/>
-          </a:fillRef>
-          <a:effectRef idx="0">
-            <a:schemeClr val="accent1"/>
-          </a:effectRef>
-          <a:fontRef idx="minor">
-            <a:schemeClr val="lt1"/>
-          </a:fontRef>
-        </p:style>
-        <p:txBody>
-          <a:bodyPr rot="0" spcFirstLastPara="0" vertOverflow="overflow" horzOverflow="overflow" vert="horz" wrap="square" lIns="91440" tIns="45720" rIns="91440" bIns="45720" numCol="1" spcCol="0" rtlCol="0" fromWordArt="0" anchor="ctr" anchorCtr="0" forceAA="0" compatLnSpc="1">
-            <a:prstTxWarp prst="textNoShape">
-              <a:avLst/>
-            </a:prstTxWarp>
-            <a:noAutofit/>
-          </a:bodyPr>
-          <a:lstStyle/>
-          <a:p>
-            <a:pPr algn="ctr"/>
-            <a:endParaRPr lang="pt-BR" sz="2400" dirty="0">
-              <a:solidFill>
-                <a:schemeClr val="tx1"/>
-              </a:solidFill>
-            </a:endParaRPr>
-          </a:p>
-        </p:txBody>
-      </p:sp>
-      <p:cxnSp>
-        <p:nvCxnSpPr>
-          <p:cNvPr id="10" name="Conector de Seta Reta 9">
-            <a:extLst>
-              <a:ext uri="{FF2B5EF4-FFF2-40B4-BE49-F238E27FC236}">
-                <a16:creationId xmlns:a16="http://schemas.microsoft.com/office/drawing/2014/main" id="{170E9C86-B24A-4160-9E96-422C34F6D6B5}"/>
-              </a:ext>
-            </a:extLst>
-          </p:cNvPr>
-          <p:cNvCxnSpPr>
-            <a:cxnSpLocks/>
-          </p:cNvCxnSpPr>
-          <p:nvPr/>
-        </p:nvCxnSpPr>
-        <p:spPr>
-          <a:xfrm flipH="1">
-            <a:off x="2743201" y="762000"/>
-            <a:ext cx="1134532" cy="160867"/>
-          </a:xfrm>
-          <a:prstGeom prst="straightConnector1">
-            <a:avLst/>
-          </a:prstGeom>
-          <a:ln w="38100">
-            <a:solidFill>
-              <a:srgbClr val="FF0000"/>
-            </a:solidFill>
-            <a:tailEnd type="triangle"/>
-          </a:ln>
-        </p:spPr>
-        <p:style>
-          <a:lnRef idx="1">
-            <a:schemeClr val="accent1"/>
-          </a:lnRef>
-          <a:fillRef idx="0">
-            <a:schemeClr val="accent1"/>
-          </a:fillRef>
-          <a:effectRef idx="0">
-            <a:schemeClr val="accent1"/>
-          </a:effectRef>
-          <a:fontRef idx="minor">
-            <a:schemeClr val="tx1"/>
-          </a:fontRef>
-        </p:style>
-      </p:cxnSp>
-      <p:sp>
-        <p:nvSpPr>
-          <p:cNvPr id="11" name="Elipse 10">
-            <a:extLst>
-              <a:ext uri="{FF2B5EF4-FFF2-40B4-BE49-F238E27FC236}">
-                <a16:creationId xmlns:a16="http://schemas.microsoft.com/office/drawing/2014/main" id="{731E0951-D8FB-4420-97FC-BC340FA321D1}"/>
-              </a:ext>
-            </a:extLst>
-          </p:cNvPr>
-          <p:cNvSpPr/>
-          <p:nvPr/>
-        </p:nvSpPr>
-        <p:spPr>
-          <a:xfrm>
-            <a:off x="3877733" y="237067"/>
-            <a:ext cx="1778000" cy="1041399"/>
-          </a:xfrm>
-          <a:prstGeom prst="ellipse">
-            <a:avLst/>
-          </a:prstGeom>
-          <a:solidFill>
-            <a:srgbClr val="FFFF00"/>
-          </a:solidFill>
-          <a:ln w="38100">
-            <a:solidFill>
-              <a:srgbClr val="FF0000"/>
-            </a:solidFill>
-          </a:ln>
-        </p:spPr>
-        <p:style>
-          <a:lnRef idx="2">
-            <a:schemeClr val="accent1">
-              <a:shade val="50000"/>
-            </a:schemeClr>
-          </a:lnRef>
-          <a:fillRef idx="1">
-            <a:schemeClr val="accent1"/>
-          </a:fillRef>
-          <a:effectRef idx="0">
-            <a:schemeClr val="accent1"/>
-          </a:effectRef>
-          <a:fontRef idx="minor">
-            <a:schemeClr val="lt1"/>
-          </a:fontRef>
-        </p:style>
-        <p:txBody>
-          <a:bodyPr rot="0" spcFirstLastPara="0" vertOverflow="overflow" horzOverflow="overflow" vert="horz" wrap="square" lIns="91440" tIns="45720" rIns="91440" bIns="45720" numCol="1" spcCol="0" rtlCol="0" fromWordArt="0" anchor="ctr" anchorCtr="0" forceAA="0" compatLnSpc="1">
-            <a:prstTxWarp prst="textNoShape">
-              <a:avLst/>
-            </a:prstTxWarp>
-            <a:noAutofit/>
-          </a:bodyPr>
-          <a:lstStyle/>
-          <a:p>
-            <a:pPr algn="ctr"/>
-            <a:r>
-              <a:rPr lang="pt-BR" sz="1400" dirty="0">
-                <a:solidFill>
-                  <a:schemeClr val="tx1"/>
-                </a:solidFill>
-              </a:rPr>
-              <a:t>A camada anterior acabou aqui</a:t>
-            </a:r>
-          </a:p>
-        </p:txBody>
-      </p:sp>
     </p:spTree>
     <p:extLst>
       <p:ext uri="{BB962C8B-B14F-4D97-AF65-F5344CB8AC3E}">
-        <p14:creationId xmlns:p14="http://schemas.microsoft.com/office/powerpoint/2010/main" val="1314696731"/>
+        <p14:creationId xmlns:p14="http://schemas.microsoft.com/office/powerpoint/2010/main" val="2834003094"/>
       </p:ext>
     </p:extLst>
   </p:cSld>
@@ -7607,10 +7840,10 @@
       </p:grpSpPr>
       <p:pic>
         <p:nvPicPr>
-          <p:cNvPr id="2" name="Imagem 1">
-            <a:extLst>
-              <a:ext uri="{FF2B5EF4-FFF2-40B4-BE49-F238E27FC236}">
-                <a16:creationId xmlns:a16="http://schemas.microsoft.com/office/drawing/2014/main" id="{14EE789B-B8A8-4185-A74C-BDB9DC8A4F70}"/>
+          <p:cNvPr id="3" name="Imagem 2">
+            <a:extLst>
+              <a:ext uri="{FF2B5EF4-FFF2-40B4-BE49-F238E27FC236}">
+                <a16:creationId xmlns:a16="http://schemas.microsoft.com/office/drawing/2014/main" id="{B8B7C041-7BBC-4A25-9D4C-1E34B80A8799}"/>
               </a:ext>
             </a:extLst>
           </p:cNvPr>
@@ -7620,37 +7853,228 @@
           <p:nvPr/>
         </p:nvPicPr>
         <p:blipFill>
-          <a:blip r:embed="rId2"/>
+          <a:blip r:embed="rId2">
+            <a:extLst>
+              <a:ext uri="{28A0092B-C50C-407E-A947-70E740481C1C}">
+                <a14:useLocalDpi xmlns:a14="http://schemas.microsoft.com/office/drawing/2010/main" val="0"/>
+              </a:ext>
+            </a:extLst>
+          </a:blip>
           <a:stretch>
             <a:fillRect/>
           </a:stretch>
         </p:blipFill>
         <p:spPr>
           <a:xfrm>
-            <a:off x="2771775" y="1000125"/>
-            <a:ext cx="6648450" cy="4857750"/>
+            <a:off x="749533" y="170997"/>
+            <a:ext cx="10692935" cy="6516007"/>
           </a:xfrm>
           <a:prstGeom prst="rect">
             <a:avLst/>
           </a:prstGeom>
         </p:spPr>
       </p:pic>
+      <p:sp>
+        <p:nvSpPr>
+          <p:cNvPr id="4" name="Retângulo 3">
+            <a:extLst>
+              <a:ext uri="{FF2B5EF4-FFF2-40B4-BE49-F238E27FC236}">
+                <a16:creationId xmlns:a16="http://schemas.microsoft.com/office/drawing/2014/main" id="{19AF9769-E8EB-4E73-869D-D92E1E575BB1}"/>
+              </a:ext>
+            </a:extLst>
+          </p:cNvPr>
+          <p:cNvSpPr/>
+          <p:nvPr/>
+        </p:nvSpPr>
+        <p:spPr>
+          <a:xfrm>
+            <a:off x="1286933" y="1515533"/>
+            <a:ext cx="9364134" cy="4131734"/>
+          </a:xfrm>
+          <a:prstGeom prst="rect">
+            <a:avLst/>
+          </a:prstGeom>
+          <a:noFill/>
+          <a:ln w="38100">
+            <a:solidFill>
+              <a:srgbClr val="FF0000"/>
+            </a:solidFill>
+          </a:ln>
+        </p:spPr>
+        <p:style>
+          <a:lnRef idx="2">
+            <a:schemeClr val="accent1">
+              <a:shade val="50000"/>
+            </a:schemeClr>
+          </a:lnRef>
+          <a:fillRef idx="1">
+            <a:schemeClr val="accent1"/>
+          </a:fillRef>
+          <a:effectRef idx="0">
+            <a:schemeClr val="accent1"/>
+          </a:effectRef>
+          <a:fontRef idx="minor">
+            <a:schemeClr val="lt1"/>
+          </a:fontRef>
+        </p:style>
+        <p:txBody>
+          <a:bodyPr rot="0" spcFirstLastPara="0" vertOverflow="overflow" horzOverflow="overflow" vert="horz" wrap="square" lIns="91440" tIns="45720" rIns="91440" bIns="45720" numCol="1" spcCol="0" rtlCol="0" fromWordArt="0" anchor="ctr" anchorCtr="0" forceAA="0" compatLnSpc="1">
+            <a:prstTxWarp prst="textNoShape">
+              <a:avLst/>
+            </a:prstTxWarp>
+            <a:noAutofit/>
+          </a:bodyPr>
+          <a:lstStyle/>
+          <a:p>
+            <a:pPr algn="ctr"/>
+            <a:endParaRPr lang="pt-BR" sz="2400" dirty="0">
+              <a:solidFill>
+                <a:schemeClr val="tx1"/>
+              </a:solidFill>
+            </a:endParaRPr>
+          </a:p>
+        </p:txBody>
+      </p:sp>
+      <p:sp>
+        <p:nvSpPr>
+          <p:cNvPr id="5" name="Retângulo 4">
+            <a:extLst>
+              <a:ext uri="{FF2B5EF4-FFF2-40B4-BE49-F238E27FC236}">
+                <a16:creationId xmlns:a16="http://schemas.microsoft.com/office/drawing/2014/main" id="{E866D13B-162F-46FB-A1F2-1C63F02C24E6}"/>
+              </a:ext>
+            </a:extLst>
+          </p:cNvPr>
+          <p:cNvSpPr/>
+          <p:nvPr/>
+        </p:nvSpPr>
+        <p:spPr>
+          <a:xfrm>
+            <a:off x="2108200" y="1955800"/>
+            <a:ext cx="3445933" cy="533400"/>
+          </a:xfrm>
+          <a:prstGeom prst="rect">
+            <a:avLst/>
+          </a:prstGeom>
+          <a:noFill/>
+          <a:ln w="38100">
+            <a:solidFill>
+              <a:srgbClr val="00B050"/>
+            </a:solidFill>
+          </a:ln>
+        </p:spPr>
+        <p:style>
+          <a:lnRef idx="2">
+            <a:schemeClr val="accent1">
+              <a:shade val="50000"/>
+            </a:schemeClr>
+          </a:lnRef>
+          <a:fillRef idx="1">
+            <a:schemeClr val="accent1"/>
+          </a:fillRef>
+          <a:effectRef idx="0">
+            <a:schemeClr val="accent1"/>
+          </a:effectRef>
+          <a:fontRef idx="minor">
+            <a:schemeClr val="lt1"/>
+          </a:fontRef>
+        </p:style>
+        <p:txBody>
+          <a:bodyPr rot="0" spcFirstLastPara="0" vertOverflow="overflow" horzOverflow="overflow" vert="horz" wrap="square" lIns="91440" tIns="45720" rIns="91440" bIns="45720" numCol="1" spcCol="0" rtlCol="0" fromWordArt="0" anchor="ctr" anchorCtr="0" forceAA="0" compatLnSpc="1">
+            <a:prstTxWarp prst="textNoShape">
+              <a:avLst/>
+            </a:prstTxWarp>
+            <a:noAutofit/>
+          </a:bodyPr>
+          <a:lstStyle/>
+          <a:p>
+            <a:pPr algn="ctr"/>
+            <a:endParaRPr lang="pt-BR" sz="2400" dirty="0">
+              <a:solidFill>
+                <a:schemeClr val="tx1"/>
+              </a:solidFill>
+            </a:endParaRPr>
+          </a:p>
+        </p:txBody>
+      </p:sp>
+      <p:sp>
+        <p:nvSpPr>
+          <p:cNvPr id="6" name="Retângulo 5">
+            <a:extLst>
+              <a:ext uri="{FF2B5EF4-FFF2-40B4-BE49-F238E27FC236}">
+                <a16:creationId xmlns:a16="http://schemas.microsoft.com/office/drawing/2014/main" id="{4402F94F-D095-4BEA-93C6-C46B4C2FFDEF}"/>
+              </a:ext>
+            </a:extLst>
+          </p:cNvPr>
+          <p:cNvSpPr/>
+          <p:nvPr/>
+        </p:nvSpPr>
+        <p:spPr>
+          <a:xfrm>
+            <a:off x="2108200" y="2878667"/>
+            <a:ext cx="8415867" cy="2091266"/>
+          </a:xfrm>
+          <a:prstGeom prst="rect">
+            <a:avLst/>
+          </a:prstGeom>
+          <a:noFill/>
+          <a:ln w="38100">
+            <a:solidFill>
+              <a:srgbClr val="7030A0"/>
+            </a:solidFill>
+          </a:ln>
+        </p:spPr>
+        <p:style>
+          <a:lnRef idx="2">
+            <a:schemeClr val="accent1">
+              <a:shade val="50000"/>
+            </a:schemeClr>
+          </a:lnRef>
+          <a:fillRef idx="1">
+            <a:schemeClr val="accent1"/>
+          </a:fillRef>
+          <a:effectRef idx="0">
+            <a:schemeClr val="accent1"/>
+          </a:effectRef>
+          <a:fontRef idx="minor">
+            <a:schemeClr val="lt1"/>
+          </a:fontRef>
+        </p:style>
+        <p:txBody>
+          <a:bodyPr rot="0" spcFirstLastPara="0" vertOverflow="overflow" horzOverflow="overflow" vert="horz" wrap="square" lIns="91440" tIns="45720" rIns="91440" bIns="45720" numCol="1" spcCol="0" rtlCol="0" fromWordArt="0" anchor="ctr" anchorCtr="0" forceAA="0" compatLnSpc="1">
+            <a:prstTxWarp prst="textNoShape">
+              <a:avLst/>
+            </a:prstTxWarp>
+            <a:noAutofit/>
+          </a:bodyPr>
+          <a:lstStyle/>
+          <a:p>
+            <a:pPr algn="ctr"/>
+            <a:endParaRPr lang="pt-BR" sz="2400" dirty="0">
+              <a:solidFill>
+                <a:schemeClr val="tx1"/>
+              </a:solidFill>
+            </a:endParaRPr>
+          </a:p>
+        </p:txBody>
+      </p:sp>
       <p:cxnSp>
         <p:nvCxnSpPr>
-          <p:cNvPr id="4" name="Conector de Seta Reta 3">
-            <a:extLst>
-              <a:ext uri="{FF2B5EF4-FFF2-40B4-BE49-F238E27FC236}">
-                <a16:creationId xmlns:a16="http://schemas.microsoft.com/office/drawing/2014/main" id="{255875D6-DC5F-43EA-8883-8D5CE09D9B5C}"/>
-              </a:ext>
-            </a:extLst>
-          </p:cNvPr>
-          <p:cNvCxnSpPr/>
+          <p:cNvPr id="10" name="Conector de Seta Reta 9">
+            <a:extLst>
+              <a:ext uri="{FF2B5EF4-FFF2-40B4-BE49-F238E27FC236}">
+                <a16:creationId xmlns:a16="http://schemas.microsoft.com/office/drawing/2014/main" id="{170E9C86-B24A-4160-9E96-422C34F6D6B5}"/>
+              </a:ext>
+            </a:extLst>
+          </p:cNvPr>
+          <p:cNvCxnSpPr>
+            <a:cxnSpLocks/>
+          </p:cNvCxnSpPr>
           <p:nvPr/>
         </p:nvCxnSpPr>
         <p:spPr>
           <a:xfrm flipH="1">
-            <a:off x="8737600" y="3352800"/>
-            <a:ext cx="2209800" cy="795867"/>
+            <a:off x="2743201" y="762000"/>
+            <a:ext cx="1134532" cy="160867"/>
           </a:xfrm>
           <a:prstGeom prst="straightConnector1">
             <a:avLst/>
@@ -7679,10 +8103,10 @@
       </p:cxnSp>
       <p:sp>
         <p:nvSpPr>
-          <p:cNvPr id="5" name="Elipse 4">
-            <a:extLst>
-              <a:ext uri="{FF2B5EF4-FFF2-40B4-BE49-F238E27FC236}">
-                <a16:creationId xmlns:a16="http://schemas.microsoft.com/office/drawing/2014/main" id="{0EFC7D9C-EC2E-49A9-B1E5-737D21B38E85}"/>
+          <p:cNvPr id="11" name="Elipse 10">
+            <a:extLst>
+              <a:ext uri="{FF2B5EF4-FFF2-40B4-BE49-F238E27FC236}">
+                <a16:creationId xmlns:a16="http://schemas.microsoft.com/office/drawing/2014/main" id="{731E0951-D8FB-4420-97FC-BC340FA321D1}"/>
               </a:ext>
             </a:extLst>
           </p:cNvPr>
@@ -7691,8 +8115,8 @@
         </p:nvSpPr>
         <p:spPr>
           <a:xfrm>
-            <a:off x="10109200" y="2777067"/>
-            <a:ext cx="1964267" cy="1490133"/>
+            <a:off x="3877733" y="237067"/>
+            <a:ext cx="1778000" cy="1041399"/>
           </a:xfrm>
           <a:prstGeom prst="ellipse">
             <a:avLst/>
@@ -7733,20 +8157,12 @@
           <a:p>
             <a:pPr algn="ctr"/>
             <a:r>
-              <a:rPr lang="pt-BR" dirty="0">
+              <a:rPr lang="pt-BR" sz="1400" dirty="0">
                 <a:solidFill>
                   <a:schemeClr val="tx1"/>
                 </a:solidFill>
               </a:rPr>
-              <a:t>As camadas estão “</a:t>
-            </a:r>
-            <a:r>
-              <a:rPr lang="pt-BR" i="1" dirty="0">
-                <a:solidFill>
-                  <a:schemeClr val="tx1"/>
-                </a:solidFill>
-              </a:rPr>
-              <a:t>grudadas”</a:t>
+              <a:t>A camada anterior acabou aqui</a:t>
             </a:r>
           </a:p>
         </p:txBody>
@@ -7754,7 +8170,7 @@
     </p:spTree>
     <p:extLst>
       <p:ext uri="{BB962C8B-B14F-4D97-AF65-F5344CB8AC3E}">
-        <p14:creationId xmlns:p14="http://schemas.microsoft.com/office/powerpoint/2010/main" val="2666233035"/>
+        <p14:creationId xmlns:p14="http://schemas.microsoft.com/office/powerpoint/2010/main" val="1314696731"/>
       </p:ext>
     </p:extLst>
   </p:cSld>
@@ -7786,7 +8202,7 @@
           <p:cNvPr id="2" name="Imagem 1">
             <a:extLst>
               <a:ext uri="{FF2B5EF4-FFF2-40B4-BE49-F238E27FC236}">
-                <a16:creationId xmlns:a16="http://schemas.microsoft.com/office/drawing/2014/main" id="{DC5B4ADA-B664-4808-A89A-D069245B5F87}"/>
+                <a16:creationId xmlns:a16="http://schemas.microsoft.com/office/drawing/2014/main" id="{14EE789B-B8A8-4185-A74C-BDB9DC8A4F70}"/>
               </a:ext>
             </a:extLst>
           </p:cNvPr>
@@ -7803,20 +8219,62 @@
         </p:blipFill>
         <p:spPr>
           <a:xfrm>
-            <a:off x="1132782" y="532996"/>
-            <a:ext cx="9926435" cy="5792008"/>
+            <a:off x="2771775" y="1000125"/>
+            <a:ext cx="6648450" cy="4857750"/>
           </a:xfrm>
           <a:prstGeom prst="rect">
             <a:avLst/>
           </a:prstGeom>
         </p:spPr>
       </p:pic>
-      <p:sp>
-        <p:nvSpPr>
-          <p:cNvPr id="3" name="Retângulo 2">
-            <a:extLst>
-              <a:ext uri="{FF2B5EF4-FFF2-40B4-BE49-F238E27FC236}">
-                <a16:creationId xmlns:a16="http://schemas.microsoft.com/office/drawing/2014/main" id="{B19885CA-C25B-47F3-A0F0-9DB7F2402AD2}"/>
+      <p:cxnSp>
+        <p:nvCxnSpPr>
+          <p:cNvPr id="4" name="Conector de Seta Reta 3">
+            <a:extLst>
+              <a:ext uri="{FF2B5EF4-FFF2-40B4-BE49-F238E27FC236}">
+                <a16:creationId xmlns:a16="http://schemas.microsoft.com/office/drawing/2014/main" id="{255875D6-DC5F-43EA-8883-8D5CE09D9B5C}"/>
+              </a:ext>
+            </a:extLst>
+          </p:cNvPr>
+          <p:cNvCxnSpPr/>
+          <p:nvPr/>
+        </p:nvCxnSpPr>
+        <p:spPr>
+          <a:xfrm flipH="1">
+            <a:off x="8737600" y="3352800"/>
+            <a:ext cx="2209800" cy="795867"/>
+          </a:xfrm>
+          <a:prstGeom prst="straightConnector1">
+            <a:avLst/>
+          </a:prstGeom>
+          <a:ln w="38100">
+            <a:solidFill>
+              <a:srgbClr val="FF0000"/>
+            </a:solidFill>
+            <a:tailEnd type="triangle"/>
+          </a:ln>
+        </p:spPr>
+        <p:style>
+          <a:lnRef idx="1">
+            <a:schemeClr val="accent1"/>
+          </a:lnRef>
+          <a:fillRef idx="0">
+            <a:schemeClr val="accent1"/>
+          </a:fillRef>
+          <a:effectRef idx="0">
+            <a:schemeClr val="accent1"/>
+          </a:effectRef>
+          <a:fontRef idx="minor">
+            <a:schemeClr val="tx1"/>
+          </a:fontRef>
+        </p:style>
+      </p:cxnSp>
+      <p:sp>
+        <p:nvSpPr>
+          <p:cNvPr id="5" name="Elipse 4">
+            <a:extLst>
+              <a:ext uri="{FF2B5EF4-FFF2-40B4-BE49-F238E27FC236}">
+                <a16:creationId xmlns:a16="http://schemas.microsoft.com/office/drawing/2014/main" id="{0EFC7D9C-EC2E-49A9-B1E5-737D21B38E85}"/>
               </a:ext>
             </a:extLst>
           </p:cNvPr>
@@ -7825,13 +8283,15 @@
         </p:nvSpPr>
         <p:spPr>
           <a:xfrm>
-            <a:off x="1642533" y="2480733"/>
-            <a:ext cx="2091267" cy="321734"/>
-          </a:xfrm>
-          <a:prstGeom prst="rect">
-            <a:avLst/>
-          </a:prstGeom>
-          <a:noFill/>
+            <a:off x="10109200" y="2777067"/>
+            <a:ext cx="1964267" cy="1490133"/>
+          </a:xfrm>
+          <a:prstGeom prst="ellipse">
+            <a:avLst/>
+          </a:prstGeom>
+          <a:solidFill>
+            <a:srgbClr val="FFFF00"/>
+          </a:solidFill>
           <a:ln w="38100">
             <a:solidFill>
               <a:srgbClr val="FF0000"/>
@@ -7864,18 +8324,29 @@
           <a:lstStyle/>
           <a:p>
             <a:pPr algn="ctr"/>
-            <a:endParaRPr lang="pt-BR" sz="2400" dirty="0">
-              <a:solidFill>
-                <a:schemeClr val="tx1"/>
-              </a:solidFill>
-            </a:endParaRPr>
+            <a:r>
+              <a:rPr lang="pt-BR" dirty="0">
+                <a:solidFill>
+                  <a:schemeClr val="tx1"/>
+                </a:solidFill>
+              </a:rPr>
+              <a:t>As camadas estão “</a:t>
+            </a:r>
+            <a:r>
+              <a:rPr lang="pt-BR" i="1" dirty="0">
+                <a:solidFill>
+                  <a:schemeClr val="tx1"/>
+                </a:solidFill>
+              </a:rPr>
+              <a:t>grudadas”</a:t>
+            </a:r>
           </a:p>
         </p:txBody>
       </p:sp>
     </p:spTree>
     <p:extLst>
       <p:ext uri="{BB962C8B-B14F-4D97-AF65-F5344CB8AC3E}">
-        <p14:creationId xmlns:p14="http://schemas.microsoft.com/office/powerpoint/2010/main" val="767085695"/>
+        <p14:creationId xmlns:p14="http://schemas.microsoft.com/office/powerpoint/2010/main" val="2666233035"/>
       </p:ext>
     </p:extLst>
   </p:cSld>
@@ -7907,7 +8378,7 @@
           <p:cNvPr id="2" name="Imagem 1">
             <a:extLst>
               <a:ext uri="{FF2B5EF4-FFF2-40B4-BE49-F238E27FC236}">
-                <a16:creationId xmlns:a16="http://schemas.microsoft.com/office/drawing/2014/main" id="{53B8FC3B-D10E-4DC0-A919-8E714151C203}"/>
+                <a16:creationId xmlns:a16="http://schemas.microsoft.com/office/drawing/2014/main" id="{DC5B4ADA-B664-4808-A89A-D069245B5F87}"/>
               </a:ext>
             </a:extLst>
           </p:cNvPr>
@@ -7924,18 +8395,79 @@
         </p:blipFill>
         <p:spPr>
           <a:xfrm>
-            <a:off x="2771775" y="804862"/>
-            <a:ext cx="6648450" cy="5248275"/>
+            <a:off x="1132782" y="532996"/>
+            <a:ext cx="9926435" cy="5792008"/>
           </a:xfrm>
           <a:prstGeom prst="rect">
             <a:avLst/>
           </a:prstGeom>
         </p:spPr>
       </p:pic>
+      <p:sp>
+        <p:nvSpPr>
+          <p:cNvPr id="3" name="Retângulo 2">
+            <a:extLst>
+              <a:ext uri="{FF2B5EF4-FFF2-40B4-BE49-F238E27FC236}">
+                <a16:creationId xmlns:a16="http://schemas.microsoft.com/office/drawing/2014/main" id="{B19885CA-C25B-47F3-A0F0-9DB7F2402AD2}"/>
+              </a:ext>
+            </a:extLst>
+          </p:cNvPr>
+          <p:cNvSpPr/>
+          <p:nvPr/>
+        </p:nvSpPr>
+        <p:spPr>
+          <a:xfrm>
+            <a:off x="1642533" y="2480733"/>
+            <a:ext cx="2091267" cy="321734"/>
+          </a:xfrm>
+          <a:prstGeom prst="rect">
+            <a:avLst/>
+          </a:prstGeom>
+          <a:noFill/>
+          <a:ln w="38100">
+            <a:solidFill>
+              <a:srgbClr val="FF0000"/>
+            </a:solidFill>
+          </a:ln>
+        </p:spPr>
+        <p:style>
+          <a:lnRef idx="2">
+            <a:schemeClr val="accent1">
+              <a:shade val="50000"/>
+            </a:schemeClr>
+          </a:lnRef>
+          <a:fillRef idx="1">
+            <a:schemeClr val="accent1"/>
+          </a:fillRef>
+          <a:effectRef idx="0">
+            <a:schemeClr val="accent1"/>
+          </a:effectRef>
+          <a:fontRef idx="minor">
+            <a:schemeClr val="lt1"/>
+          </a:fontRef>
+        </p:style>
+        <p:txBody>
+          <a:bodyPr rot="0" spcFirstLastPara="0" vertOverflow="overflow" horzOverflow="overflow" vert="horz" wrap="square" lIns="91440" tIns="45720" rIns="91440" bIns="45720" numCol="1" spcCol="0" rtlCol="0" fromWordArt="0" anchor="ctr" anchorCtr="0" forceAA="0" compatLnSpc="1">
+            <a:prstTxWarp prst="textNoShape">
+              <a:avLst/>
+            </a:prstTxWarp>
+            <a:noAutofit/>
+          </a:bodyPr>
+          <a:lstStyle/>
+          <a:p>
+            <a:pPr algn="ctr"/>
+            <a:endParaRPr lang="pt-BR" sz="2400" dirty="0">
+              <a:solidFill>
+                <a:schemeClr val="tx1"/>
+              </a:solidFill>
+            </a:endParaRPr>
+          </a:p>
+        </p:txBody>
+      </p:sp>
     </p:spTree>
     <p:extLst>
       <p:ext uri="{BB962C8B-B14F-4D97-AF65-F5344CB8AC3E}">
-        <p14:creationId xmlns:p14="http://schemas.microsoft.com/office/powerpoint/2010/main" val="2944144108"/>
+        <p14:creationId xmlns:p14="http://schemas.microsoft.com/office/powerpoint/2010/main" val="767085695"/>
       </p:ext>
     </p:extLst>
   </p:cSld>
@@ -7967,7 +8499,7 @@
           <p:cNvPr id="4" name="Imagem 3">
             <a:extLst>
               <a:ext uri="{FF2B5EF4-FFF2-40B4-BE49-F238E27FC236}">
-                <a16:creationId xmlns:a16="http://schemas.microsoft.com/office/drawing/2014/main" id="{F760613C-C9E7-4286-B0AC-0A84B4EE83B6}"/>
+                <a16:creationId xmlns:a16="http://schemas.microsoft.com/office/drawing/2014/main" id="{D19E5CFC-BF3D-4F01-990B-9341B77D0D68}"/>
               </a:ext>
             </a:extLst>
           </p:cNvPr>
@@ -7984,60 +8516,18 @@
         </p:blipFill>
         <p:spPr>
           <a:xfrm>
-            <a:off x="1399519" y="151942"/>
-            <a:ext cx="9392961" cy="6554115"/>
+            <a:off x="1524000" y="247650"/>
+            <a:ext cx="9144000" cy="6362700"/>
           </a:xfrm>
           <a:prstGeom prst="rect">
             <a:avLst/>
           </a:prstGeom>
         </p:spPr>
       </p:pic>
-      <p:cxnSp>
-        <p:nvCxnSpPr>
-          <p:cNvPr id="9" name="Conector de Seta Reta 8">
-            <a:extLst>
-              <a:ext uri="{FF2B5EF4-FFF2-40B4-BE49-F238E27FC236}">
-                <a16:creationId xmlns:a16="http://schemas.microsoft.com/office/drawing/2014/main" id="{6EE079D5-B950-4596-A9E7-DA7F787C1D5B}"/>
-              </a:ext>
-            </a:extLst>
-          </p:cNvPr>
-          <p:cNvCxnSpPr/>
-          <p:nvPr/>
-        </p:nvCxnSpPr>
-        <p:spPr>
-          <a:xfrm flipV="1">
-            <a:off x="5190067" y="4174067"/>
-            <a:ext cx="592666" cy="753533"/>
-          </a:xfrm>
-          <a:prstGeom prst="straightConnector1">
-            <a:avLst/>
-          </a:prstGeom>
-          <a:ln w="38100">
-            <a:solidFill>
-              <a:srgbClr val="FF0000"/>
-            </a:solidFill>
-            <a:tailEnd type="triangle"/>
-          </a:ln>
-        </p:spPr>
-        <p:style>
-          <a:lnRef idx="1">
-            <a:schemeClr val="accent1"/>
-          </a:lnRef>
-          <a:fillRef idx="0">
-            <a:schemeClr val="accent1"/>
-          </a:fillRef>
-          <a:effectRef idx="0">
-            <a:schemeClr val="accent1"/>
-          </a:effectRef>
-          <a:fontRef idx="minor">
-            <a:schemeClr val="tx1"/>
-          </a:fontRef>
-        </p:style>
-      </p:cxnSp>
     </p:spTree>
     <p:extLst>
       <p:ext uri="{BB962C8B-B14F-4D97-AF65-F5344CB8AC3E}">
-        <p14:creationId xmlns:p14="http://schemas.microsoft.com/office/powerpoint/2010/main" val="1666525398"/>
+        <p14:creationId xmlns:p14="http://schemas.microsoft.com/office/powerpoint/2010/main" val="1982557280"/>
       </p:ext>
     </p:extLst>
   </p:cSld>
@@ -8064,10 +8554,40 @@
           <a:chExt cx="0" cy="0"/>
         </a:xfrm>
       </p:grpSpPr>
+      <p:pic>
+        <p:nvPicPr>
+          <p:cNvPr id="2" name="Imagem 1">
+            <a:extLst>
+              <a:ext uri="{FF2B5EF4-FFF2-40B4-BE49-F238E27FC236}">
+                <a16:creationId xmlns:a16="http://schemas.microsoft.com/office/drawing/2014/main" id="{53B8FC3B-D10E-4DC0-A919-8E714151C203}"/>
+              </a:ext>
+            </a:extLst>
+          </p:cNvPr>
+          <p:cNvPicPr>
+            <a:picLocks noChangeAspect="1"/>
+          </p:cNvPicPr>
+          <p:nvPr/>
+        </p:nvPicPr>
+        <p:blipFill>
+          <a:blip r:embed="rId2"/>
+          <a:stretch>
+            <a:fillRect/>
+          </a:stretch>
+        </p:blipFill>
+        <p:spPr>
+          <a:xfrm>
+            <a:off x="2771775" y="804862"/>
+            <a:ext cx="6648450" cy="5248275"/>
+          </a:xfrm>
+          <a:prstGeom prst="rect">
+            <a:avLst/>
+          </a:prstGeom>
+        </p:spPr>
+      </p:pic>
     </p:spTree>
     <p:extLst>
       <p:ext uri="{BB962C8B-B14F-4D97-AF65-F5344CB8AC3E}">
-        <p14:creationId xmlns:p14="http://schemas.microsoft.com/office/powerpoint/2010/main" val="2123275993"/>
+        <p14:creationId xmlns:p14="http://schemas.microsoft.com/office/powerpoint/2010/main" val="2944144108"/>
       </p:ext>
     </p:extLst>
   </p:cSld>
@@ -8094,10 +8614,101 @@
           <a:chExt cx="0" cy="0"/>
         </a:xfrm>
       </p:grpSpPr>
+      <p:pic>
+        <p:nvPicPr>
+          <p:cNvPr id="2" name="Imagem 1">
+            <a:extLst>
+              <a:ext uri="{FF2B5EF4-FFF2-40B4-BE49-F238E27FC236}">
+                <a16:creationId xmlns:a16="http://schemas.microsoft.com/office/drawing/2014/main" id="{9664A19B-C578-4D59-8723-DCC37221D165}"/>
+              </a:ext>
+            </a:extLst>
+          </p:cNvPr>
+          <p:cNvPicPr>
+            <a:picLocks noChangeAspect="1"/>
+          </p:cNvPicPr>
+          <p:nvPr/>
+        </p:nvPicPr>
+        <p:blipFill>
+          <a:blip r:embed="rId2"/>
+          <a:stretch>
+            <a:fillRect/>
+          </a:stretch>
+        </p:blipFill>
+        <p:spPr>
+          <a:xfrm>
+            <a:off x="1068164" y="338351"/>
+            <a:ext cx="5450970" cy="6247378"/>
+          </a:xfrm>
+          <a:prstGeom prst="rect">
+            <a:avLst/>
+          </a:prstGeom>
+        </p:spPr>
+      </p:pic>
+      <p:sp>
+        <p:nvSpPr>
+          <p:cNvPr id="3" name="Retângulo 2">
+            <a:extLst>
+              <a:ext uri="{FF2B5EF4-FFF2-40B4-BE49-F238E27FC236}">
+                <a16:creationId xmlns:a16="http://schemas.microsoft.com/office/drawing/2014/main" id="{D89CEA3A-F335-4D44-AF1C-67A120D4C2CB}"/>
+              </a:ext>
+            </a:extLst>
+          </p:cNvPr>
+          <p:cNvSpPr/>
+          <p:nvPr/>
+        </p:nvSpPr>
+        <p:spPr>
+          <a:xfrm>
+            <a:off x="2474259" y="3894268"/>
+            <a:ext cx="2969110" cy="1097280"/>
+          </a:xfrm>
+          <a:prstGeom prst="rect">
+            <a:avLst/>
+          </a:prstGeom>
+          <a:noFill/>
+          <a:ln w="38100">
+            <a:solidFill>
+              <a:srgbClr val="FF0000"/>
+            </a:solidFill>
+          </a:ln>
+        </p:spPr>
+        <p:style>
+          <a:lnRef idx="2">
+            <a:schemeClr val="accent1">
+              <a:shade val="50000"/>
+            </a:schemeClr>
+          </a:lnRef>
+          <a:fillRef idx="1">
+            <a:schemeClr val="accent1"/>
+          </a:fillRef>
+          <a:effectRef idx="0">
+            <a:schemeClr val="accent1"/>
+          </a:effectRef>
+          <a:fontRef idx="minor">
+            <a:schemeClr val="lt1"/>
+          </a:fontRef>
+        </p:style>
+        <p:txBody>
+          <a:bodyPr rot="0" spcFirstLastPara="0" vertOverflow="overflow" horzOverflow="overflow" vert="horz" wrap="square" lIns="91440" tIns="45720" rIns="91440" bIns="45720" numCol="1" spcCol="0" rtlCol="0" fromWordArt="0" anchor="ctr" anchorCtr="0" forceAA="0" compatLnSpc="1">
+            <a:prstTxWarp prst="textNoShape">
+              <a:avLst/>
+            </a:prstTxWarp>
+            <a:noAutofit/>
+          </a:bodyPr>
+          <a:lstStyle/>
+          <a:p>
+            <a:pPr algn="ctr"/>
+            <a:endParaRPr lang="pt-BR" sz="2400" dirty="0">
+              <a:solidFill>
+                <a:schemeClr val="tx1"/>
+              </a:solidFill>
+            </a:endParaRPr>
+          </a:p>
+        </p:txBody>
+      </p:sp>
     </p:spTree>
     <p:extLst>
       <p:ext uri="{BB962C8B-B14F-4D97-AF65-F5344CB8AC3E}">
-        <p14:creationId xmlns:p14="http://schemas.microsoft.com/office/powerpoint/2010/main" val="1477188948"/>
+        <p14:creationId xmlns:p14="http://schemas.microsoft.com/office/powerpoint/2010/main" val="2123275993"/>
       </p:ext>
     </p:extLst>
   </p:cSld>
@@ -8124,10 +8735,40 @@
           <a:chExt cx="0" cy="0"/>
         </a:xfrm>
       </p:grpSpPr>
+      <p:pic>
+        <p:nvPicPr>
+          <p:cNvPr id="2" name="Imagem 1">
+            <a:extLst>
+              <a:ext uri="{FF2B5EF4-FFF2-40B4-BE49-F238E27FC236}">
+                <a16:creationId xmlns:a16="http://schemas.microsoft.com/office/drawing/2014/main" id="{2F61B3D0-5C1B-430C-8FDD-CF79A264D76E}"/>
+              </a:ext>
+            </a:extLst>
+          </p:cNvPr>
+          <p:cNvPicPr>
+            <a:picLocks noChangeAspect="1"/>
+          </p:cNvPicPr>
+          <p:nvPr/>
+        </p:nvPicPr>
+        <p:blipFill>
+          <a:blip r:embed="rId2"/>
+          <a:stretch>
+            <a:fillRect/>
+          </a:stretch>
+        </p:blipFill>
+        <p:spPr>
+          <a:xfrm>
+            <a:off x="1885950" y="719137"/>
+            <a:ext cx="8420100" cy="5419725"/>
+          </a:xfrm>
+          <a:prstGeom prst="rect">
+            <a:avLst/>
+          </a:prstGeom>
+        </p:spPr>
+      </p:pic>
     </p:spTree>
     <p:extLst>
       <p:ext uri="{BB962C8B-B14F-4D97-AF65-F5344CB8AC3E}">
-        <p14:creationId xmlns:p14="http://schemas.microsoft.com/office/powerpoint/2010/main" val="3719728769"/>
+        <p14:creationId xmlns:p14="http://schemas.microsoft.com/office/powerpoint/2010/main" val="1477188948"/>
       </p:ext>
     </p:extLst>
   </p:cSld>
@@ -8154,10 +8795,150 @@
           <a:chExt cx="0" cy="0"/>
         </a:xfrm>
       </p:grpSpPr>
+      <p:pic>
+        <p:nvPicPr>
+          <p:cNvPr id="2" name="Imagem 1">
+            <a:extLst>
+              <a:ext uri="{FF2B5EF4-FFF2-40B4-BE49-F238E27FC236}">
+                <a16:creationId xmlns:a16="http://schemas.microsoft.com/office/drawing/2014/main" id="{056613D0-EFB1-407C-9763-E96CA1F7AED3}"/>
+              </a:ext>
+            </a:extLst>
+          </p:cNvPr>
+          <p:cNvPicPr>
+            <a:picLocks noChangeAspect="1"/>
+          </p:cNvPicPr>
+          <p:nvPr/>
+        </p:nvPicPr>
+        <p:blipFill>
+          <a:blip r:embed="rId2"/>
+          <a:stretch>
+            <a:fillRect/>
+          </a:stretch>
+        </p:blipFill>
+        <p:spPr>
+          <a:xfrm>
+            <a:off x="1665925" y="154964"/>
+            <a:ext cx="8860149" cy="6548072"/>
+          </a:xfrm>
+          <a:prstGeom prst="rect">
+            <a:avLst/>
+          </a:prstGeom>
+        </p:spPr>
+      </p:pic>
+      <p:cxnSp>
+        <p:nvCxnSpPr>
+          <p:cNvPr id="4" name="Conector de Seta Reta 3">
+            <a:extLst>
+              <a:ext uri="{FF2B5EF4-FFF2-40B4-BE49-F238E27FC236}">
+                <a16:creationId xmlns:a16="http://schemas.microsoft.com/office/drawing/2014/main" id="{326A565B-9EC0-4836-9FB1-4B8FE4DEB7C3}"/>
+              </a:ext>
+            </a:extLst>
+          </p:cNvPr>
+          <p:cNvCxnSpPr>
+            <a:cxnSpLocks/>
+          </p:cNvCxnSpPr>
+          <p:nvPr/>
+        </p:nvCxnSpPr>
+        <p:spPr>
+          <a:xfrm flipH="1" flipV="1">
+            <a:off x="3593054" y="4733365"/>
+            <a:ext cx="2700170" cy="1054249"/>
+          </a:xfrm>
+          <a:prstGeom prst="straightConnector1">
+            <a:avLst/>
+          </a:prstGeom>
+          <a:ln w="38100">
+            <a:solidFill>
+              <a:srgbClr val="FF0000"/>
+            </a:solidFill>
+            <a:tailEnd type="triangle"/>
+          </a:ln>
+        </p:spPr>
+        <p:style>
+          <a:lnRef idx="1">
+            <a:schemeClr val="accent1"/>
+          </a:lnRef>
+          <a:fillRef idx="0">
+            <a:schemeClr val="accent1"/>
+          </a:fillRef>
+          <a:effectRef idx="0">
+            <a:schemeClr val="accent1"/>
+          </a:effectRef>
+          <a:fontRef idx="minor">
+            <a:schemeClr val="tx1"/>
+          </a:fontRef>
+        </p:style>
+      </p:cxnSp>
+      <p:sp>
+        <p:nvSpPr>
+          <p:cNvPr id="6" name="Elipse 5">
+            <a:extLst>
+              <a:ext uri="{FF2B5EF4-FFF2-40B4-BE49-F238E27FC236}">
+                <a16:creationId xmlns:a16="http://schemas.microsoft.com/office/drawing/2014/main" id="{340CD63C-4DBC-4C03-90E3-5CF18D8D9E26}"/>
+              </a:ext>
+            </a:extLst>
+          </p:cNvPr>
+          <p:cNvSpPr/>
+          <p:nvPr/>
+        </p:nvSpPr>
+        <p:spPr>
+          <a:xfrm>
+            <a:off x="6228678" y="4776395"/>
+            <a:ext cx="2775473" cy="1764254"/>
+          </a:xfrm>
+          <a:prstGeom prst="ellipse">
+            <a:avLst/>
+          </a:prstGeom>
+          <a:solidFill>
+            <a:srgbClr val="FFFF00"/>
+          </a:solidFill>
+          <a:ln w="38100">
+            <a:solidFill>
+              <a:srgbClr val="FF0000"/>
+            </a:solidFill>
+          </a:ln>
+        </p:spPr>
+        <p:style>
+          <a:lnRef idx="2">
+            <a:schemeClr val="accent1">
+              <a:shade val="50000"/>
+            </a:schemeClr>
+          </a:lnRef>
+          <a:fillRef idx="1">
+            <a:schemeClr val="accent1"/>
+          </a:fillRef>
+          <a:effectRef idx="0">
+            <a:schemeClr val="accent1"/>
+          </a:effectRef>
+          <a:fontRef idx="minor">
+            <a:schemeClr val="lt1"/>
+          </a:fontRef>
+        </p:style>
+        <p:txBody>
+          <a:bodyPr rot="0" spcFirstLastPara="0" vertOverflow="overflow" horzOverflow="overflow" vert="horz" wrap="square" lIns="91440" tIns="45720" rIns="91440" bIns="45720" numCol="1" spcCol="0" rtlCol="0" fromWordArt="0" anchor="ctr" anchorCtr="0" forceAA="0" compatLnSpc="1">
+            <a:prstTxWarp prst="textNoShape">
+              <a:avLst/>
+            </a:prstTxWarp>
+            <a:noAutofit/>
+          </a:bodyPr>
+          <a:lstStyle/>
+          <a:p>
+            <a:pPr algn="ctr"/>
+            <a:r>
+              <a:rPr lang="pt-BR" sz="2400" dirty="0">
+                <a:solidFill>
+                  <a:schemeClr val="tx1"/>
+                </a:solidFill>
+              </a:rPr>
+              <a:t>Abrir espaço aqui</a:t>
+            </a:r>
+          </a:p>
+        </p:txBody>
+      </p:sp>
     </p:spTree>
     <p:extLst>
       <p:ext uri="{BB962C8B-B14F-4D97-AF65-F5344CB8AC3E}">
-        <p14:creationId xmlns:p14="http://schemas.microsoft.com/office/powerpoint/2010/main" val="1321045942"/>
+        <p14:creationId xmlns:p14="http://schemas.microsoft.com/office/powerpoint/2010/main" val="3719728769"/>
       </p:ext>
     </p:extLst>
   </p:cSld>
@@ -8184,10 +8965,101 @@
           <a:chExt cx="0" cy="0"/>
         </a:xfrm>
       </p:grpSpPr>
+      <p:pic>
+        <p:nvPicPr>
+          <p:cNvPr id="2" name="Imagem 1">
+            <a:extLst>
+              <a:ext uri="{FF2B5EF4-FFF2-40B4-BE49-F238E27FC236}">
+                <a16:creationId xmlns:a16="http://schemas.microsoft.com/office/drawing/2014/main" id="{59F9E9E8-0C1B-47BC-9BDE-F6D2D1E5DD10}"/>
+              </a:ext>
+            </a:extLst>
+          </p:cNvPr>
+          <p:cNvPicPr>
+            <a:picLocks noChangeAspect="1"/>
+          </p:cNvPicPr>
+          <p:nvPr/>
+        </p:nvPicPr>
+        <p:blipFill>
+          <a:blip r:embed="rId2"/>
+          <a:stretch>
+            <a:fillRect/>
+          </a:stretch>
+        </p:blipFill>
+        <p:spPr>
+          <a:xfrm>
+            <a:off x="1569788" y="-659190"/>
+            <a:ext cx="9052423" cy="8176381"/>
+          </a:xfrm>
+          <a:prstGeom prst="rect">
+            <a:avLst/>
+          </a:prstGeom>
+        </p:spPr>
+      </p:pic>
+      <p:sp>
+        <p:nvSpPr>
+          <p:cNvPr id="3" name="Retângulo 2">
+            <a:extLst>
+              <a:ext uri="{FF2B5EF4-FFF2-40B4-BE49-F238E27FC236}">
+                <a16:creationId xmlns:a16="http://schemas.microsoft.com/office/drawing/2014/main" id="{11A1A19F-E295-4D55-BCF6-CA4191C2394A}"/>
+              </a:ext>
+            </a:extLst>
+          </p:cNvPr>
+          <p:cNvSpPr/>
+          <p:nvPr/>
+        </p:nvSpPr>
+        <p:spPr>
+          <a:xfrm>
+            <a:off x="2657139" y="3775934"/>
+            <a:ext cx="5776856" cy="1613647"/>
+          </a:xfrm>
+          <a:prstGeom prst="rect">
+            <a:avLst/>
+          </a:prstGeom>
+          <a:noFill/>
+          <a:ln w="38100">
+            <a:solidFill>
+              <a:srgbClr val="FF0000"/>
+            </a:solidFill>
+          </a:ln>
+        </p:spPr>
+        <p:style>
+          <a:lnRef idx="2">
+            <a:schemeClr val="accent1">
+              <a:shade val="50000"/>
+            </a:schemeClr>
+          </a:lnRef>
+          <a:fillRef idx="1">
+            <a:schemeClr val="accent1"/>
+          </a:fillRef>
+          <a:effectRef idx="0">
+            <a:schemeClr val="accent1"/>
+          </a:effectRef>
+          <a:fontRef idx="minor">
+            <a:schemeClr val="lt1"/>
+          </a:fontRef>
+        </p:style>
+        <p:txBody>
+          <a:bodyPr rot="0" spcFirstLastPara="0" vertOverflow="overflow" horzOverflow="overflow" vert="horz" wrap="square" lIns="91440" tIns="45720" rIns="91440" bIns="45720" numCol="1" spcCol="0" rtlCol="0" fromWordArt="0" anchor="ctr" anchorCtr="0" forceAA="0" compatLnSpc="1">
+            <a:prstTxWarp prst="textNoShape">
+              <a:avLst/>
+            </a:prstTxWarp>
+            <a:noAutofit/>
+          </a:bodyPr>
+          <a:lstStyle/>
+          <a:p>
+            <a:pPr algn="ctr"/>
+            <a:endParaRPr lang="pt-BR" sz="2400" dirty="0">
+              <a:solidFill>
+                <a:schemeClr val="tx1"/>
+              </a:solidFill>
+            </a:endParaRPr>
+          </a:p>
+        </p:txBody>
+      </p:sp>
     </p:spTree>
     <p:extLst>
       <p:ext uri="{BB962C8B-B14F-4D97-AF65-F5344CB8AC3E}">
-        <p14:creationId xmlns:p14="http://schemas.microsoft.com/office/powerpoint/2010/main" val="2326804189"/>
+        <p14:creationId xmlns:p14="http://schemas.microsoft.com/office/powerpoint/2010/main" val="1321045942"/>
       </p:ext>
     </p:extLst>
   </p:cSld>
@@ -8214,10 +9086,101 @@
           <a:chExt cx="0" cy="0"/>
         </a:xfrm>
       </p:grpSpPr>
+      <p:pic>
+        <p:nvPicPr>
+          <p:cNvPr id="2" name="Imagem 1">
+            <a:extLst>
+              <a:ext uri="{FF2B5EF4-FFF2-40B4-BE49-F238E27FC236}">
+                <a16:creationId xmlns:a16="http://schemas.microsoft.com/office/drawing/2014/main" id="{DF4F391D-0740-4093-8DFA-DD15CCA406A8}"/>
+              </a:ext>
+            </a:extLst>
+          </p:cNvPr>
+          <p:cNvPicPr>
+            <a:picLocks noChangeAspect="1"/>
+          </p:cNvPicPr>
+          <p:nvPr/>
+        </p:nvPicPr>
+        <p:blipFill>
+          <a:blip r:embed="rId2"/>
+          <a:stretch>
+            <a:fillRect/>
+          </a:stretch>
+        </p:blipFill>
+        <p:spPr>
+          <a:xfrm>
+            <a:off x="338838" y="-1018594"/>
+            <a:ext cx="11514325" cy="8895186"/>
+          </a:xfrm>
+          <a:prstGeom prst="rect">
+            <a:avLst/>
+          </a:prstGeom>
+        </p:spPr>
+      </p:pic>
+      <p:sp>
+        <p:nvSpPr>
+          <p:cNvPr id="3" name="Retângulo 2">
+            <a:extLst>
+              <a:ext uri="{FF2B5EF4-FFF2-40B4-BE49-F238E27FC236}">
+                <a16:creationId xmlns:a16="http://schemas.microsoft.com/office/drawing/2014/main" id="{33507F0A-5606-4AE8-9EE6-36745B751F43}"/>
+              </a:ext>
+            </a:extLst>
+          </p:cNvPr>
+          <p:cNvSpPr/>
+          <p:nvPr/>
+        </p:nvSpPr>
+        <p:spPr>
+          <a:xfrm>
+            <a:off x="1570616" y="3765175"/>
+            <a:ext cx="9617338" cy="1699709"/>
+          </a:xfrm>
+          <a:prstGeom prst="rect">
+            <a:avLst/>
+          </a:prstGeom>
+          <a:noFill/>
+          <a:ln w="38100">
+            <a:solidFill>
+              <a:srgbClr val="FF0000"/>
+            </a:solidFill>
+          </a:ln>
+        </p:spPr>
+        <p:style>
+          <a:lnRef idx="2">
+            <a:schemeClr val="accent1">
+              <a:shade val="50000"/>
+            </a:schemeClr>
+          </a:lnRef>
+          <a:fillRef idx="1">
+            <a:schemeClr val="accent1"/>
+          </a:fillRef>
+          <a:effectRef idx="0">
+            <a:schemeClr val="accent1"/>
+          </a:effectRef>
+          <a:fontRef idx="minor">
+            <a:schemeClr val="lt1"/>
+          </a:fontRef>
+        </p:style>
+        <p:txBody>
+          <a:bodyPr rot="0" spcFirstLastPara="0" vertOverflow="overflow" horzOverflow="overflow" vert="horz" wrap="square" lIns="91440" tIns="45720" rIns="91440" bIns="45720" numCol="1" spcCol="0" rtlCol="0" fromWordArt="0" anchor="ctr" anchorCtr="0" forceAA="0" compatLnSpc="1">
+            <a:prstTxWarp prst="textNoShape">
+              <a:avLst/>
+            </a:prstTxWarp>
+            <a:noAutofit/>
+          </a:bodyPr>
+          <a:lstStyle/>
+          <a:p>
+            <a:pPr algn="ctr"/>
+            <a:endParaRPr lang="pt-BR" sz="2400" dirty="0">
+              <a:solidFill>
+                <a:schemeClr val="tx1"/>
+              </a:solidFill>
+            </a:endParaRPr>
+          </a:p>
+        </p:txBody>
+      </p:sp>
     </p:spTree>
     <p:extLst>
       <p:ext uri="{BB962C8B-B14F-4D97-AF65-F5344CB8AC3E}">
-        <p14:creationId xmlns:p14="http://schemas.microsoft.com/office/powerpoint/2010/main" val="2171393650"/>
+        <p14:creationId xmlns:p14="http://schemas.microsoft.com/office/powerpoint/2010/main" val="2326804189"/>
       </p:ext>
     </p:extLst>
   </p:cSld>
@@ -8244,6 +9207,96 @@
           <a:chExt cx="0" cy="0"/>
         </a:xfrm>
       </p:grpSpPr>
+      <p:pic>
+        <p:nvPicPr>
+          <p:cNvPr id="2" name="Imagem 1">
+            <a:extLst>
+              <a:ext uri="{FF2B5EF4-FFF2-40B4-BE49-F238E27FC236}">
+                <a16:creationId xmlns:a16="http://schemas.microsoft.com/office/drawing/2014/main" id="{F2DC5D48-501A-4373-8093-580B3B1C82C1}"/>
+              </a:ext>
+            </a:extLst>
+          </p:cNvPr>
+          <p:cNvPicPr>
+            <a:picLocks noChangeAspect="1"/>
+          </p:cNvPicPr>
+          <p:nvPr/>
+        </p:nvPicPr>
+        <p:blipFill>
+          <a:blip r:embed="rId2"/>
+          <a:stretch>
+            <a:fillRect/>
+          </a:stretch>
+        </p:blipFill>
+        <p:spPr>
+          <a:xfrm>
+            <a:off x="3214285" y="264353"/>
+            <a:ext cx="5763429" cy="6329293"/>
+          </a:xfrm>
+          <a:prstGeom prst="rect">
+            <a:avLst/>
+          </a:prstGeom>
+        </p:spPr>
+      </p:pic>
+    </p:spTree>
+    <p:extLst>
+      <p:ext uri="{BB962C8B-B14F-4D97-AF65-F5344CB8AC3E}">
+        <p14:creationId xmlns:p14="http://schemas.microsoft.com/office/powerpoint/2010/main" val="2171393650"/>
+      </p:ext>
+    </p:extLst>
+  </p:cSld>
+  <p:clrMapOvr>
+    <a:masterClrMapping/>
+  </p:clrMapOvr>
+</p:sld>
+</file>
+
+<file path=ppt/slides/slide47.xml><?xml version="1.0" encoding="utf-8"?>
+<p:sld xmlns:a="http://schemas.openxmlformats.org/drawingml/2006/main" xmlns:r="http://schemas.openxmlformats.org/officeDocument/2006/relationships" xmlns:p="http://schemas.openxmlformats.org/presentationml/2006/main">
+  <p:cSld>
+    <p:spTree>
+      <p:nvGrpSpPr>
+        <p:cNvPr id="1" name=""/>
+        <p:cNvGrpSpPr/>
+        <p:nvPr/>
+      </p:nvGrpSpPr>
+      <p:grpSpPr>
+        <a:xfrm>
+          <a:off x="0" y="0"/>
+          <a:ext cx="0" cy="0"/>
+          <a:chOff x="0" y="0"/>
+          <a:chExt cx="0" cy="0"/>
+        </a:xfrm>
+      </p:grpSpPr>
+      <p:pic>
+        <p:nvPicPr>
+          <p:cNvPr id="2" name="Imagem 1">
+            <a:extLst>
+              <a:ext uri="{FF2B5EF4-FFF2-40B4-BE49-F238E27FC236}">
+                <a16:creationId xmlns:a16="http://schemas.microsoft.com/office/drawing/2014/main" id="{2F5783F4-FBEB-4A2E-95C5-463A51CE9679}"/>
+              </a:ext>
+            </a:extLst>
+          </p:cNvPr>
+          <p:cNvPicPr>
+            <a:picLocks noChangeAspect="1"/>
+          </p:cNvPicPr>
+          <p:nvPr/>
+        </p:nvPicPr>
+        <p:blipFill>
+          <a:blip r:embed="rId2"/>
+          <a:stretch>
+            <a:fillRect/>
+          </a:stretch>
+        </p:blipFill>
+        <p:spPr>
+          <a:xfrm>
+            <a:off x="1885950" y="295275"/>
+            <a:ext cx="8420100" cy="6267450"/>
+          </a:xfrm>
+          <a:prstGeom prst="rect">
+            <a:avLst/>
+          </a:prstGeom>
+        </p:spPr>
+      </p:pic>
     </p:spTree>
     <p:extLst>
       <p:ext uri="{BB962C8B-B14F-4D97-AF65-F5344CB8AC3E}">
@@ -8257,7 +9310,7 @@
 </p:sld>
 </file>
 
-<file path=ppt/slides/slide47.xml><?xml version="1.0" encoding="utf-8"?>
+<file path=ppt/slides/slide48.xml><?xml version="1.0" encoding="utf-8"?>
 <p:sld xmlns:a="http://schemas.openxmlformats.org/drawingml/2006/main" xmlns:r="http://schemas.openxmlformats.org/officeDocument/2006/relationships" xmlns:p="http://schemas.openxmlformats.org/presentationml/2006/main">
   <p:cSld>
     <p:spTree>
@@ -8287,7 +9340,7 @@
 </p:sld>
 </file>
 
-<file path=ppt/slides/slide48.xml><?xml version="1.0" encoding="utf-8"?>
+<file path=ppt/slides/slide49.xml><?xml version="1.0" encoding="utf-8"?>
 <p:sld xmlns:a="http://schemas.openxmlformats.org/drawingml/2006/main" xmlns:r="http://schemas.openxmlformats.org/officeDocument/2006/relationships" xmlns:p="http://schemas.openxmlformats.org/presentationml/2006/main">
   <p:cSld>
     <p:spTree>
@@ -8317,7 +9370,109 @@
 </p:sld>
 </file>
 
-<file path=ppt/slides/slide49.xml><?xml version="1.0" encoding="utf-8"?>
+<file path=ppt/slides/slide5.xml><?xml version="1.0" encoding="utf-8"?>
+<p:sld xmlns:a="http://schemas.openxmlformats.org/drawingml/2006/main" xmlns:r="http://schemas.openxmlformats.org/officeDocument/2006/relationships" xmlns:p="http://schemas.openxmlformats.org/presentationml/2006/main">
+  <p:cSld>
+    <p:spTree>
+      <p:nvGrpSpPr>
+        <p:cNvPr id="1" name=""/>
+        <p:cNvGrpSpPr/>
+        <p:nvPr/>
+      </p:nvGrpSpPr>
+      <p:grpSpPr>
+        <a:xfrm>
+          <a:off x="0" y="0"/>
+          <a:ext cx="0" cy="0"/>
+          <a:chOff x="0" y="0"/>
+          <a:chExt cx="0" cy="0"/>
+        </a:xfrm>
+      </p:grpSpPr>
+      <p:pic>
+        <p:nvPicPr>
+          <p:cNvPr id="4" name="Imagem 3">
+            <a:extLst>
+              <a:ext uri="{FF2B5EF4-FFF2-40B4-BE49-F238E27FC236}">
+                <a16:creationId xmlns:a16="http://schemas.microsoft.com/office/drawing/2014/main" id="{F760613C-C9E7-4286-B0AC-0A84B4EE83B6}"/>
+              </a:ext>
+            </a:extLst>
+          </p:cNvPr>
+          <p:cNvPicPr>
+            <a:picLocks noChangeAspect="1"/>
+          </p:cNvPicPr>
+          <p:nvPr/>
+        </p:nvPicPr>
+        <p:blipFill>
+          <a:blip r:embed="rId2"/>
+          <a:stretch>
+            <a:fillRect/>
+          </a:stretch>
+        </p:blipFill>
+        <p:spPr>
+          <a:xfrm>
+            <a:off x="1399519" y="151942"/>
+            <a:ext cx="9392961" cy="6554115"/>
+          </a:xfrm>
+          <a:prstGeom prst="rect">
+            <a:avLst/>
+          </a:prstGeom>
+        </p:spPr>
+      </p:pic>
+      <p:cxnSp>
+        <p:nvCxnSpPr>
+          <p:cNvPr id="9" name="Conector de Seta Reta 8">
+            <a:extLst>
+              <a:ext uri="{FF2B5EF4-FFF2-40B4-BE49-F238E27FC236}">
+                <a16:creationId xmlns:a16="http://schemas.microsoft.com/office/drawing/2014/main" id="{6EE079D5-B950-4596-A9E7-DA7F787C1D5B}"/>
+              </a:ext>
+            </a:extLst>
+          </p:cNvPr>
+          <p:cNvCxnSpPr/>
+          <p:nvPr/>
+        </p:nvCxnSpPr>
+        <p:spPr>
+          <a:xfrm flipV="1">
+            <a:off x="5190067" y="4174067"/>
+            <a:ext cx="592666" cy="753533"/>
+          </a:xfrm>
+          <a:prstGeom prst="straightConnector1">
+            <a:avLst/>
+          </a:prstGeom>
+          <a:ln w="38100">
+            <a:solidFill>
+              <a:srgbClr val="FF0000"/>
+            </a:solidFill>
+            <a:tailEnd type="triangle"/>
+          </a:ln>
+        </p:spPr>
+        <p:style>
+          <a:lnRef idx="1">
+            <a:schemeClr val="accent1"/>
+          </a:lnRef>
+          <a:fillRef idx="0">
+            <a:schemeClr val="accent1"/>
+          </a:fillRef>
+          <a:effectRef idx="0">
+            <a:schemeClr val="accent1"/>
+          </a:effectRef>
+          <a:fontRef idx="minor">
+            <a:schemeClr val="tx1"/>
+          </a:fontRef>
+        </p:style>
+      </p:cxnSp>
+    </p:spTree>
+    <p:extLst>
+      <p:ext uri="{BB962C8B-B14F-4D97-AF65-F5344CB8AC3E}">
+        <p14:creationId xmlns:p14="http://schemas.microsoft.com/office/powerpoint/2010/main" val="1666525398"/>
+      </p:ext>
+    </p:extLst>
+  </p:cSld>
+  <p:clrMapOvr>
+    <a:masterClrMapping/>
+  </p:clrMapOvr>
+</p:sld>
+</file>
+
+<file path=ppt/slides/slide50.xml><?xml version="1.0" encoding="utf-8"?>
 <p:sld xmlns:a="http://schemas.openxmlformats.org/drawingml/2006/main" xmlns:r="http://schemas.openxmlformats.org/officeDocument/2006/relationships" xmlns:p="http://schemas.openxmlformats.org/presentationml/2006/main">
   <p:cSld>
     <p:spTree>
@@ -8347,67 +9502,7 @@
 </p:sld>
 </file>
 
-<file path=ppt/slides/slide5.xml><?xml version="1.0" encoding="utf-8"?>
-<p:sld xmlns:a="http://schemas.openxmlformats.org/drawingml/2006/main" xmlns:r="http://schemas.openxmlformats.org/officeDocument/2006/relationships" xmlns:p="http://schemas.openxmlformats.org/presentationml/2006/main">
-  <p:cSld>
-    <p:spTree>
-      <p:nvGrpSpPr>
-        <p:cNvPr id="1" name=""/>
-        <p:cNvGrpSpPr/>
-        <p:nvPr/>
-      </p:nvGrpSpPr>
-      <p:grpSpPr>
-        <a:xfrm>
-          <a:off x="0" y="0"/>
-          <a:ext cx="0" cy="0"/>
-          <a:chOff x="0" y="0"/>
-          <a:chExt cx="0" cy="0"/>
-        </a:xfrm>
-      </p:grpSpPr>
-      <p:pic>
-        <p:nvPicPr>
-          <p:cNvPr id="4" name="Imagem 3">
-            <a:extLst>
-              <a:ext uri="{FF2B5EF4-FFF2-40B4-BE49-F238E27FC236}">
-                <a16:creationId xmlns:a16="http://schemas.microsoft.com/office/drawing/2014/main" id="{D1ED29FA-B4D6-4D95-A7C8-47911184245E}"/>
-              </a:ext>
-            </a:extLst>
-          </p:cNvPr>
-          <p:cNvPicPr>
-            <a:picLocks noChangeAspect="1"/>
-          </p:cNvPicPr>
-          <p:nvPr/>
-        </p:nvPicPr>
-        <p:blipFill>
-          <a:blip r:embed="rId2"/>
-          <a:stretch>
-            <a:fillRect/>
-          </a:stretch>
-        </p:blipFill>
-        <p:spPr>
-          <a:xfrm>
-            <a:off x="1524000" y="247650"/>
-            <a:ext cx="9144000" cy="6362700"/>
-          </a:xfrm>
-          <a:prstGeom prst="rect">
-            <a:avLst/>
-          </a:prstGeom>
-        </p:spPr>
-      </p:pic>
-    </p:spTree>
-    <p:extLst>
-      <p:ext uri="{BB962C8B-B14F-4D97-AF65-F5344CB8AC3E}">
-        <p14:creationId xmlns:p14="http://schemas.microsoft.com/office/powerpoint/2010/main" val="665745114"/>
-      </p:ext>
-    </p:extLst>
-  </p:cSld>
-  <p:clrMapOvr>
-    <a:masterClrMapping/>
-  </p:clrMapOvr>
-</p:sld>
-</file>
-
-<file path=ppt/slides/slide50.xml><?xml version="1.0" encoding="utf-8"?>
+<file path=ppt/slides/slide51.xml><?xml version="1.0" encoding="utf-8"?>
 <p:sld xmlns:a="http://schemas.openxmlformats.org/drawingml/2006/main" xmlns:r="http://schemas.openxmlformats.org/officeDocument/2006/relationships" xmlns:p="http://schemas.openxmlformats.org/presentationml/2006/main">
   <p:cSld>
     <p:spTree>
@@ -8437,7 +9532,7 @@
 </p:sld>
 </file>
 
-<file path=ppt/slides/slide51.xml><?xml version="1.0" encoding="utf-8"?>
+<file path=ppt/slides/slide52.xml><?xml version="1.0" encoding="utf-8"?>
 <p:sld xmlns:a="http://schemas.openxmlformats.org/drawingml/2006/main" xmlns:r="http://schemas.openxmlformats.org/officeDocument/2006/relationships" xmlns:p="http://schemas.openxmlformats.org/presentationml/2006/main">
   <p:cSld>
     <p:spTree>
@@ -8467,7 +9562,7 @@
 </p:sld>
 </file>
 
-<file path=ppt/slides/slide52.xml><?xml version="1.0" encoding="utf-8"?>
+<file path=ppt/slides/slide53.xml><?xml version="1.0" encoding="utf-8"?>
 <p:sld xmlns:a="http://schemas.openxmlformats.org/drawingml/2006/main" xmlns:r="http://schemas.openxmlformats.org/officeDocument/2006/relationships" xmlns:p="http://schemas.openxmlformats.org/presentationml/2006/main">
   <p:cSld>
     <p:spTree>
@@ -8497,7 +9592,7 @@
 </p:sld>
 </file>
 
-<file path=ppt/slides/slide53.xml><?xml version="1.0" encoding="utf-8"?>
+<file path=ppt/slides/slide54.xml><?xml version="1.0" encoding="utf-8"?>
 <p:sld xmlns:a="http://schemas.openxmlformats.org/drawingml/2006/main" xmlns:r="http://schemas.openxmlformats.org/officeDocument/2006/relationships" xmlns:p="http://schemas.openxmlformats.org/presentationml/2006/main">
   <p:cSld>
     <p:spTree>
@@ -8527,7 +9622,7 @@
 </p:sld>
 </file>
 
-<file path=ppt/slides/slide54.xml><?xml version="1.0" encoding="utf-8"?>
+<file path=ppt/slides/slide55.xml><?xml version="1.0" encoding="utf-8"?>
 <p:sld xmlns:a="http://schemas.openxmlformats.org/drawingml/2006/main" xmlns:r="http://schemas.openxmlformats.org/officeDocument/2006/relationships" xmlns:p="http://schemas.openxmlformats.org/presentationml/2006/main">
   <p:cSld>
     <p:spTree>
@@ -8557,7 +9652,7 @@
 </p:sld>
 </file>
 
-<file path=ppt/slides/slide55.xml><?xml version="1.0" encoding="utf-8"?>
+<file path=ppt/slides/slide56.xml><?xml version="1.0" encoding="utf-8"?>
 <p:sld xmlns:a="http://schemas.openxmlformats.org/drawingml/2006/main" xmlns:r="http://schemas.openxmlformats.org/officeDocument/2006/relationships" xmlns:p="http://schemas.openxmlformats.org/presentationml/2006/main">
   <p:cSld>
     <p:spTree>
@@ -8587,7 +9682,7 @@
 </p:sld>
 </file>
 
-<file path=ppt/slides/slide56.xml><?xml version="1.0" encoding="utf-8"?>
+<file path=ppt/slides/slide57.xml><?xml version="1.0" encoding="utf-8"?>
 <p:sld xmlns:a="http://schemas.openxmlformats.org/drawingml/2006/main" xmlns:r="http://schemas.openxmlformats.org/officeDocument/2006/relationships" xmlns:p="http://schemas.openxmlformats.org/presentationml/2006/main">
   <p:cSld>
     <p:spTree>
@@ -8617,7 +9712,7 @@
 </p:sld>
 </file>
 
-<file path=ppt/slides/slide57.xml><?xml version="1.0" encoding="utf-8"?>
+<file path=ppt/slides/slide58.xml><?xml version="1.0" encoding="utf-8"?>
 <p:sld xmlns:a="http://schemas.openxmlformats.org/drawingml/2006/main" xmlns:r="http://schemas.openxmlformats.org/officeDocument/2006/relationships" xmlns:p="http://schemas.openxmlformats.org/presentationml/2006/main">
   <p:cSld>
     <p:spTree>
@@ -8647,7 +9742,7 @@
 </p:sld>
 </file>
 
-<file path=ppt/slides/slide58.xml><?xml version="1.0" encoding="utf-8"?>
+<file path=ppt/slides/slide59.xml><?xml version="1.0" encoding="utf-8"?>
 <p:sld xmlns:a="http://schemas.openxmlformats.org/drawingml/2006/main" xmlns:r="http://schemas.openxmlformats.org/officeDocument/2006/relationships" xmlns:p="http://schemas.openxmlformats.org/presentationml/2006/main">
   <p:cSld>
     <p:spTree>
@@ -8677,7 +9772,67 @@
 </p:sld>
 </file>
 
-<file path=ppt/slides/slide59.xml><?xml version="1.0" encoding="utf-8"?>
+<file path=ppt/slides/slide6.xml><?xml version="1.0" encoding="utf-8"?>
+<p:sld xmlns:a="http://schemas.openxmlformats.org/drawingml/2006/main" xmlns:r="http://schemas.openxmlformats.org/officeDocument/2006/relationships" xmlns:p="http://schemas.openxmlformats.org/presentationml/2006/main">
+  <p:cSld>
+    <p:spTree>
+      <p:nvGrpSpPr>
+        <p:cNvPr id="1" name=""/>
+        <p:cNvGrpSpPr/>
+        <p:nvPr/>
+      </p:nvGrpSpPr>
+      <p:grpSpPr>
+        <a:xfrm>
+          <a:off x="0" y="0"/>
+          <a:ext cx="0" cy="0"/>
+          <a:chOff x="0" y="0"/>
+          <a:chExt cx="0" cy="0"/>
+        </a:xfrm>
+      </p:grpSpPr>
+      <p:pic>
+        <p:nvPicPr>
+          <p:cNvPr id="4" name="Imagem 3">
+            <a:extLst>
+              <a:ext uri="{FF2B5EF4-FFF2-40B4-BE49-F238E27FC236}">
+                <a16:creationId xmlns:a16="http://schemas.microsoft.com/office/drawing/2014/main" id="{D1ED29FA-B4D6-4D95-A7C8-47911184245E}"/>
+              </a:ext>
+            </a:extLst>
+          </p:cNvPr>
+          <p:cNvPicPr>
+            <a:picLocks noChangeAspect="1"/>
+          </p:cNvPicPr>
+          <p:nvPr/>
+        </p:nvPicPr>
+        <p:blipFill>
+          <a:blip r:embed="rId2"/>
+          <a:stretch>
+            <a:fillRect/>
+          </a:stretch>
+        </p:blipFill>
+        <p:spPr>
+          <a:xfrm>
+            <a:off x="1524000" y="247650"/>
+            <a:ext cx="9144000" cy="6362700"/>
+          </a:xfrm>
+          <a:prstGeom prst="rect">
+            <a:avLst/>
+          </a:prstGeom>
+        </p:spPr>
+      </p:pic>
+    </p:spTree>
+    <p:extLst>
+      <p:ext uri="{BB962C8B-B14F-4D97-AF65-F5344CB8AC3E}">
+        <p14:creationId xmlns:p14="http://schemas.microsoft.com/office/powerpoint/2010/main" val="665745114"/>
+      </p:ext>
+    </p:extLst>
+  </p:cSld>
+  <p:clrMapOvr>
+    <a:masterClrMapping/>
+  </p:clrMapOvr>
+</p:sld>
+</file>
+
+<file path=ppt/slides/slide60.xml><?xml version="1.0" encoding="utf-8"?>
 <p:sld xmlns:a="http://schemas.openxmlformats.org/drawingml/2006/main" xmlns:r="http://schemas.openxmlformats.org/officeDocument/2006/relationships" xmlns:p="http://schemas.openxmlformats.org/presentationml/2006/main">
   <p:cSld>
     <p:spTree>
@@ -8707,311 +9862,7 @@
 </p:sld>
 </file>
 
-<file path=ppt/slides/slide6.xml><?xml version="1.0" encoding="utf-8"?>
-<p:sld xmlns:a="http://schemas.openxmlformats.org/drawingml/2006/main" xmlns:r="http://schemas.openxmlformats.org/officeDocument/2006/relationships" xmlns:p="http://schemas.openxmlformats.org/presentationml/2006/main">
-  <p:cSld>
-    <p:spTree>
-      <p:nvGrpSpPr>
-        <p:cNvPr id="1" name=""/>
-        <p:cNvGrpSpPr/>
-        <p:nvPr/>
-      </p:nvGrpSpPr>
-      <p:grpSpPr>
-        <a:xfrm>
-          <a:off x="0" y="0"/>
-          <a:ext cx="0" cy="0"/>
-          <a:chOff x="0" y="0"/>
-          <a:chExt cx="0" cy="0"/>
-        </a:xfrm>
-      </p:grpSpPr>
-      <p:pic>
-        <p:nvPicPr>
-          <p:cNvPr id="5" name="Imagem 4">
-            <a:extLst>
-              <a:ext uri="{FF2B5EF4-FFF2-40B4-BE49-F238E27FC236}">
-                <a16:creationId xmlns:a16="http://schemas.microsoft.com/office/drawing/2014/main" id="{202EE865-94D5-47EF-AE18-4EB60D844BFA}"/>
-              </a:ext>
-            </a:extLst>
-          </p:cNvPr>
-          <p:cNvPicPr>
-            <a:picLocks noChangeAspect="1"/>
-          </p:cNvPicPr>
-          <p:nvPr/>
-        </p:nvPicPr>
-        <p:blipFill>
-          <a:blip r:embed="rId2">
-            <a:extLst>
-              <a:ext uri="{28A0092B-C50C-407E-A947-70E740481C1C}">
-                <a14:useLocalDpi xmlns:a14="http://schemas.microsoft.com/office/drawing/2010/main" val="0"/>
-              </a:ext>
-            </a:extLst>
-          </a:blip>
-          <a:stretch>
-            <a:fillRect/>
-          </a:stretch>
-        </p:blipFill>
-        <p:spPr>
-          <a:xfrm>
-            <a:off x="3836728" y="634787"/>
-            <a:ext cx="6628071" cy="5452397"/>
-          </a:xfrm>
-          <a:prstGeom prst="rect">
-            <a:avLst/>
-          </a:prstGeom>
-        </p:spPr>
-      </p:pic>
-      <p:sp>
-        <p:nvSpPr>
-          <p:cNvPr id="6" name="Elipse 5">
-            <a:extLst>
-              <a:ext uri="{FF2B5EF4-FFF2-40B4-BE49-F238E27FC236}">
-                <a16:creationId xmlns:a16="http://schemas.microsoft.com/office/drawing/2014/main" id="{E309B2CA-C7C2-43C2-B108-1937C66DDD80}"/>
-              </a:ext>
-            </a:extLst>
-          </p:cNvPr>
-          <p:cNvSpPr/>
-          <p:nvPr/>
-        </p:nvSpPr>
-        <p:spPr>
-          <a:xfrm>
-            <a:off x="1092200" y="664633"/>
-            <a:ext cx="2201333" cy="1397000"/>
-          </a:xfrm>
-          <a:prstGeom prst="ellipse">
-            <a:avLst/>
-          </a:prstGeom>
-          <a:solidFill>
-            <a:srgbClr val="FFFF00"/>
-          </a:solidFill>
-          <a:ln w="38100">
-            <a:solidFill>
-              <a:srgbClr val="FF0000"/>
-            </a:solidFill>
-          </a:ln>
-        </p:spPr>
-        <p:style>
-          <a:lnRef idx="2">
-            <a:schemeClr val="accent1">
-              <a:shade val="50000"/>
-            </a:schemeClr>
-          </a:lnRef>
-          <a:fillRef idx="1">
-            <a:schemeClr val="accent1"/>
-          </a:fillRef>
-          <a:effectRef idx="0">
-            <a:schemeClr val="accent1"/>
-          </a:effectRef>
-          <a:fontRef idx="minor">
-            <a:schemeClr val="lt1"/>
-          </a:fontRef>
-        </p:style>
-        <p:txBody>
-          <a:bodyPr rot="0" spcFirstLastPara="0" vertOverflow="overflow" horzOverflow="overflow" vert="horz" wrap="square" lIns="91440" tIns="45720" rIns="91440" bIns="45720" numCol="1" spcCol="0" rtlCol="0" fromWordArt="0" anchor="ctr" anchorCtr="0" forceAA="0" compatLnSpc="1">
-            <a:prstTxWarp prst="textNoShape">
-              <a:avLst/>
-            </a:prstTxWarp>
-            <a:noAutofit/>
-          </a:bodyPr>
-          <a:lstStyle/>
-          <a:p>
-            <a:pPr algn="ctr"/>
-            <a:r>
-              <a:rPr lang="pt-BR" sz="2400" dirty="0">
-                <a:solidFill>
-                  <a:schemeClr val="tx1"/>
-                </a:solidFill>
-              </a:rPr>
-              <a:t>Criar a pasta </a:t>
-            </a:r>
-            <a:r>
-              <a:rPr lang="pt-BR" sz="2400" b="1" dirty="0">
-                <a:solidFill>
-                  <a:schemeClr val="tx1"/>
-                </a:solidFill>
-              </a:rPr>
-              <a:t>aula01</a:t>
-            </a:r>
-          </a:p>
-        </p:txBody>
-      </p:sp>
-      <p:cxnSp>
-        <p:nvCxnSpPr>
-          <p:cNvPr id="8" name="Conector de Seta Reta 7">
-            <a:extLst>
-              <a:ext uri="{FF2B5EF4-FFF2-40B4-BE49-F238E27FC236}">
-                <a16:creationId xmlns:a16="http://schemas.microsoft.com/office/drawing/2014/main" id="{F2E83457-20CC-41C3-8498-F453A4C31CF9}"/>
-              </a:ext>
-            </a:extLst>
-          </p:cNvPr>
-          <p:cNvCxnSpPr>
-            <a:stCxn id="6" idx="6"/>
-          </p:cNvCxnSpPr>
-          <p:nvPr/>
-        </p:nvCxnSpPr>
-        <p:spPr>
-          <a:xfrm>
-            <a:off x="3293533" y="1363133"/>
-            <a:ext cx="2159000" cy="1346200"/>
-          </a:xfrm>
-          <a:prstGeom prst="straightConnector1">
-            <a:avLst/>
-          </a:prstGeom>
-          <a:ln w="38100">
-            <a:solidFill>
-              <a:srgbClr val="FF0000"/>
-            </a:solidFill>
-            <a:tailEnd type="triangle"/>
-          </a:ln>
-        </p:spPr>
-        <p:style>
-          <a:lnRef idx="1">
-            <a:schemeClr val="accent1"/>
-          </a:lnRef>
-          <a:fillRef idx="0">
-            <a:schemeClr val="accent1"/>
-          </a:fillRef>
-          <a:effectRef idx="0">
-            <a:schemeClr val="accent1"/>
-          </a:effectRef>
-          <a:fontRef idx="minor">
-            <a:schemeClr val="tx1"/>
-          </a:fontRef>
-        </p:style>
-      </p:cxnSp>
-      <p:sp>
-        <p:nvSpPr>
-          <p:cNvPr id="9" name="Retângulo 8">
-            <a:extLst>
-              <a:ext uri="{FF2B5EF4-FFF2-40B4-BE49-F238E27FC236}">
-                <a16:creationId xmlns:a16="http://schemas.microsoft.com/office/drawing/2014/main" id="{C040F8E5-1535-4BD1-BCCC-8178BFB717F1}"/>
-              </a:ext>
-            </a:extLst>
-          </p:cNvPr>
-          <p:cNvSpPr/>
-          <p:nvPr/>
-        </p:nvSpPr>
-        <p:spPr>
-          <a:xfrm>
-            <a:off x="931333" y="3509153"/>
-            <a:ext cx="2269067" cy="1287215"/>
-          </a:xfrm>
-          <a:prstGeom prst="rect">
-            <a:avLst/>
-          </a:prstGeom>
-          <a:solidFill>
-            <a:srgbClr val="FFFF00"/>
-          </a:solidFill>
-          <a:ln w="38100">
-            <a:solidFill>
-              <a:srgbClr val="FF0000"/>
-            </a:solidFill>
-          </a:ln>
-        </p:spPr>
-        <p:style>
-          <a:lnRef idx="2">
-            <a:schemeClr val="accent1">
-              <a:shade val="50000"/>
-            </a:schemeClr>
-          </a:lnRef>
-          <a:fillRef idx="1">
-            <a:schemeClr val="accent1"/>
-          </a:fillRef>
-          <a:effectRef idx="0">
-            <a:schemeClr val="accent1"/>
-          </a:effectRef>
-          <a:fontRef idx="minor">
-            <a:schemeClr val="lt1"/>
-          </a:fontRef>
-        </p:style>
-        <p:txBody>
-          <a:bodyPr rot="0" spcFirstLastPara="0" vertOverflow="overflow" horzOverflow="overflow" vert="horz" wrap="square" lIns="91440" tIns="45720" rIns="91440" bIns="45720" numCol="1" spcCol="0" rtlCol="0" fromWordArt="0" anchor="ctr" anchorCtr="0" forceAA="0" compatLnSpc="1">
-            <a:prstTxWarp prst="textNoShape">
-              <a:avLst/>
-            </a:prstTxWarp>
-            <a:noAutofit/>
-          </a:bodyPr>
-          <a:lstStyle/>
-          <a:p>
-            <a:pPr algn="ctr"/>
-            <a:r>
-              <a:rPr lang="pt-BR" sz="2400" dirty="0">
-                <a:solidFill>
-                  <a:schemeClr val="tx1"/>
-                </a:solidFill>
-              </a:rPr>
-              <a:t>Criar este arquivos dentro da pasta</a:t>
-            </a:r>
-          </a:p>
-        </p:txBody>
-      </p:sp>
-      <p:sp>
-        <p:nvSpPr>
-          <p:cNvPr id="10" name="Chave Esquerda 9">
-            <a:extLst>
-              <a:ext uri="{FF2B5EF4-FFF2-40B4-BE49-F238E27FC236}">
-                <a16:creationId xmlns:a16="http://schemas.microsoft.com/office/drawing/2014/main" id="{D24D8ECE-2DA3-4721-90BF-86543A44CBD2}"/>
-              </a:ext>
-            </a:extLst>
-          </p:cNvPr>
-          <p:cNvSpPr/>
-          <p:nvPr/>
-        </p:nvSpPr>
-        <p:spPr>
-          <a:xfrm>
-            <a:off x="3361267" y="3048001"/>
-            <a:ext cx="1974061" cy="2319866"/>
-          </a:xfrm>
-          <a:prstGeom prst="leftBrace">
-            <a:avLst>
-              <a:gd name="adj1" fmla="val 48859"/>
-              <a:gd name="adj2" fmla="val 50000"/>
-            </a:avLst>
-          </a:prstGeom>
-          <a:ln w="38100">
-            <a:solidFill>
-              <a:srgbClr val="FF0000"/>
-            </a:solidFill>
-            <a:headEnd type="none" w="med" len="med"/>
-            <a:tailEnd type="none" w="med" len="med"/>
-          </a:ln>
-        </p:spPr>
-        <p:style>
-          <a:lnRef idx="1">
-            <a:schemeClr val="accent1"/>
-          </a:lnRef>
-          <a:fillRef idx="0">
-            <a:schemeClr val="accent1"/>
-          </a:fillRef>
-          <a:effectRef idx="0">
-            <a:schemeClr val="accent1"/>
-          </a:effectRef>
-          <a:fontRef idx="minor">
-            <a:schemeClr val="tx1"/>
-          </a:fontRef>
-        </p:style>
-        <p:txBody>
-          <a:bodyPr rtlCol="0" anchor="ctr"/>
-          <a:lstStyle/>
-          <a:p>
-            <a:pPr algn="ctr"/>
-            <a:endParaRPr lang="pt-BR"/>
-          </a:p>
-        </p:txBody>
-      </p:sp>
-    </p:spTree>
-    <p:extLst>
-      <p:ext uri="{BB962C8B-B14F-4D97-AF65-F5344CB8AC3E}">
-        <p14:creationId xmlns:p14="http://schemas.microsoft.com/office/powerpoint/2010/main" val="438723860"/>
-      </p:ext>
-    </p:extLst>
-  </p:cSld>
-  <p:clrMapOvr>
-    <a:masterClrMapping/>
-  </p:clrMapOvr>
-</p:sld>
-</file>
-
-<file path=ppt/slides/slide60.xml><?xml version="1.0" encoding="utf-8"?>
+<file path=ppt/slides/slide61.xml><?xml version="1.0" encoding="utf-8"?>
 <p:sld xmlns:a="http://schemas.openxmlformats.org/drawingml/2006/main" xmlns:r="http://schemas.openxmlformats.org/officeDocument/2006/relationships" xmlns:p="http://schemas.openxmlformats.org/presentationml/2006/main">
   <p:cSld>
     <p:spTree>
@@ -9041,7 +9892,7 @@
 </p:sld>
 </file>
 
-<file path=ppt/slides/slide61.xml><?xml version="1.0" encoding="utf-8"?>
+<file path=ppt/slides/slide62.xml><?xml version="1.0" encoding="utf-8"?>
 <p:sld xmlns:a="http://schemas.openxmlformats.org/drawingml/2006/main" xmlns:r="http://schemas.openxmlformats.org/officeDocument/2006/relationships" xmlns:p="http://schemas.openxmlformats.org/presentationml/2006/main">
   <p:cSld>
     <p:spTree>
@@ -9071,7 +9922,7 @@
 </p:sld>
 </file>
 
-<file path=ppt/slides/slide62.xml><?xml version="1.0" encoding="utf-8"?>
+<file path=ppt/slides/slide63.xml><?xml version="1.0" encoding="utf-8"?>
 <p:sld xmlns:a="http://schemas.openxmlformats.org/drawingml/2006/main" xmlns:r="http://schemas.openxmlformats.org/officeDocument/2006/relationships" xmlns:p="http://schemas.openxmlformats.org/presentationml/2006/main">
   <p:cSld>
     <p:spTree>
@@ -9101,7 +9952,7 @@
 </p:sld>
 </file>
 
-<file path=ppt/slides/slide63.xml><?xml version="1.0" encoding="utf-8"?>
+<file path=ppt/slides/slide64.xml><?xml version="1.0" encoding="utf-8"?>
 <p:sld xmlns:a="http://schemas.openxmlformats.org/drawingml/2006/main" xmlns:r="http://schemas.openxmlformats.org/officeDocument/2006/relationships" xmlns:p="http://schemas.openxmlformats.org/presentationml/2006/main">
   <p:cSld>
     <p:spTree>
@@ -9131,7 +9982,7 @@
 </p:sld>
 </file>
 
-<file path=ppt/slides/slide64.xml><?xml version="1.0" encoding="utf-8"?>
+<file path=ppt/slides/slide65.xml><?xml version="1.0" encoding="utf-8"?>
 <p:sld xmlns:a="http://schemas.openxmlformats.org/drawingml/2006/main" xmlns:r="http://schemas.openxmlformats.org/officeDocument/2006/relationships" xmlns:p="http://schemas.openxmlformats.org/presentationml/2006/main">
   <p:cSld>
     <p:spTree>
@@ -9161,7 +10012,7 @@
 </p:sld>
 </file>
 
-<file path=ppt/slides/slide65.xml><?xml version="1.0" encoding="utf-8"?>
+<file path=ppt/slides/slide66.xml><?xml version="1.0" encoding="utf-8"?>
 <p:sld xmlns:a="http://schemas.openxmlformats.org/drawingml/2006/main" xmlns:r="http://schemas.openxmlformats.org/officeDocument/2006/relationships" xmlns:p="http://schemas.openxmlformats.org/presentationml/2006/main">
   <p:cSld>
     <p:spTree>
@@ -9191,7 +10042,7 @@
 </p:sld>
 </file>
 
-<file path=ppt/slides/slide66.xml><?xml version="1.0" encoding="utf-8"?>
+<file path=ppt/slides/slide67.xml><?xml version="1.0" encoding="utf-8"?>
 <p:sld xmlns:a="http://schemas.openxmlformats.org/drawingml/2006/main" xmlns:r="http://schemas.openxmlformats.org/officeDocument/2006/relationships" xmlns:p="http://schemas.openxmlformats.org/presentationml/2006/main">
   <p:cSld>
     <p:spTree>
@@ -9240,10 +10091,10 @@
       </p:grpSpPr>
       <p:pic>
         <p:nvPicPr>
-          <p:cNvPr id="4" name="Imagem 3">
-            <a:extLst>
-              <a:ext uri="{FF2B5EF4-FFF2-40B4-BE49-F238E27FC236}">
-                <a16:creationId xmlns:a16="http://schemas.microsoft.com/office/drawing/2014/main" id="{8BA66785-338F-4833-9B70-A62119E8F4C5}"/>
+          <p:cNvPr id="5" name="Imagem 4">
+            <a:extLst>
+              <a:ext uri="{FF2B5EF4-FFF2-40B4-BE49-F238E27FC236}">
+                <a16:creationId xmlns:a16="http://schemas.microsoft.com/office/drawing/2014/main" id="{202EE865-94D5-47EF-AE18-4EB60D844BFA}"/>
               </a:ext>
             </a:extLst>
           </p:cNvPr>
@@ -9266,62 +10117,20 @@
         </p:blipFill>
         <p:spPr>
           <a:xfrm>
-            <a:off x="390795" y="313055"/>
-            <a:ext cx="4775883" cy="3928746"/>
+            <a:off x="3836728" y="634787"/>
+            <a:ext cx="6628071" cy="5452397"/>
           </a:xfrm>
           <a:prstGeom prst="rect">
             <a:avLst/>
           </a:prstGeom>
         </p:spPr>
       </p:pic>
-      <p:cxnSp>
-        <p:nvCxnSpPr>
-          <p:cNvPr id="6" name="Conector de Seta Reta 5">
-            <a:extLst>
-              <a:ext uri="{FF2B5EF4-FFF2-40B4-BE49-F238E27FC236}">
-                <a16:creationId xmlns:a16="http://schemas.microsoft.com/office/drawing/2014/main" id="{8D72E83A-7687-4D0D-B378-2A7AC2EE280C}"/>
-              </a:ext>
-            </a:extLst>
-          </p:cNvPr>
-          <p:cNvCxnSpPr/>
-          <p:nvPr/>
-        </p:nvCxnSpPr>
-        <p:spPr>
-          <a:xfrm flipH="1" flipV="1">
-            <a:off x="2743200" y="3547533"/>
-            <a:ext cx="2624667" cy="1651000"/>
-          </a:xfrm>
-          <a:prstGeom prst="straightConnector1">
-            <a:avLst/>
-          </a:prstGeom>
-          <a:ln w="38100">
-            <a:solidFill>
-              <a:srgbClr val="FF0000"/>
-            </a:solidFill>
-            <a:tailEnd type="triangle"/>
-          </a:ln>
-        </p:spPr>
-        <p:style>
-          <a:lnRef idx="1">
-            <a:schemeClr val="accent1"/>
-          </a:lnRef>
-          <a:fillRef idx="0">
-            <a:schemeClr val="accent1"/>
-          </a:fillRef>
-          <a:effectRef idx="0">
-            <a:schemeClr val="accent1"/>
-          </a:effectRef>
-          <a:fontRef idx="minor">
-            <a:schemeClr val="tx1"/>
-          </a:fontRef>
-        </p:style>
-      </p:cxnSp>
-      <p:sp>
-        <p:nvSpPr>
-          <p:cNvPr id="7" name="Elipse 6">
-            <a:extLst>
-              <a:ext uri="{FF2B5EF4-FFF2-40B4-BE49-F238E27FC236}">
-                <a16:creationId xmlns:a16="http://schemas.microsoft.com/office/drawing/2014/main" id="{B95ED23D-184C-4426-AEBA-9A0FA3E58EF9}"/>
+      <p:sp>
+        <p:nvSpPr>
+          <p:cNvPr id="6" name="Elipse 5">
+            <a:extLst>
+              <a:ext uri="{FF2B5EF4-FFF2-40B4-BE49-F238E27FC236}">
+                <a16:creationId xmlns:a16="http://schemas.microsoft.com/office/drawing/2014/main" id="{E309B2CA-C7C2-43C2-B108-1937C66DDD80}"/>
               </a:ext>
             </a:extLst>
           </p:cNvPr>
@@ -9330,8 +10139,8 @@
         </p:nvSpPr>
         <p:spPr>
           <a:xfrm>
-            <a:off x="5257800" y="4555067"/>
-            <a:ext cx="2362200" cy="1744133"/>
+            <a:off x="1092200" y="664633"/>
+            <a:ext cx="2201333" cy="1397000"/>
           </a:xfrm>
           <a:prstGeom prst="ellipse">
             <a:avLst/>
@@ -9372,20 +10181,192 @@
           <a:p>
             <a:pPr algn="ctr"/>
             <a:r>
-              <a:rPr lang="pt-BR" sz="3600" dirty="0">
+              <a:rPr lang="pt-BR" sz="2400" dirty="0">
                 <a:solidFill>
                   <a:schemeClr val="tx1"/>
                 </a:solidFill>
               </a:rPr>
-              <a:t>Clique 2x</a:t>
+              <a:t>Criar a pasta </a:t>
             </a:r>
+            <a:r>
+              <a:rPr lang="pt-BR" sz="2400" b="1" dirty="0">
+                <a:solidFill>
+                  <a:schemeClr val="tx1"/>
+                </a:solidFill>
+              </a:rPr>
+              <a:t>aula01</a:t>
+            </a:r>
+          </a:p>
+        </p:txBody>
+      </p:sp>
+      <p:cxnSp>
+        <p:nvCxnSpPr>
+          <p:cNvPr id="8" name="Conector de Seta Reta 7">
+            <a:extLst>
+              <a:ext uri="{FF2B5EF4-FFF2-40B4-BE49-F238E27FC236}">
+                <a16:creationId xmlns:a16="http://schemas.microsoft.com/office/drawing/2014/main" id="{F2E83457-20CC-41C3-8498-F453A4C31CF9}"/>
+              </a:ext>
+            </a:extLst>
+          </p:cNvPr>
+          <p:cNvCxnSpPr>
+            <a:stCxn id="6" idx="6"/>
+          </p:cNvCxnSpPr>
+          <p:nvPr/>
+        </p:nvCxnSpPr>
+        <p:spPr>
+          <a:xfrm>
+            <a:off x="3293533" y="1363133"/>
+            <a:ext cx="2159000" cy="1346200"/>
+          </a:xfrm>
+          <a:prstGeom prst="straightConnector1">
+            <a:avLst/>
+          </a:prstGeom>
+          <a:ln w="38100">
+            <a:solidFill>
+              <a:srgbClr val="FF0000"/>
+            </a:solidFill>
+            <a:tailEnd type="triangle"/>
+          </a:ln>
+        </p:spPr>
+        <p:style>
+          <a:lnRef idx="1">
+            <a:schemeClr val="accent1"/>
+          </a:lnRef>
+          <a:fillRef idx="0">
+            <a:schemeClr val="accent1"/>
+          </a:fillRef>
+          <a:effectRef idx="0">
+            <a:schemeClr val="accent1"/>
+          </a:effectRef>
+          <a:fontRef idx="minor">
+            <a:schemeClr val="tx1"/>
+          </a:fontRef>
+        </p:style>
+      </p:cxnSp>
+      <p:sp>
+        <p:nvSpPr>
+          <p:cNvPr id="9" name="Retângulo 8">
+            <a:extLst>
+              <a:ext uri="{FF2B5EF4-FFF2-40B4-BE49-F238E27FC236}">
+                <a16:creationId xmlns:a16="http://schemas.microsoft.com/office/drawing/2014/main" id="{C040F8E5-1535-4BD1-BCCC-8178BFB717F1}"/>
+              </a:ext>
+            </a:extLst>
+          </p:cNvPr>
+          <p:cNvSpPr/>
+          <p:nvPr/>
+        </p:nvSpPr>
+        <p:spPr>
+          <a:xfrm>
+            <a:off x="931333" y="3509153"/>
+            <a:ext cx="2269067" cy="1287215"/>
+          </a:xfrm>
+          <a:prstGeom prst="rect">
+            <a:avLst/>
+          </a:prstGeom>
+          <a:solidFill>
+            <a:srgbClr val="FFFF00"/>
+          </a:solidFill>
+          <a:ln w="38100">
+            <a:solidFill>
+              <a:srgbClr val="FF0000"/>
+            </a:solidFill>
+          </a:ln>
+        </p:spPr>
+        <p:style>
+          <a:lnRef idx="2">
+            <a:schemeClr val="accent1">
+              <a:shade val="50000"/>
+            </a:schemeClr>
+          </a:lnRef>
+          <a:fillRef idx="1">
+            <a:schemeClr val="accent1"/>
+          </a:fillRef>
+          <a:effectRef idx="0">
+            <a:schemeClr val="accent1"/>
+          </a:effectRef>
+          <a:fontRef idx="minor">
+            <a:schemeClr val="lt1"/>
+          </a:fontRef>
+        </p:style>
+        <p:txBody>
+          <a:bodyPr rot="0" spcFirstLastPara="0" vertOverflow="overflow" horzOverflow="overflow" vert="horz" wrap="square" lIns="91440" tIns="45720" rIns="91440" bIns="45720" numCol="1" spcCol="0" rtlCol="0" fromWordArt="0" anchor="ctr" anchorCtr="0" forceAA="0" compatLnSpc="1">
+            <a:prstTxWarp prst="textNoShape">
+              <a:avLst/>
+            </a:prstTxWarp>
+            <a:noAutofit/>
+          </a:bodyPr>
+          <a:lstStyle/>
+          <a:p>
+            <a:pPr algn="ctr"/>
+            <a:r>
+              <a:rPr lang="pt-BR" sz="2400" dirty="0">
+                <a:solidFill>
+                  <a:schemeClr val="tx1"/>
+                </a:solidFill>
+              </a:rPr>
+              <a:t>Criar este arquivos dentro da pasta</a:t>
+            </a:r>
+          </a:p>
+        </p:txBody>
+      </p:sp>
+      <p:sp>
+        <p:nvSpPr>
+          <p:cNvPr id="10" name="Chave Esquerda 9">
+            <a:extLst>
+              <a:ext uri="{FF2B5EF4-FFF2-40B4-BE49-F238E27FC236}">
+                <a16:creationId xmlns:a16="http://schemas.microsoft.com/office/drawing/2014/main" id="{D24D8ECE-2DA3-4721-90BF-86543A44CBD2}"/>
+              </a:ext>
+            </a:extLst>
+          </p:cNvPr>
+          <p:cNvSpPr/>
+          <p:nvPr/>
+        </p:nvSpPr>
+        <p:spPr>
+          <a:xfrm>
+            <a:off x="3361267" y="3048001"/>
+            <a:ext cx="1974061" cy="2319866"/>
+          </a:xfrm>
+          <a:prstGeom prst="leftBrace">
+            <a:avLst>
+              <a:gd name="adj1" fmla="val 48859"/>
+              <a:gd name="adj2" fmla="val 50000"/>
+            </a:avLst>
+          </a:prstGeom>
+          <a:ln w="38100">
+            <a:solidFill>
+              <a:srgbClr val="FF0000"/>
+            </a:solidFill>
+            <a:headEnd type="none" w="med" len="med"/>
+            <a:tailEnd type="none" w="med" len="med"/>
+          </a:ln>
+        </p:spPr>
+        <p:style>
+          <a:lnRef idx="1">
+            <a:schemeClr val="accent1"/>
+          </a:lnRef>
+          <a:fillRef idx="0">
+            <a:schemeClr val="accent1"/>
+          </a:fillRef>
+          <a:effectRef idx="0">
+            <a:schemeClr val="accent1"/>
+          </a:effectRef>
+          <a:fontRef idx="minor">
+            <a:schemeClr val="tx1"/>
+          </a:fontRef>
+        </p:style>
+        <p:txBody>
+          <a:bodyPr rtlCol="0" anchor="ctr"/>
+          <a:lstStyle/>
+          <a:p>
+            <a:pPr algn="ctr"/>
+            <a:endParaRPr lang="pt-BR"/>
           </a:p>
         </p:txBody>
       </p:sp>
     </p:spTree>
     <p:extLst>
       <p:ext uri="{BB962C8B-B14F-4D97-AF65-F5344CB8AC3E}">
-        <p14:creationId xmlns:p14="http://schemas.microsoft.com/office/powerpoint/2010/main" val="1589384984"/>
+        <p14:creationId xmlns:p14="http://schemas.microsoft.com/office/powerpoint/2010/main" val="438723860"/>
       </p:ext>
     </p:extLst>
   </p:cSld>
@@ -9414,10 +10395,10 @@
       </p:grpSpPr>
       <p:pic>
         <p:nvPicPr>
-          <p:cNvPr id="2" name="Imagem 1">
-            <a:extLst>
-              <a:ext uri="{FF2B5EF4-FFF2-40B4-BE49-F238E27FC236}">
-                <a16:creationId xmlns:a16="http://schemas.microsoft.com/office/drawing/2014/main" id="{6295471F-8323-4DC5-B578-E41C0B93E0D6}"/>
+          <p:cNvPr id="4" name="Imagem 3">
+            <a:extLst>
+              <a:ext uri="{FF2B5EF4-FFF2-40B4-BE49-F238E27FC236}">
+                <a16:creationId xmlns:a16="http://schemas.microsoft.com/office/drawing/2014/main" id="{8BA66785-338F-4833-9B70-A62119E8F4C5}"/>
               </a:ext>
             </a:extLst>
           </p:cNvPr>
@@ -9427,27 +10408,75 @@
           <p:nvPr/>
         </p:nvPicPr>
         <p:blipFill>
-          <a:blip r:embed="rId2"/>
+          <a:blip r:embed="rId2">
+            <a:extLst>
+              <a:ext uri="{28A0092B-C50C-407E-A947-70E740481C1C}">
+                <a14:useLocalDpi xmlns:a14="http://schemas.microsoft.com/office/drawing/2010/main" val="0"/>
+              </a:ext>
+            </a:extLst>
+          </a:blip>
           <a:stretch>
             <a:fillRect/>
           </a:stretch>
         </p:blipFill>
         <p:spPr>
           <a:xfrm>
-            <a:off x="607659" y="974240"/>
-            <a:ext cx="10976681" cy="4909521"/>
+            <a:off x="390795" y="313055"/>
+            <a:ext cx="4775883" cy="3928746"/>
           </a:xfrm>
           <a:prstGeom prst="rect">
             <a:avLst/>
           </a:prstGeom>
         </p:spPr>
       </p:pic>
-      <p:sp>
-        <p:nvSpPr>
-          <p:cNvPr id="3" name="Elipse 2">
-            <a:extLst>
-              <a:ext uri="{FF2B5EF4-FFF2-40B4-BE49-F238E27FC236}">
-                <a16:creationId xmlns:a16="http://schemas.microsoft.com/office/drawing/2014/main" id="{3F6D98E8-25A9-44F4-B484-0FB5A19471D1}"/>
+      <p:cxnSp>
+        <p:nvCxnSpPr>
+          <p:cNvPr id="6" name="Conector de Seta Reta 5">
+            <a:extLst>
+              <a:ext uri="{FF2B5EF4-FFF2-40B4-BE49-F238E27FC236}">
+                <a16:creationId xmlns:a16="http://schemas.microsoft.com/office/drawing/2014/main" id="{8D72E83A-7687-4D0D-B378-2A7AC2EE280C}"/>
+              </a:ext>
+            </a:extLst>
+          </p:cNvPr>
+          <p:cNvCxnSpPr/>
+          <p:nvPr/>
+        </p:nvCxnSpPr>
+        <p:spPr>
+          <a:xfrm flipH="1" flipV="1">
+            <a:off x="2743200" y="3547533"/>
+            <a:ext cx="2624667" cy="1651000"/>
+          </a:xfrm>
+          <a:prstGeom prst="straightConnector1">
+            <a:avLst/>
+          </a:prstGeom>
+          <a:ln w="38100">
+            <a:solidFill>
+              <a:srgbClr val="FF0000"/>
+            </a:solidFill>
+            <a:tailEnd type="triangle"/>
+          </a:ln>
+        </p:spPr>
+        <p:style>
+          <a:lnRef idx="1">
+            <a:schemeClr val="accent1"/>
+          </a:lnRef>
+          <a:fillRef idx="0">
+            <a:schemeClr val="accent1"/>
+          </a:fillRef>
+          <a:effectRef idx="0">
+            <a:schemeClr val="accent1"/>
+          </a:effectRef>
+          <a:fontRef idx="minor">
+            <a:schemeClr val="tx1"/>
+          </a:fontRef>
+        </p:style>
+      </p:cxnSp>
+      <p:sp>
+        <p:nvSpPr>
+          <p:cNvPr id="7" name="Elipse 6">
+            <a:extLst>
+              <a:ext uri="{FF2B5EF4-FFF2-40B4-BE49-F238E27FC236}">
+                <a16:creationId xmlns:a16="http://schemas.microsoft.com/office/drawing/2014/main" id="{B95ED23D-184C-4426-AEBA-9A0FA3E58EF9}"/>
               </a:ext>
             </a:extLst>
           </p:cNvPr>
@@ -9456,8 +10485,8 @@
         </p:nvSpPr>
         <p:spPr>
           <a:xfrm>
-            <a:off x="8483600" y="5469467"/>
-            <a:ext cx="2201333" cy="1295400"/>
+            <a:off x="5257800" y="4555067"/>
+            <a:ext cx="2362200" cy="1744133"/>
           </a:xfrm>
           <a:prstGeom prst="ellipse">
             <a:avLst/>
@@ -9498,12 +10527,12 @@
           <a:p>
             <a:pPr algn="ctr"/>
             <a:r>
-              <a:rPr lang="pt-BR" sz="2400" dirty="0">
+              <a:rPr lang="pt-BR" sz="3600" dirty="0">
                 <a:solidFill>
                   <a:schemeClr val="tx1"/>
                 </a:solidFill>
               </a:rPr>
-              <a:t>Criar a estrutura do HTML</a:t>
+              <a:t>Clique 2x</a:t>
             </a:r>
           </a:p>
         </p:txBody>
@@ -9511,7 +10540,7 @@
     </p:spTree>
     <p:extLst>
       <p:ext uri="{BB962C8B-B14F-4D97-AF65-F5344CB8AC3E}">
-        <p14:creationId xmlns:p14="http://schemas.microsoft.com/office/powerpoint/2010/main" val="423399386"/>
+        <p14:creationId xmlns:p14="http://schemas.microsoft.com/office/powerpoint/2010/main" val="1589384984"/>
       </p:ext>
     </p:extLst>
   </p:cSld>
@@ -9543,7 +10572,7 @@
           <p:cNvPr id="2" name="Imagem 1">
             <a:extLst>
               <a:ext uri="{FF2B5EF4-FFF2-40B4-BE49-F238E27FC236}">
-                <a16:creationId xmlns:a16="http://schemas.microsoft.com/office/drawing/2014/main" id="{ADC57CD0-EA74-4D33-AAD8-DAC97AB587E8}"/>
+                <a16:creationId xmlns:a16="http://schemas.microsoft.com/office/drawing/2014/main" id="{6295471F-8323-4DC5-B578-E41C0B93E0D6}"/>
               </a:ext>
             </a:extLst>
           </p:cNvPr>
@@ -9560,8 +10589,8 @@
         </p:blipFill>
         <p:spPr>
           <a:xfrm>
-            <a:off x="1658160" y="253350"/>
-            <a:ext cx="8875681" cy="6351300"/>
+            <a:off x="607659" y="974240"/>
+            <a:ext cx="10976681" cy="4909521"/>
           </a:xfrm>
           <a:prstGeom prst="rect">
             <a:avLst/>
@@ -9570,10 +10599,10 @@
       </p:pic>
       <p:sp>
         <p:nvSpPr>
-          <p:cNvPr id="5" name="Retângulo 4">
-            <a:extLst>
-              <a:ext uri="{FF2B5EF4-FFF2-40B4-BE49-F238E27FC236}">
-                <a16:creationId xmlns:a16="http://schemas.microsoft.com/office/drawing/2014/main" id="{C0664FDA-D969-4C23-87EC-6D305AF47995}"/>
+          <p:cNvPr id="3" name="Elipse 2">
+            <a:extLst>
+              <a:ext uri="{FF2B5EF4-FFF2-40B4-BE49-F238E27FC236}">
+                <a16:creationId xmlns:a16="http://schemas.microsoft.com/office/drawing/2014/main" id="{3F6D98E8-25A9-44F4-B484-0FB5A19471D1}"/>
               </a:ext>
             </a:extLst>
           </p:cNvPr>
@@ -9582,193 +10611,10 @@
         </p:nvSpPr>
         <p:spPr>
           <a:xfrm>
-            <a:off x="2929467" y="2252133"/>
-            <a:ext cx="3225800" cy="355600"/>
-          </a:xfrm>
-          <a:prstGeom prst="rect">
-            <a:avLst/>
-          </a:prstGeom>
-          <a:noFill/>
-          <a:ln w="38100">
-            <a:solidFill>
-              <a:srgbClr val="FF0000"/>
-            </a:solidFill>
-          </a:ln>
-        </p:spPr>
-        <p:style>
-          <a:lnRef idx="2">
-            <a:schemeClr val="accent1">
-              <a:shade val="50000"/>
-            </a:schemeClr>
-          </a:lnRef>
-          <a:fillRef idx="1">
-            <a:schemeClr val="accent1"/>
-          </a:fillRef>
-          <a:effectRef idx="0">
-            <a:schemeClr val="accent1"/>
-          </a:effectRef>
-          <a:fontRef idx="minor">
-            <a:schemeClr val="lt1"/>
-          </a:fontRef>
-        </p:style>
-        <p:txBody>
-          <a:bodyPr rot="0" spcFirstLastPara="0" vertOverflow="overflow" horzOverflow="overflow" vert="horz" wrap="square" lIns="91440" tIns="45720" rIns="91440" bIns="45720" numCol="1" spcCol="0" rtlCol="0" fromWordArt="0" anchor="ctr" anchorCtr="0" forceAA="0" compatLnSpc="1">
-            <a:prstTxWarp prst="textNoShape">
-              <a:avLst/>
-            </a:prstTxWarp>
-            <a:noAutofit/>
-          </a:bodyPr>
-          <a:lstStyle/>
-          <a:p>
-            <a:pPr algn="ctr"/>
-            <a:endParaRPr lang="pt-BR" sz="2400" dirty="0">
-              <a:solidFill>
-                <a:schemeClr val="tx1"/>
-              </a:solidFill>
-            </a:endParaRPr>
-          </a:p>
-        </p:txBody>
-      </p:sp>
-      <p:sp>
-        <p:nvSpPr>
-          <p:cNvPr id="6" name="Retângulo 5">
-            <a:extLst>
-              <a:ext uri="{FF2B5EF4-FFF2-40B4-BE49-F238E27FC236}">
-                <a16:creationId xmlns:a16="http://schemas.microsoft.com/office/drawing/2014/main" id="{4A8E366E-2A74-48BF-9BAE-48E22FB4A0EB}"/>
-              </a:ext>
-            </a:extLst>
-          </p:cNvPr>
-          <p:cNvSpPr/>
-          <p:nvPr/>
-        </p:nvSpPr>
-        <p:spPr>
-          <a:xfrm>
-            <a:off x="2929467" y="2785532"/>
-            <a:ext cx="3225800" cy="1464735"/>
-          </a:xfrm>
-          <a:prstGeom prst="rect">
-            <a:avLst/>
-          </a:prstGeom>
-          <a:noFill/>
-          <a:ln w="38100">
-            <a:solidFill>
-              <a:srgbClr val="FF0000"/>
-            </a:solidFill>
-          </a:ln>
-        </p:spPr>
-        <p:style>
-          <a:lnRef idx="2">
-            <a:schemeClr val="accent1">
-              <a:shade val="50000"/>
-            </a:schemeClr>
-          </a:lnRef>
-          <a:fillRef idx="1">
-            <a:schemeClr val="accent1"/>
-          </a:fillRef>
-          <a:effectRef idx="0">
-            <a:schemeClr val="accent1"/>
-          </a:effectRef>
-          <a:fontRef idx="minor">
-            <a:schemeClr val="lt1"/>
-          </a:fontRef>
-        </p:style>
-        <p:txBody>
-          <a:bodyPr rot="0" spcFirstLastPara="0" vertOverflow="overflow" horzOverflow="overflow" vert="horz" wrap="square" lIns="91440" tIns="45720" rIns="91440" bIns="45720" numCol="1" spcCol="0" rtlCol="0" fromWordArt="0" anchor="ctr" anchorCtr="0" forceAA="0" compatLnSpc="1">
-            <a:prstTxWarp prst="textNoShape">
-              <a:avLst/>
-            </a:prstTxWarp>
-            <a:noAutofit/>
-          </a:bodyPr>
-          <a:lstStyle/>
-          <a:p>
-            <a:pPr algn="ctr"/>
-            <a:endParaRPr lang="pt-BR" sz="2400" dirty="0">
-              <a:solidFill>
-                <a:schemeClr val="tx1"/>
-              </a:solidFill>
-            </a:endParaRPr>
-          </a:p>
-        </p:txBody>
-      </p:sp>
-      <p:sp>
-        <p:nvSpPr>
-          <p:cNvPr id="7" name="Retângulo 6">
-            <a:extLst>
-              <a:ext uri="{FF2B5EF4-FFF2-40B4-BE49-F238E27FC236}">
-                <a16:creationId xmlns:a16="http://schemas.microsoft.com/office/drawing/2014/main" id="{0773BF49-8904-49F9-8595-954C2D0E468A}"/>
-              </a:ext>
-            </a:extLst>
-          </p:cNvPr>
-          <p:cNvSpPr/>
-          <p:nvPr/>
-        </p:nvSpPr>
-        <p:spPr>
-          <a:xfrm>
-            <a:off x="2929467" y="5317067"/>
-            <a:ext cx="3225800" cy="516466"/>
-          </a:xfrm>
-          <a:prstGeom prst="rect">
-            <a:avLst/>
-          </a:prstGeom>
-          <a:noFill/>
-          <a:ln w="38100">
-            <a:solidFill>
-              <a:srgbClr val="FF0000"/>
-            </a:solidFill>
-          </a:ln>
-        </p:spPr>
-        <p:style>
-          <a:lnRef idx="2">
-            <a:schemeClr val="accent1">
-              <a:shade val="50000"/>
-            </a:schemeClr>
-          </a:lnRef>
-          <a:fillRef idx="1">
-            <a:schemeClr val="accent1"/>
-          </a:fillRef>
-          <a:effectRef idx="0">
-            <a:schemeClr val="accent1"/>
-          </a:effectRef>
-          <a:fontRef idx="minor">
-            <a:schemeClr val="lt1"/>
-          </a:fontRef>
-        </p:style>
-        <p:txBody>
-          <a:bodyPr rot="0" spcFirstLastPara="0" vertOverflow="overflow" horzOverflow="overflow" vert="horz" wrap="square" lIns="91440" tIns="45720" rIns="91440" bIns="45720" numCol="1" spcCol="0" rtlCol="0" fromWordArt="0" anchor="ctr" anchorCtr="0" forceAA="0" compatLnSpc="1">
-            <a:prstTxWarp prst="textNoShape">
-              <a:avLst/>
-            </a:prstTxWarp>
-            <a:noAutofit/>
-          </a:bodyPr>
-          <a:lstStyle/>
-          <a:p>
-            <a:pPr algn="ctr"/>
-            <a:endParaRPr lang="pt-BR" sz="2400" dirty="0">
-              <a:solidFill>
-                <a:schemeClr val="tx1"/>
-              </a:solidFill>
-            </a:endParaRPr>
-          </a:p>
-        </p:txBody>
-      </p:sp>
-      <p:sp>
-        <p:nvSpPr>
-          <p:cNvPr id="8" name="Seta: para a Direita 7">
-            <a:extLst>
-              <a:ext uri="{FF2B5EF4-FFF2-40B4-BE49-F238E27FC236}">
-                <a16:creationId xmlns:a16="http://schemas.microsoft.com/office/drawing/2014/main" id="{926D046C-9BBB-41CD-BC70-43BC33C3F890}"/>
-              </a:ext>
-            </a:extLst>
-          </p:cNvPr>
-          <p:cNvSpPr/>
-          <p:nvPr/>
-        </p:nvSpPr>
-        <p:spPr>
-          <a:xfrm>
-            <a:off x="321733" y="1718733"/>
-            <a:ext cx="2150534" cy="1464735"/>
-          </a:xfrm>
-          <a:prstGeom prst="rightArrow">
+            <a:off x="8483600" y="5469467"/>
+            <a:ext cx="2201333" cy="1295400"/>
+          </a:xfrm>
+          <a:prstGeom prst="ellipse">
             <a:avLst/>
           </a:prstGeom>
           <a:solidFill>
@@ -9807,144 +10653,12 @@
           <a:p>
             <a:pPr algn="ctr"/>
             <a:r>
-              <a:rPr lang="pt-BR" sz="2000" dirty="0">
+              <a:rPr lang="pt-BR" sz="2400" dirty="0">
                 <a:solidFill>
                   <a:schemeClr val="tx1"/>
                 </a:solidFill>
               </a:rPr>
-              <a:t>Titulo da Página</a:t>
-            </a:r>
-          </a:p>
-        </p:txBody>
-      </p:sp>
-      <p:sp>
-        <p:nvSpPr>
-          <p:cNvPr id="9" name="Seta: para a Direita 8">
-            <a:extLst>
-              <a:ext uri="{FF2B5EF4-FFF2-40B4-BE49-F238E27FC236}">
-                <a16:creationId xmlns:a16="http://schemas.microsoft.com/office/drawing/2014/main" id="{ED1640FB-FFF5-4EC2-AA5B-EF8B3AAEADA2}"/>
-              </a:ext>
-            </a:extLst>
-          </p:cNvPr>
-          <p:cNvSpPr/>
-          <p:nvPr/>
-        </p:nvSpPr>
-        <p:spPr>
-          <a:xfrm flipH="1">
-            <a:off x="6451600" y="2785531"/>
-            <a:ext cx="2243666" cy="1464735"/>
-          </a:xfrm>
-          <a:prstGeom prst="rightArrow">
-            <a:avLst/>
-          </a:prstGeom>
-          <a:solidFill>
-            <a:srgbClr val="FFFF00"/>
-          </a:solidFill>
-          <a:ln w="38100">
-            <a:solidFill>
-              <a:srgbClr val="FF0000"/>
-            </a:solidFill>
-          </a:ln>
-        </p:spPr>
-        <p:style>
-          <a:lnRef idx="2">
-            <a:schemeClr val="accent1">
-              <a:shade val="50000"/>
-            </a:schemeClr>
-          </a:lnRef>
-          <a:fillRef idx="1">
-            <a:schemeClr val="accent1"/>
-          </a:fillRef>
-          <a:effectRef idx="0">
-            <a:schemeClr val="accent1"/>
-          </a:effectRef>
-          <a:fontRef idx="minor">
-            <a:schemeClr val="lt1"/>
-          </a:fontRef>
-        </p:style>
-        <p:txBody>
-          <a:bodyPr rot="0" spcFirstLastPara="0" vertOverflow="overflow" horzOverflow="overflow" vert="horz" wrap="square" lIns="91440" tIns="45720" rIns="91440" bIns="45720" numCol="1" spcCol="0" rtlCol="0" fromWordArt="0" anchor="ctr" anchorCtr="0" forceAA="0" compatLnSpc="1">
-            <a:prstTxWarp prst="textNoShape">
-              <a:avLst/>
-            </a:prstTxWarp>
-            <a:noAutofit/>
-          </a:bodyPr>
-          <a:lstStyle/>
-          <a:p>
-            <a:pPr algn="ctr"/>
-            <a:r>
-              <a:rPr lang="pt-BR" sz="2000" dirty="0">
-                <a:solidFill>
-                  <a:schemeClr val="tx1"/>
-                </a:solidFill>
-              </a:rPr>
-              <a:t>Área de Estilos</a:t>
-            </a:r>
-          </a:p>
-        </p:txBody>
-      </p:sp>
-      <p:sp>
-        <p:nvSpPr>
-          <p:cNvPr id="10" name="Seta: para a Direita 9">
-            <a:extLst>
-              <a:ext uri="{FF2B5EF4-FFF2-40B4-BE49-F238E27FC236}">
-                <a16:creationId xmlns:a16="http://schemas.microsoft.com/office/drawing/2014/main" id="{F56C93DE-B650-49B3-954E-185D30C7B6F7}"/>
-              </a:ext>
-            </a:extLst>
-          </p:cNvPr>
-          <p:cNvSpPr/>
-          <p:nvPr/>
-        </p:nvSpPr>
-        <p:spPr>
-          <a:xfrm>
-            <a:off x="321733" y="4842932"/>
-            <a:ext cx="2150534" cy="1464735"/>
-          </a:xfrm>
-          <a:prstGeom prst="rightArrow">
-            <a:avLst/>
-          </a:prstGeom>
-          <a:solidFill>
-            <a:srgbClr val="FFFF00"/>
-          </a:solidFill>
-          <a:ln w="38100">
-            <a:solidFill>
-              <a:srgbClr val="FF0000"/>
-            </a:solidFill>
-          </a:ln>
-        </p:spPr>
-        <p:style>
-          <a:lnRef idx="2">
-            <a:schemeClr val="accent1">
-              <a:shade val="50000"/>
-            </a:schemeClr>
-          </a:lnRef>
-          <a:fillRef idx="1">
-            <a:schemeClr val="accent1"/>
-          </a:fillRef>
-          <a:effectRef idx="0">
-            <a:schemeClr val="accent1"/>
-          </a:effectRef>
-          <a:fontRef idx="minor">
-            <a:schemeClr val="lt1"/>
-          </a:fontRef>
-        </p:style>
-        <p:txBody>
-          <a:bodyPr rot="0" spcFirstLastPara="0" vertOverflow="overflow" horzOverflow="overflow" vert="horz" wrap="square" lIns="91440" tIns="45720" rIns="91440" bIns="45720" numCol="1" spcCol="0" rtlCol="0" fromWordArt="0" anchor="ctr" anchorCtr="0" forceAA="0" compatLnSpc="1">
-            <a:prstTxWarp prst="textNoShape">
-              <a:avLst/>
-            </a:prstTxWarp>
-            <a:noAutofit/>
-          </a:bodyPr>
-          <a:lstStyle/>
-          <a:p>
-            <a:pPr algn="ctr"/>
-            <a:r>
-              <a:rPr lang="pt-BR" sz="2000" dirty="0">
-                <a:solidFill>
-                  <a:schemeClr val="tx1"/>
-                </a:solidFill>
-              </a:rPr>
-              <a:t>h1</a:t>
+              <a:t>Criar a estrutura do HTML</a:t>
             </a:r>
           </a:p>
         </p:txBody>
@@ -9952,7 +10666,7 @@
     </p:spTree>
     <p:extLst>
       <p:ext uri="{BB962C8B-B14F-4D97-AF65-F5344CB8AC3E}">
-        <p14:creationId xmlns:p14="http://schemas.microsoft.com/office/powerpoint/2010/main" val="1741291376"/>
+        <p14:creationId xmlns:p14="http://schemas.microsoft.com/office/powerpoint/2010/main" val="423399386"/>
       </p:ext>
     </p:extLst>
   </p:cSld>
